--- a/Fall 2026/Week 6 -- Scaffolding K-mer counts.pptx
+++ b/Fall 2026/Week 6 -- Scaffolding K-mer counts.pptx
@@ -5,29 +5,33 @@
     <p:sldMasterId id="2147483648" r:id="rId1"/>
   </p:sldMasterIdLst>
   <p:notesMasterIdLst>
-    <p:notesMasterId r:id="rId22"/>
+    <p:notesMasterId r:id="rId26"/>
   </p:notesMasterIdLst>
   <p:sldIdLst>
     <p:sldId id="272" r:id="rId2"/>
-    <p:sldId id="413" r:id="rId3"/>
-    <p:sldId id="534" r:id="rId4"/>
-    <p:sldId id="535" r:id="rId5"/>
-    <p:sldId id="536" r:id="rId6"/>
-    <p:sldId id="537" r:id="rId7"/>
-    <p:sldId id="538" r:id="rId8"/>
-    <p:sldId id="556" r:id="rId9"/>
-    <p:sldId id="540" r:id="rId10"/>
-    <p:sldId id="541" r:id="rId11"/>
-    <p:sldId id="542" r:id="rId12"/>
-    <p:sldId id="543" r:id="rId13"/>
-    <p:sldId id="550" r:id="rId14"/>
-    <p:sldId id="557" r:id="rId15"/>
-    <p:sldId id="551" r:id="rId16"/>
-    <p:sldId id="544" r:id="rId17"/>
-    <p:sldId id="545" r:id="rId18"/>
-    <p:sldId id="555" r:id="rId19"/>
-    <p:sldId id="552" r:id="rId20"/>
-    <p:sldId id="553" r:id="rId21"/>
+    <p:sldId id="407" r:id="rId3"/>
+    <p:sldId id="413" r:id="rId4"/>
+    <p:sldId id="534" r:id="rId5"/>
+    <p:sldId id="535" r:id="rId6"/>
+    <p:sldId id="536" r:id="rId7"/>
+    <p:sldId id="537" r:id="rId8"/>
+    <p:sldId id="538" r:id="rId9"/>
+    <p:sldId id="556" r:id="rId10"/>
+    <p:sldId id="486" r:id="rId11"/>
+    <p:sldId id="464" r:id="rId12"/>
+    <p:sldId id="558" r:id="rId13"/>
+    <p:sldId id="540" r:id="rId14"/>
+    <p:sldId id="541" r:id="rId15"/>
+    <p:sldId id="542" r:id="rId16"/>
+    <p:sldId id="543" r:id="rId17"/>
+    <p:sldId id="550" r:id="rId18"/>
+    <p:sldId id="557" r:id="rId19"/>
+    <p:sldId id="551" r:id="rId20"/>
+    <p:sldId id="544" r:id="rId21"/>
+    <p:sldId id="545" r:id="rId22"/>
+    <p:sldId id="555" r:id="rId23"/>
+    <p:sldId id="552" r:id="rId24"/>
+    <p:sldId id="553" r:id="rId25"/>
   </p:sldIdLst>
   <p:sldSz cx="12192000" cy="6858000"/>
   <p:notesSz cx="6858000" cy="9144000"/>
@@ -148,7 +152,7 @@
 <file path=ppt/revisionInfo.xml><?xml version="1.0" encoding="utf-8"?>
 <p1510:revInfo xmlns:a="http://schemas.openxmlformats.org/drawingml/2006/main" xmlns:r="http://schemas.openxmlformats.org/officeDocument/2006/relationships" xmlns:p1510="http://schemas.microsoft.com/office/powerpoint/2015/10/main">
   <p1510:revLst>
-    <p1510:client id="{97170FE2-E973-4E48-9FE2-4B5BDB3823CB}" v="1" dt="2026-05-08T15:06:04.715"/>
+    <p1510:client id="{724BA22C-F8FB-4F78-A883-AD80774EB240}" v="115" dt="2026-09-30T16:04:34.800"/>
   </p1510:revLst>
 </p1510:revInfo>
 </file>
@@ -156,78 +160,134 @@
 <file path=ppt/changesInfos/changesInfo1.xml><?xml version="1.0" encoding="utf-8"?>
 <pc:chgInfo xmlns:a="http://schemas.openxmlformats.org/drawingml/2006/main" xmlns:r="http://schemas.openxmlformats.org/officeDocument/2006/relationships" xmlns:ac="http://schemas.microsoft.com/office/drawing/2013/main/command" xmlns:pc="http://schemas.microsoft.com/office/powerpoint/2013/main/command">
   <pc:docChgLst>
-    <pc:chgData name="Aleksey Zimin" userId="7f2637d0bc515791" providerId="LiveId" clId="{1C363C82-C939-44FC-A8A5-AEBBD531DAF7}"/>
-    <pc:docChg chg="undo redo custSel addSld delSld modSld sldOrd">
-      <pc:chgData name="Aleksey Zimin" userId="7f2637d0bc515791" providerId="LiveId" clId="{1C363C82-C939-44FC-A8A5-AEBBD531DAF7}" dt="2026-05-08T18:35:31.382" v="4340" actId="113"/>
+    <pc:chgData name="Aleksey Zimin" userId="7f2637d0bc515791" providerId="LiveId" clId="{5F359FD6-B8E9-41DA-90EC-0BA4FD0F3073}"/>
+    <pc:docChg chg="undo custSel addSld delSld modSld sldOrd">
+      <pc:chgData name="Aleksey Zimin" userId="7f2637d0bc515791" providerId="LiveId" clId="{5F359FD6-B8E9-41DA-90EC-0BA4FD0F3073}" dt="2026-09-30T16:33:17.132" v="395"/>
       <pc:docMkLst>
         <pc:docMk/>
       </pc:docMkLst>
-      <pc:sldChg chg="modSp mod">
-        <pc:chgData name="Aleksey Zimin" userId="7f2637d0bc515791" providerId="LiveId" clId="{1C363C82-C939-44FC-A8A5-AEBBD531DAF7}" dt="2026-05-08T15:02:36.986" v="4293" actId="1076"/>
+      <pc:sldChg chg="addSp delSp modSp add mod modAnim">
+        <pc:chgData name="Aleksey Zimin" userId="7f2637d0bc515791" providerId="LiveId" clId="{5F359FD6-B8E9-41DA-90EC-0BA4FD0F3073}" dt="2026-09-30T16:03:11.356" v="178" actId="1076"/>
         <pc:sldMkLst>
           <pc:docMk/>
-          <pc:sldMk cId="792036356" sldId="544"/>
+          <pc:sldMk cId="807348765" sldId="407"/>
         </pc:sldMkLst>
         <pc:spChg chg="mod">
-          <ac:chgData name="Aleksey Zimin" userId="7f2637d0bc515791" providerId="LiveId" clId="{1C363C82-C939-44FC-A8A5-AEBBD531DAF7}" dt="2026-05-08T15:02:36.986" v="4293" actId="1076"/>
+          <ac:chgData name="Aleksey Zimin" userId="7f2637d0bc515791" providerId="LiveId" clId="{5F359FD6-B8E9-41DA-90EC-0BA4FD0F3073}" dt="2026-09-30T15:58:02.734" v="47" actId="6549"/>
           <ac:spMkLst>
             <pc:docMk/>
-            <pc:sldMk cId="792036356" sldId="544"/>
-            <ac:spMk id="17" creationId="{79D24950-3E47-5FC4-4F66-0670A1499C1E}"/>
+            <pc:sldMk cId="807348765" sldId="407"/>
+            <ac:spMk id="2" creationId="{28526115-0F50-D62F-6736-FB3DAE5B5E74}"/>
+          </ac:spMkLst>
+        </pc:spChg>
+        <pc:spChg chg="mod">
+          <ac:chgData name="Aleksey Zimin" userId="7f2637d0bc515791" providerId="LiveId" clId="{5F359FD6-B8E9-41DA-90EC-0BA4FD0F3073}" dt="2026-09-30T16:00:47.948" v="167" actId="14100"/>
+          <ac:spMkLst>
+            <pc:docMk/>
+            <pc:sldMk cId="807348765" sldId="407"/>
+            <ac:spMk id="3" creationId="{DD9FA874-AAAE-2124-EC2E-057DB25523B2}"/>
+          </ac:spMkLst>
+        </pc:spChg>
+        <pc:spChg chg="add del mod">
+          <ac:chgData name="Aleksey Zimin" userId="7f2637d0bc515791" providerId="LiveId" clId="{5F359FD6-B8E9-41DA-90EC-0BA4FD0F3073}" dt="2026-09-30T16:00:32.983" v="163" actId="47"/>
+          <ac:spMkLst>
+            <pc:docMk/>
+            <pc:sldMk cId="807348765" sldId="407"/>
+            <ac:spMk id="5" creationId="{EC37CF50-4F40-7A04-5977-06373F2E7AF9}"/>
+          </ac:spMkLst>
+        </pc:spChg>
+        <pc:spChg chg="add mod">
+          <ac:chgData name="Aleksey Zimin" userId="7f2637d0bc515791" providerId="LiveId" clId="{5F359FD6-B8E9-41DA-90EC-0BA4FD0F3073}" dt="2026-09-30T16:01:12.628" v="173" actId="1076"/>
+          <ac:spMkLst>
+            <pc:docMk/>
+            <pc:sldMk cId="807348765" sldId="407"/>
+            <ac:spMk id="6" creationId="{677B587E-17DA-0B3F-94D0-150ACD71AE84}"/>
+          </ac:spMkLst>
+        </pc:spChg>
+        <pc:picChg chg="add mod">
+          <ac:chgData name="Aleksey Zimin" userId="7f2637d0bc515791" providerId="LiveId" clId="{5F359FD6-B8E9-41DA-90EC-0BA4FD0F3073}" dt="2026-09-30T16:01:54.580" v="176" actId="1076"/>
+          <ac:picMkLst>
+            <pc:docMk/>
+            <pc:sldMk cId="807348765" sldId="407"/>
+            <ac:picMk id="8" creationId="{B49462CC-9E69-39A1-A38F-91A017D30F06}"/>
+          </ac:picMkLst>
+        </pc:picChg>
+        <pc:picChg chg="add mod">
+          <ac:chgData name="Aleksey Zimin" userId="7f2637d0bc515791" providerId="LiveId" clId="{5F359FD6-B8E9-41DA-90EC-0BA4FD0F3073}" dt="2026-09-30T16:03:11.356" v="178" actId="1076"/>
+          <ac:picMkLst>
+            <pc:docMk/>
+            <pc:sldMk cId="807348765" sldId="407"/>
+            <ac:picMk id="10" creationId="{5EB063B5-D5F4-9E40-22EE-A3CC96193E59}"/>
+          </ac:picMkLst>
+        </pc:picChg>
+      </pc:sldChg>
+      <pc:sldChg chg="modSp add mod ord">
+        <pc:chgData name="Aleksey Zimin" userId="7f2637d0bc515791" providerId="LiveId" clId="{5F359FD6-B8E9-41DA-90EC-0BA4FD0F3073}" dt="2026-09-30T16:33:17.132" v="395"/>
+        <pc:sldMkLst>
+          <pc:docMk/>
+          <pc:sldMk cId="569996796" sldId="464"/>
+        </pc:sldMkLst>
+        <pc:spChg chg="mod">
+          <ac:chgData name="Aleksey Zimin" userId="7f2637d0bc515791" providerId="LiveId" clId="{5F359FD6-B8E9-41DA-90EC-0BA4FD0F3073}" dt="2026-09-30T16:30:44.942" v="233" actId="1076"/>
+          <ac:spMkLst>
+            <pc:docMk/>
+            <pc:sldMk cId="569996796" sldId="464"/>
+            <ac:spMk id="43010" creationId="{00000000-0000-0000-0000-000000000000}"/>
           </ac:spMkLst>
         </pc:spChg>
       </pc:sldChg>
-      <pc:sldChg chg="ord">
-        <pc:chgData name="Aleksey Zimin" userId="7f2637d0bc515791" providerId="LiveId" clId="{1C363C82-C939-44FC-A8A5-AEBBD531DAF7}" dt="2026-05-08T15:04:31.652" v="4295"/>
+      <pc:sldChg chg="modSp add mod ord">
+        <pc:chgData name="Aleksey Zimin" userId="7f2637d0bc515791" providerId="LiveId" clId="{5F359FD6-B8E9-41DA-90EC-0BA4FD0F3073}" dt="2026-09-30T16:33:17.132" v="395"/>
         <pc:sldMkLst>
           <pc:docMk/>
-          <pc:sldMk cId="3766667920" sldId="550"/>
-        </pc:sldMkLst>
-      </pc:sldChg>
-      <pc:sldChg chg="ord">
-        <pc:chgData name="Aleksey Zimin" userId="7f2637d0bc515791" providerId="LiveId" clId="{1C363C82-C939-44FC-A8A5-AEBBD531DAF7}" dt="2026-05-08T15:04:31.652" v="4295"/>
-        <pc:sldMkLst>
-          <pc:docMk/>
-          <pc:sldMk cId="3839963943" sldId="551"/>
-        </pc:sldMkLst>
-      </pc:sldChg>
-      <pc:sldChg chg="modSp ord">
-        <pc:chgData name="Aleksey Zimin" userId="7f2637d0bc515791" providerId="LiveId" clId="{1C363C82-C939-44FC-A8A5-AEBBD531DAF7}" dt="2026-05-08T15:06:04.714" v="4298" actId="20577"/>
-        <pc:sldMkLst>
-          <pc:docMk/>
-          <pc:sldMk cId="220972813" sldId="555"/>
+          <pc:sldMk cId="475957125" sldId="486"/>
         </pc:sldMkLst>
         <pc:spChg chg="mod">
-          <ac:chgData name="Aleksey Zimin" userId="7f2637d0bc515791" providerId="LiveId" clId="{1C363C82-C939-44FC-A8A5-AEBBD531DAF7}" dt="2026-05-08T15:06:04.714" v="4298" actId="20577"/>
+          <ac:chgData name="Aleksey Zimin" userId="7f2637d0bc515791" providerId="LiveId" clId="{5F359FD6-B8E9-41DA-90EC-0BA4FD0F3073}" dt="2026-09-30T16:30:38.207" v="232" actId="20577"/>
           <ac:spMkLst>
             <pc:docMk/>
-            <pc:sldMk cId="220972813" sldId="555"/>
-            <ac:spMk id="3" creationId="{18FB9C27-2637-0191-96F3-033AD3148576}"/>
+            <pc:sldMk cId="475957125" sldId="486"/>
+            <ac:spMk id="2" creationId="{12C5F26D-637F-7AC5-7877-7214D35528CE}"/>
           </ac:spMkLst>
         </pc:spChg>
       </pc:sldChg>
-      <pc:sldChg chg="modSp new mod">
-        <pc:chgData name="Aleksey Zimin" userId="7f2637d0bc515791" providerId="LiveId" clId="{1C363C82-C939-44FC-A8A5-AEBBD531DAF7}" dt="2026-05-08T18:35:31.382" v="4340" actId="113"/>
+      <pc:sldChg chg="add del">
+        <pc:chgData name="Aleksey Zimin" userId="7f2637d0bc515791" providerId="LiveId" clId="{5F359FD6-B8E9-41DA-90EC-0BA4FD0F3073}" dt="2026-09-30T16:00:34.499" v="164"/>
         <pc:sldMkLst>
           <pc:docMk/>
-          <pc:sldMk cId="4238336084" sldId="557"/>
+          <pc:sldMk cId="641897481" sldId="558"/>
+        </pc:sldMkLst>
+      </pc:sldChg>
+      <pc:sldChg chg="addSp modSp new mod ord">
+        <pc:chgData name="Aleksey Zimin" userId="7f2637d0bc515791" providerId="LiveId" clId="{5F359FD6-B8E9-41DA-90EC-0BA4FD0F3073}" dt="2026-09-30T16:33:17.132" v="395"/>
+        <pc:sldMkLst>
+          <pc:docMk/>
+          <pc:sldMk cId="4159841555" sldId="558"/>
         </pc:sldMkLst>
         <pc:spChg chg="mod">
-          <ac:chgData name="Aleksey Zimin" userId="7f2637d0bc515791" providerId="LiveId" clId="{1C363C82-C939-44FC-A8A5-AEBBD531DAF7}" dt="2026-05-08T18:31:35.968" v="4315" actId="20577"/>
+          <ac:chgData name="Aleksey Zimin" userId="7f2637d0bc515791" providerId="LiveId" clId="{5F359FD6-B8E9-41DA-90EC-0BA4FD0F3073}" dt="2026-09-30T16:30:58.987" v="263" actId="20577"/>
           <ac:spMkLst>
             <pc:docMk/>
-            <pc:sldMk cId="4238336084" sldId="557"/>
-            <ac:spMk id="2" creationId="{1EC02B0B-CD55-8B1C-F728-63B5E2DCA48B}"/>
+            <pc:sldMk cId="4159841555" sldId="558"/>
+            <ac:spMk id="2" creationId="{99DC87A7-C029-1172-5C76-CD41D17DB1A3}"/>
           </ac:spMkLst>
         </pc:spChg>
         <pc:spChg chg="mod">
-          <ac:chgData name="Aleksey Zimin" userId="7f2637d0bc515791" providerId="LiveId" clId="{1C363C82-C939-44FC-A8A5-AEBBD531DAF7}" dt="2026-05-08T18:35:31.382" v="4340" actId="113"/>
+          <ac:chgData name="Aleksey Zimin" userId="7f2637d0bc515791" providerId="LiveId" clId="{5F359FD6-B8E9-41DA-90EC-0BA4FD0F3073}" dt="2026-09-30T16:32:07.332" v="388" actId="20577"/>
           <ac:spMkLst>
             <pc:docMk/>
-            <pc:sldMk cId="4238336084" sldId="557"/>
-            <ac:spMk id="3" creationId="{F69EC7EB-FA25-C174-9C11-C2A9CD309B4C}"/>
+            <pc:sldMk cId="4159841555" sldId="558"/>
+            <ac:spMk id="3" creationId="{910B9ACE-743E-0243-9B57-36834C2241F0}"/>
           </ac:spMkLst>
         </pc:spChg>
+        <pc:picChg chg="add mod">
+          <ac:chgData name="Aleksey Zimin" userId="7f2637d0bc515791" providerId="LiveId" clId="{5F359FD6-B8E9-41DA-90EC-0BA4FD0F3073}" dt="2026-09-30T16:32:43.902" v="391" actId="14100"/>
+          <ac:picMkLst>
+            <pc:docMk/>
+            <pc:sldMk cId="4159841555" sldId="558"/>
+            <ac:picMk id="6" creationId="{0BE6D16F-89AB-9D23-98EC-E79E43114289}"/>
+          </ac:picMkLst>
+        </pc:picChg>
       </pc:sldChg>
     </pc:docChg>
   </pc:docChgLst>
@@ -439,6 +499,70 @@
           <inkml:channelProperty channel="F" name="resolution" value="0" units="1/dev"/>
         </inkml:channelProperties>
       </inkml:inkSource>
+      <inkml:timestamp xml:id="ts0" timeString="2025-09-16T15:45:46.018"/>
+    </inkml:context>
+    <inkml:brush xml:id="br0">
+      <inkml:brushProperty name="width" value="0.05" units="cm"/>
+      <inkml:brushProperty name="height" value="0.05" units="cm"/>
+      <inkml:brushProperty name="color" value="#AE198D"/>
+      <inkml:brushProperty name="inkEffects" value="galaxy"/>
+      <inkml:brushProperty name="anchorX" value="0"/>
+      <inkml:brushProperty name="anchorY" value="0"/>
+      <inkml:brushProperty name="scaleFactor" value="0.5"/>
+    </inkml:brush>
+  </inkml:definitions>
+  <inkml:trace contextRef="#ctx0" brushRef="#br0">1 107 24575,'0'0'0,"5"0"0,11 0 0,6 0 0,9-5 0,3 0 0,6-1 0,4 2 0,4 1 0,-3-5 0,-3 2 0,-5-6 0,2 2 0,-4 2 0,-1 2 0,-3 2 0,-2 1 0,-2 2 0,0-4 0,4-1 0,6 1 0,11 1 0,-2 1 0,-1 1 0,-4 1 0,-5 1 0,-4 0 0,-3 0 0,-2 6 0,-1 0 0,0 4 0,0 1 0,5 3 0,0 3 0,1-2 0,9-3 0,4 3 0,5 6 0,3-2 0,6 3 0,6-4 0,6 1 0,4-5 0,-2-3 0,-5-4 0,-4-4 0,-4-1 0,-9-2 0,4 0 0,-7-1 0,-6 1 0,0-1 0,-4 0 0,2 1 0,3-5 0,2-1 0,9 1 0,1-5 0,3 2 0,-1 0 0,15 2 0,0 3 0,9 1 0,-8 1 0,-4 0 0,-12 1 0,-9 1 0,-4-1 0,-6 1 0,-4-1 0,-4 0 0,3 0 0,-1 0 0,-1 0 0,-1 0 0,-1 0 0,-1 0 0,-1 0 0,-5 5 0,-2 1 0,1 0 0,6-2 0,2-1 0,5-1 0,7 0 0,4-2 0,10 0 0,7 0 0,2 0 0,5 0 0,3-1 0,-2 1 0,2 0 0,-4 0 0,2 0 0,17 0 0,-2 0 0,1 0 0,0 0 0,8 0 0,-6 0 0,9 5 0,-3 1 0,-7 4 0,-3 11 0,-4-2 0,4 9 0,-1 2 0,0-5 0,0 0 0,-2-6 0,0-5 0,-1-6 0,0-3 0,-1-3 0,0-2 0,-5-1 0,0 0 0,0-5 0,1-1 0,1-4 0,1-5 0,-4-3 0,0-4 0,-4 3 0,1-1 0,1 0 0,-4 3 0,3-1 0,-3 5 0,1 3 0,-3 5 0,-3 2 0,-2 2 0,-4 2 0,-1 0 0,9 1 0,-5 0 0,9-1 0,-1 1 0,-2-1 0,-8 5 0,-3 6 0,-3 0 0,-1-1 0,-5 3 0,0 3 0,6-2 0,7 3 0,8-4 0,5 3 0,4-3 0,14 2 0,2 2 0,6-2 0,-2 2 0,3-3 0,-9-4 0,-3-3 0,-5-3 0,-6-1 0,-3-3 0,-4 0 0,0-1 0,-9-5 0,-3 0 0,-3-5 0,4-4 0,-1-5 0,1-2 0,-1 2 0,-1-1 0,-1-1 0,0 5 0,-1-2 0,-5 4 0,4 0 0,-4 2 0,-5 4 0,-5 3 0,6 2 0,7 3 0,19 11 0,9 6 0,0 6 0,7 9 0,0-3 0,0 0 0,-2 0 0,-1-1 0,-1-6 0,-2 0 0,11 0 0,-1-5 0,-5-3 0,-3-5 0,-7-4 0,-7-2 0,-6-1 0,-9-2 0,1 1 0,-1-6 0,-1-6 0,-4-4 0,5 0 0,0-3 0,1-1 0,0 2 0,0 5 0,0 4 0,5 3 0,0 3 0,4 2 0,0 2 0,-1-1 0,-3 1 0,-2 5 0,4 5 0,-2 1 0,31 3 0,6-2 0,24 3 0,-1-3 0,2-2 0,-4-4 0,8-3 0,3-2 0,8-1 0,1-1 0,12-1 0,0-5 0,4 0 0,-4-5 0,-3 1 0,-10 1 0,-8-3 0,-15 2 0,-11 2 0,-9 2 0,-8 3 0,-4 1 0,-3 1 0,-6 1 0,-1 0 0,1 1 0,-4-1 0,-3 1 0,-5-1 0,-2 0 0,-3 0 0,-2 0 0,5 0 0,0 0 0,-1 0 0,0 0 0,-1 0 0,-2 0 0,0 0 0,15 0 0,6 0 0,25 0 0,5 0 0,15-5 0,-8-6 0,-17 0 0,-8-4 0,-18 2 0,-15 2 0,-12-2 0,-8 3 0,-6 2 0,-3 2 0,-1 3 0,-1 1 0,7 2 0,0 0 0,11 6 0,11 5 0,9 0 0,9 5 0,10 3 0,10 2 0,17 3 0,17 2 0,8-5 0,0-5 0,-3-5 0,-7-4 0,-10-4 0,-11-2 0,-8-7 0,-12 0 0,-10-1 0,-9-4 0,-5-3 0,23-5 0,-1-3 0,10 3 0,-10 3 0,-12 5 0,-2 5 0,-5 2 0,-3 3 0,-8 1 0,4 1 0,-1 0 0,6 0 0,17 5 0,11 5 0,20 5 0,12 0 0,15 2 0,6-2 0,7 1 0,-5-4 0,-7-2 0,-13-4 0,-19-3 0,-17-8 0,-8-1 0,-16-11 0,-11-5 0,-5 0 0,-7-1 0,-5 4 0,-9 4 0</inkml:trace>
+</inkml:ink>
+</file>
+
+<file path=ppt/ink/ink17.xml><?xml version="1.0" encoding="utf-8"?>
+<inkml:ink xmlns:inkml="http://www.w3.org/2003/InkML">
+  <inkml:definitions>
+    <inkml:context xml:id="ctx0">
+      <inkml:inkSource xml:id="inkSrc0">
+        <inkml:traceFormat>
+          <inkml:channel name="X" type="integer" min="-2.14748E9" max="2.14748E9" units="cm"/>
+          <inkml:channel name="Y" type="integer" min="-2.14748E9" max="2.14748E9" units="cm"/>
+          <inkml:channel name="F" type="integer" max="32767" units="dev"/>
+        </inkml:traceFormat>
+        <inkml:channelProperties>
+          <inkml:channelProperty channel="X" name="resolution" value="1000" units="1/cm"/>
+          <inkml:channelProperty channel="Y" name="resolution" value="1000" units="1/cm"/>
+          <inkml:channelProperty channel="F" name="resolution" value="0" units="1/dev"/>
+        </inkml:channelProperties>
+      </inkml:inkSource>
+      <inkml:timestamp xml:id="ts0" timeString="2025-09-16T15:45:50.137"/>
+    </inkml:context>
+    <inkml:brush xml:id="br0">
+      <inkml:brushProperty name="width" value="0.05" units="cm"/>
+      <inkml:brushProperty name="height" value="0.05" units="cm"/>
+      <inkml:brushProperty name="color" value="#AE198D"/>
+      <inkml:brushProperty name="inkEffects" value="galaxy"/>
+      <inkml:brushProperty name="anchorX" value="-23019.58398"/>
+      <inkml:brushProperty name="anchorY" value="-1521.36877"/>
+      <inkml:brushProperty name="scaleFactor" value="0.5"/>
+    </inkml:brush>
+  </inkml:definitions>
+  <inkml:trace contextRef="#ctx0" brushRef="#br0">1 324 24575,'0'0'0,"4"0"0,13 0 0,10 0 0,9 0 0,9-5 0,10-6 0,19 0 0,13-4 0,10-3 0,12-4 0,9-7 0,50-7 0,0-1 0,24 0 0,-17 2 0,13 8 0,-28 8 0,-20 7 0,-28 5 0,-22 5 0,-23 1 0,-12 2 0,-3 1 0,-2 4 0,0 12 0,1-1 0,6 4 0,5 2 0,7 1 0,14-3 0,5 0 0,7 0 0,10 2 0,4 1 0,2-5 0,10 1 0,0-4 0,-1-5 0,-9-3 0,-8-4 0,-8-3 0,-13 0 0,-5-2 0,-8 0 0,-6-5 0,1 0 0,2-5 0,3-5 0,4-9 0,2 2 0,3-2 0,0 0 0,7 4 0,38 1 0,6 4 0,46 5 0,10 9 0,-1 9 0,-8 7 0,-16 7 0,-18 3 0,-9 3 0,-16-4 0,-12-1 0,-7 1 0,-7 0 0,-4-4 0,0 1 0,15 0 0,19 2 0,6-4 0,10 1 0,-2-5 0,1-3 0,-2-4 0,-6-3 0,-11-2 0,-11-1 0,-16-2 0,-8-5 0,0-5 0,-1-6 0,9 1 0,1-2 0,4-3 0,-1 4 0,2 3 0,-2 5 0,-10 3 0,-2 3 0,-9 2 0,-2 1 0,-10 1 0,-4 0 0,-9 0 0,2 5 0,1 5 0,1 5 0,5-1 0,1 4 0,1 1 0,4-2 0,-2-5 0,-5-4 0,-3-3 0,-7-3 0,5-2 0,-1-1 0,-3-1 0,0 0 0,1 0 0,1-4 0,7-1 0,6 0 0,6-4 0,5 2 0,-1-5 0,1 2 0,-3 2 0,0 2 0,-3 3 0,-4 2 0,2 6 0,8 1 0,-2 6 0,3 10 0,7-1 0,1 3 0,1 1 0,1-4 0,-2 1 0,-11-5 0,-11-5 0,-7-3 0,1-4 0,0-8 0,15-6 0,1-2 0,15-9 0,3 2 0,-3-3 0,-12 4 0,-14 4 0,-11 5 0,-5 3 0,-6 4 0,0 1 0,-2 1 0,3 1 0,-2 0 0,-2 5 0,-2 0 0,8 5 0,10-1 0,4-2 0,9-1 0,10-3 0,6-1 0,9-2 0,1-6 0,0-6 0,-8-5 0,-1-11 0,-3-2 0,-5-3 0,-11 1 0,-5 5 0,-4 7 0,-13 1 0,-5 6 0,-6 3 0,-2 4 0,14 13 0,6 13 0,0 1 0,8 8 0,2-2 0,1-1 0,-1 0 0,-5-6 0,-1-1 0,-7-5 0,-4-4 0,5-4 0,-3-4 0,-2-1 0,2-2 0,2-1 0,2 0 0,4 1 0,1-6 0,-3 0 0,0 0 0,6 2 0,2-5 0,0 2 0,1 0 0,0 3 0,-7 0 0,5 3 0,-6 0 0,-4 1 0,-6 0 0,0 0 0,-2 0 0,2 1 0,3-1 0,4 0 0,8 0 0,30 0 0,7 0 0,16 0 0,-6 0 0,-2 0 0,-16 0 0,-16 0 0,-15 0 0,-11 0 0,-8 0 0,-6 0 0,-1 0 0,-2 0 0,6 0 0,6 0 0,6 0 0,5 0 0,3 0 0,3 0 0,7 0 0,1 0 0,4 0 0,6 0 0,8 0 0,4 5 0,1 1 0,-4 4 0,-7 0 0,-6-2 0,-5-1 0,-10-3 0,-2-2 0,-13 5 0,-4-1 0,-6-1 0,-1 10 0,10 4 0,5-1 0,11 2 0,31 8 0,-2-5 0,10-3 0,-10-6 0,-11-5 0,-14-4 0,-6-9 0,-9-12 0,-5-1 0,-10-4 0,-3 2 0,-1 4 0,-6 5 0</inkml:trace>
+</inkml:ink>
+</file>
+
+<file path=ppt/ink/ink18.xml><?xml version="1.0" encoding="utf-8"?>
+<inkml:ink xmlns:inkml="http://www.w3.org/2003/InkML">
+  <inkml:definitions>
+    <inkml:context xml:id="ctx0">
+      <inkml:inkSource xml:id="inkSrc0">
+        <inkml:traceFormat>
+          <inkml:channel name="X" type="integer" min="-2.14748E9" max="2.14748E9" units="cm"/>
+          <inkml:channel name="Y" type="integer" min="-2.14748E9" max="2.14748E9" units="cm"/>
+          <inkml:channel name="F" type="integer" max="32767" units="dev"/>
+        </inkml:traceFormat>
+        <inkml:channelProperties>
+          <inkml:channelProperty channel="X" name="resolution" value="1000" units="1/cm"/>
+          <inkml:channelProperty channel="Y" name="resolution" value="1000" units="1/cm"/>
+          <inkml:channelProperty channel="F" name="resolution" value="0" units="1/dev"/>
+        </inkml:channelProperties>
+      </inkml:inkSource>
       <inkml:timestamp xml:id="ts0" timeString="2025-10-01T14:18:20.374"/>
     </inkml:context>
     <inkml:brush xml:id="br0">
@@ -450,7 +574,7 @@
 </inkml:ink>
 </file>
 
-<file path=ppt/ink/ink17.xml><?xml version="1.0" encoding="utf-8"?>
+<file path=ppt/ink/ink19.xml><?xml version="1.0" encoding="utf-8"?>
 <inkml:ink xmlns:inkml="http://www.w3.org/2003/InkML">
   <inkml:definitions>
     <inkml:context xml:id="ctx0">
@@ -475,62 +599,6 @@
     </inkml:brush>
   </inkml:definitions>
   <inkml:trace contextRef="#ctx0" brushRef="#br0">1 26 24575,'40'3'0,"0"1"0,1 3 0,-2 1 0,1 2 0,-1 1 0,47 22 0,82 22 0,-139-50 0,0-2 0,0 0 0,0-2 0,46-4 0,-3 1 0,-46 1 0,0-2 0,0 0 0,-1-1 0,34-11 0,99-40 0,-117 38 0,1 2 0,0 1 0,1 3 0,74-11 0,240 19 0,-184 6 0,135 8 0,11 0 0,-269-9 0,79 13 0,-125-14 0,72 5 0,0-2 0,77-7 0,-23 1 0,-101 0 0,-1 0 0,35-8 0,-41 6 0,19-1-1365,-23 4-5461</inkml:trace>
-</inkml:ink>
-</file>
-
-<file path=ppt/ink/ink18.xml><?xml version="1.0" encoding="utf-8"?>
-<inkml:ink xmlns:inkml="http://www.w3.org/2003/InkML">
-  <inkml:definitions>
-    <inkml:context xml:id="ctx0">
-      <inkml:inkSource xml:id="inkSrc0">
-        <inkml:traceFormat>
-          <inkml:channel name="X" type="integer" min="-2.14748E9" max="2.14748E9" units="cm"/>
-          <inkml:channel name="Y" type="integer" min="-2.14748E9" max="2.14748E9" units="cm"/>
-          <inkml:channel name="F" type="integer" max="32767" units="dev"/>
-        </inkml:traceFormat>
-        <inkml:channelProperties>
-          <inkml:channelProperty channel="X" name="resolution" value="1000" units="1/cm"/>
-          <inkml:channelProperty channel="Y" name="resolution" value="1000" units="1/cm"/>
-          <inkml:channelProperty channel="F" name="resolution" value="0" units="1/dev"/>
-        </inkml:channelProperties>
-      </inkml:inkSource>
-      <inkml:timestamp xml:id="ts0" timeString="2025-10-01T14:18:38.087"/>
-    </inkml:context>
-    <inkml:brush xml:id="br0">
-      <inkml:brushProperty name="width" value="0.035" units="cm"/>
-      <inkml:brushProperty name="height" value="0.035" units="cm"/>
-      <inkml:brushProperty name="color" value="#33CCFF"/>
-    </inkml:brush>
-  </inkml:definitions>
-  <inkml:trace contextRef="#ctx0" brushRef="#br0">1 50 24575,'32'0'0,"2"1"0,-1-2 0,0-1 0,51-10 0,-32 1 0,1 1 0,0 3 0,0 2 0,1 3 0,-1 2 0,1 2 0,-1 2 0,0 3 0,83 22 0,71 48 0,-196-74 0,38 13 0,0-2 0,1-3 0,0-1 0,1-3 0,55 2 0,330-30 0,-121 15 0,-192 7 0,-108 0 0,0 1 0,0 0 0,0 1 0,0 1 0,20 8 0,-20-7 0,0 0 0,0-1 0,1-1 0,-1 0 0,17 0 0,-2-2 0,114-2 0,-125-1 0,1 0 0,-1-1 0,0-1 0,0-1 0,23-9 0,-19 7 0,0 2 0,0 0 0,1 2 0,-1 0 0,1 2 0,-1 1 0,43 4 0,12-1 0,148-3-1365,-205 0-5461</inkml:trace>
-</inkml:ink>
-</file>
-
-<file path=ppt/ink/ink19.xml><?xml version="1.0" encoding="utf-8"?>
-<inkml:ink xmlns:inkml="http://www.w3.org/2003/InkML">
-  <inkml:definitions>
-    <inkml:context xml:id="ctx0">
-      <inkml:inkSource xml:id="inkSrc0">
-        <inkml:traceFormat>
-          <inkml:channel name="X" type="integer" min="-2.14748E9" max="2.14748E9" units="cm"/>
-          <inkml:channel name="Y" type="integer" min="-2.14748E9" max="2.14748E9" units="cm"/>
-          <inkml:channel name="F" type="integer" max="32767" units="dev"/>
-        </inkml:traceFormat>
-        <inkml:channelProperties>
-          <inkml:channelProperty channel="X" name="resolution" value="1000" units="1/cm"/>
-          <inkml:channelProperty channel="Y" name="resolution" value="1000" units="1/cm"/>
-          <inkml:channelProperty channel="F" name="resolution" value="0" units="1/dev"/>
-        </inkml:channelProperties>
-      </inkml:inkSource>
-      <inkml:timestamp xml:id="ts0" timeString="2025-10-01T14:18:47.294"/>
-    </inkml:context>
-    <inkml:brush xml:id="br0">
-      <inkml:brushProperty name="width" value="0.035" units="cm"/>
-      <inkml:brushProperty name="height" value="0.035" units="cm"/>
-      <inkml:brushProperty name="color" value="#66CC00"/>
-    </inkml:brush>
-  </inkml:definitions>
-  <inkml:trace contextRef="#ctx0" brushRef="#br0">0 115 24575,'41'0'0,"-1"-1"0,1-3 0,-1 0 0,52-14 0,-39 8 0,2 2 0,-1 3 0,1 2 0,94 8 0,-88-3 0,11 4 0,0 2 0,108 29 0,-168-34 0,58 13 0,-19-3 0,1-2 0,1-2 0,84 3 0,560-13 0,-643-2 0,-1-2 0,57-13 0,24-3 0,-70 13 0,-4 1 0,67 0 0,-119 7 0,3 1 0,-1 0 0,0-1 0,1 0 0,-1-1 0,0 0 0,0-1 0,0 0 0,1 0 0,-2-1 0,1 0 0,0-1 0,-1 0 0,1-1 0,12-8 0,-7 3 0,0 1 0,0 0 0,0 1 0,1 1 0,1 1 0,-1 0 0,1 1 0,0 1 0,19-3 0,-11 4 0,1 2 0,0 1 0,0 1 0,-1 0 0,39 9 0,-16-3 41,-1-3-1,77-3 1,-75-2-537,-1 2 0,71 10 1,-97-6-6331</inkml:trace>
 </inkml:ink>
 </file>
 
@@ -577,6 +645,62 @@
           <inkml:channelProperty channel="F" name="resolution" value="0" units="1/dev"/>
         </inkml:channelProperties>
       </inkml:inkSource>
+      <inkml:timestamp xml:id="ts0" timeString="2025-10-01T14:18:38.087"/>
+    </inkml:context>
+    <inkml:brush xml:id="br0">
+      <inkml:brushProperty name="width" value="0.035" units="cm"/>
+      <inkml:brushProperty name="height" value="0.035" units="cm"/>
+      <inkml:brushProperty name="color" value="#33CCFF"/>
+    </inkml:brush>
+  </inkml:definitions>
+  <inkml:trace contextRef="#ctx0" brushRef="#br0">1 50 24575,'32'0'0,"2"1"0,-1-2 0,0-1 0,51-10 0,-32 1 0,1 1 0,0 3 0,0 2 0,1 3 0,-1 2 0,1 2 0,-1 2 0,0 3 0,83 22 0,71 48 0,-196-74 0,38 13 0,0-2 0,1-3 0,0-1 0,1-3 0,55 2 0,330-30 0,-121 15 0,-192 7 0,-108 0 0,0 1 0,0 0 0,0 1 0,0 1 0,20 8 0,-20-7 0,0 0 0,0-1 0,1-1 0,-1 0 0,17 0 0,-2-2 0,114-2 0,-125-1 0,1 0 0,-1-1 0,0-1 0,0-1 0,23-9 0,-19 7 0,0 2 0,0 0 0,1 2 0,-1 0 0,1 2 0,-1 1 0,43 4 0,12-1 0,148-3-1365,-205 0-5461</inkml:trace>
+</inkml:ink>
+</file>
+
+<file path=ppt/ink/ink21.xml><?xml version="1.0" encoding="utf-8"?>
+<inkml:ink xmlns:inkml="http://www.w3.org/2003/InkML">
+  <inkml:definitions>
+    <inkml:context xml:id="ctx0">
+      <inkml:inkSource xml:id="inkSrc0">
+        <inkml:traceFormat>
+          <inkml:channel name="X" type="integer" min="-2.14748E9" max="2.14748E9" units="cm"/>
+          <inkml:channel name="Y" type="integer" min="-2.14748E9" max="2.14748E9" units="cm"/>
+          <inkml:channel name="F" type="integer" max="32767" units="dev"/>
+        </inkml:traceFormat>
+        <inkml:channelProperties>
+          <inkml:channelProperty channel="X" name="resolution" value="1000" units="1/cm"/>
+          <inkml:channelProperty channel="Y" name="resolution" value="1000" units="1/cm"/>
+          <inkml:channelProperty channel="F" name="resolution" value="0" units="1/dev"/>
+        </inkml:channelProperties>
+      </inkml:inkSource>
+      <inkml:timestamp xml:id="ts0" timeString="2025-10-01T14:18:47.294"/>
+    </inkml:context>
+    <inkml:brush xml:id="br0">
+      <inkml:brushProperty name="width" value="0.035" units="cm"/>
+      <inkml:brushProperty name="height" value="0.035" units="cm"/>
+      <inkml:brushProperty name="color" value="#66CC00"/>
+    </inkml:brush>
+  </inkml:definitions>
+  <inkml:trace contextRef="#ctx0" brushRef="#br0">0 115 24575,'41'0'0,"-1"-1"0,1-3 0,-1 0 0,52-14 0,-39 8 0,2 2 0,-1 3 0,1 2 0,94 8 0,-88-3 0,11 4 0,0 2 0,108 29 0,-168-34 0,58 13 0,-19-3 0,1-2 0,1-2 0,84 3 0,560-13 0,-643-2 0,-1-2 0,57-13 0,24-3 0,-70 13 0,-4 1 0,67 0 0,-119 7 0,3 1 0,-1 0 0,0-1 0,1 0 0,-1-1 0,0 0 0,0-1 0,0 0 0,1 0 0,-2-1 0,1 0 0,0-1 0,-1 0 0,1-1 0,12-8 0,-7 3 0,0 1 0,0 0 0,0 1 0,1 1 0,1 1 0,-1 0 0,1 1 0,0 1 0,19-3 0,-11 4 0,1 2 0,0 1 0,0 1 0,-1 0 0,39 9 0,-16-3 41,-1-3-1,77-3 1,-75-2-537,-1 2 0,71 10 1,-97-6-6331</inkml:trace>
+</inkml:ink>
+</file>
+
+<file path=ppt/ink/ink22.xml><?xml version="1.0" encoding="utf-8"?>
+<inkml:ink xmlns:inkml="http://www.w3.org/2003/InkML">
+  <inkml:definitions>
+    <inkml:context xml:id="ctx0">
+      <inkml:inkSource xml:id="inkSrc0">
+        <inkml:traceFormat>
+          <inkml:channel name="X" type="integer" min="-2.14748E9" max="2.14748E9" units="cm"/>
+          <inkml:channel name="Y" type="integer" min="-2.14748E9" max="2.14748E9" units="cm"/>
+          <inkml:channel name="F" type="integer" max="32767" units="dev"/>
+        </inkml:traceFormat>
+        <inkml:channelProperties>
+          <inkml:channelProperty channel="X" name="resolution" value="1000" units="1/cm"/>
+          <inkml:channelProperty channel="Y" name="resolution" value="1000" units="1/cm"/>
+          <inkml:channelProperty channel="F" name="resolution" value="0" units="1/dev"/>
+        </inkml:channelProperties>
+      </inkml:inkSource>
       <inkml:timestamp xml:id="ts0" timeString="2025-10-01T14:18:58.270"/>
     </inkml:context>
     <inkml:brush xml:id="br0">
@@ -588,7 +712,7 @@
 </inkml:ink>
 </file>
 
-<file path=ppt/ink/ink21.xml><?xml version="1.0" encoding="utf-8"?>
+<file path=ppt/ink/ink23.xml><?xml version="1.0" encoding="utf-8"?>
 <inkml:ink xmlns:inkml="http://www.w3.org/2003/InkML">
   <inkml:definitions>
     <inkml:context xml:id="ctx0">
@@ -616,7 +740,7 @@
 </inkml:ink>
 </file>
 
-<file path=ppt/ink/ink22.xml><?xml version="1.0" encoding="utf-8"?>
+<file path=ppt/ink/ink24.xml><?xml version="1.0" encoding="utf-8"?>
 <inkml:ink xmlns:inkml="http://www.w3.org/2003/InkML">
   <inkml:definitions>
     <inkml:context xml:id="ctx0">
@@ -644,7 +768,7 @@
 </inkml:ink>
 </file>
 
-<file path=ppt/ink/ink23.xml><?xml version="1.0" encoding="utf-8"?>
+<file path=ppt/ink/ink25.xml><?xml version="1.0" encoding="utf-8"?>
 <inkml:ink xmlns:inkml="http://www.w3.org/2003/InkML">
   <inkml:definitions>
     <inkml:context xml:id="ctx0">
@@ -947,7 +1071,7 @@
           <a:p>
             <a:fld id="{78C61B90-1233-4265-A8E1-4CB85DE126FB}" type="datetimeFigureOut">
               <a:rPr lang="en-US" smtClean="0"/>
-              <a:t>5/8/2026</a:t>
+              <a:t>9/30/2026</a:t>
             </a:fld>
             <a:endParaRPr lang="en-US"/>
           </a:p>
@@ -1425,7 +1549,7 @@
           <a:p>
             <a:fld id="{E2773EFF-6084-460D-96FA-2FA787A98816}" type="datetime1">
               <a:rPr lang="en-US" smtClean="0"/>
-              <a:t>5/8/2026</a:t>
+              <a:t>9/30/2026</a:t>
             </a:fld>
             <a:endParaRPr lang="en-US"/>
           </a:p>
@@ -1678,7 +1802,7 @@
           <a:p>
             <a:fld id="{013692F8-B2BD-4E07-9A92-E5080B238DFA}" type="datetime1">
               <a:rPr lang="en-US" smtClean="0"/>
-              <a:t>5/8/2026</a:t>
+              <a:t>9/30/2026</a:t>
             </a:fld>
             <a:endParaRPr lang="en-US"/>
           </a:p>
@@ -1847,7 +1971,7 @@
           <a:p>
             <a:fld id="{82A88673-6F42-4090-A040-176AF0E6DEAE}" type="datetime1">
               <a:rPr lang="en-US" smtClean="0"/>
-              <a:t>5/8/2026</a:t>
+              <a:t>9/30/2026</a:t>
             </a:fld>
             <a:endParaRPr lang="en-US"/>
           </a:p>
@@ -2026,7 +2150,7 @@
           <a:p>
             <a:fld id="{EC715288-B7FB-4510-97B0-C840A6671DDD}" type="datetime1">
               <a:rPr lang="en-US" smtClean="0"/>
-              <a:t>5/8/2026</a:t>
+              <a:t>9/30/2026</a:t>
             </a:fld>
             <a:endParaRPr lang="en-US"/>
           </a:p>
@@ -2687,7 +2811,7 @@
           <a:p>
             <a:fld id="{93FF86A1-0F17-41D8-9FFA-9520AF33BFC6}" type="datetime1">
               <a:rPr lang="en-US" smtClean="0"/>
-              <a:t>5/8/2026</a:t>
+              <a:t>9/30/2026</a:t>
             </a:fld>
             <a:endParaRPr lang="en-US"/>
           </a:p>
@@ -2922,7 +3046,7 @@
           <a:p>
             <a:fld id="{E41692F4-087A-4F4C-9829-F340F0646973}" type="datetime1">
               <a:rPr lang="en-US" smtClean="0"/>
-              <a:t>5/8/2026</a:t>
+              <a:t>9/30/2026</a:t>
             </a:fld>
             <a:endParaRPr lang="en-US"/>
           </a:p>
@@ -3168,7 +3292,7 @@
           <a:p>
             <a:fld id="{93E80BFE-E826-4B70-BF6B-3710B05194AF}" type="datetime1">
               <a:rPr lang="en-US" smtClean="0"/>
-              <a:t>5/8/2026</a:t>
+              <a:t>9/30/2026</a:t>
             </a:fld>
             <a:endParaRPr lang="en-US"/>
           </a:p>
@@ -3454,7 +3578,7 @@
           <a:p>
             <a:fld id="{9C5182DA-5425-42F9-BDB8-0DBDA15B981E}" type="datetime1">
               <a:rPr lang="en-US" smtClean="0"/>
-              <a:t>5/8/2026</a:t>
+              <a:t>9/30/2026</a:t>
             </a:fld>
             <a:endParaRPr lang="en-US"/>
           </a:p>
@@ -3953,7 +4077,7 @@
           <a:p>
             <a:fld id="{131B7164-C7F7-495E-9D5F-43BBDEBECF81}" type="datetime1">
               <a:rPr lang="en-US" smtClean="0"/>
-              <a:t>5/8/2026</a:t>
+              <a:t>9/30/2026</a:t>
             </a:fld>
             <a:endParaRPr lang="en-US"/>
           </a:p>
@@ -4071,7 +4195,7 @@
           <a:p>
             <a:fld id="{2D6C5AB8-78AA-4DA3-952F-F5057D2DAAA5}" type="datetime1">
               <a:rPr lang="en-US" smtClean="0"/>
-              <a:t>5/8/2026</a:t>
+              <a:t>9/30/2026</a:t>
             </a:fld>
             <a:endParaRPr lang="en-US"/>
           </a:p>
@@ -4167,7 +4291,7 @@
           <a:p>
             <a:fld id="{41CCB869-D2D8-4282-A525-D63712C1B900}" type="datetime1">
               <a:rPr lang="en-US" smtClean="0"/>
-              <a:t>5/8/2026</a:t>
+              <a:t>9/30/2026</a:t>
             </a:fld>
             <a:endParaRPr lang="en-US"/>
           </a:p>
@@ -4443,7 +4567,7 @@
           <a:p>
             <a:fld id="{25A8CF58-29B0-4D31-BE55-D9C1F05848B7}" type="datetime1">
               <a:rPr lang="en-US" smtClean="0"/>
-              <a:t>5/8/2026</a:t>
+              <a:t>9/30/2026</a:t>
             </a:fld>
             <a:endParaRPr lang="en-US"/>
           </a:p>
@@ -4664,7 +4788,7 @@
           <a:p>
             <a:fld id="{8F08395F-151A-4402-98B5-C84E535B9AEF}" type="datetime1">
               <a:rPr lang="en-US" smtClean="0"/>
-              <a:t>5/8/2026</a:t>
+              <a:t>9/30/2026</a:t>
             </a:fld>
             <a:endParaRPr lang="en-US"/>
           </a:p>
@@ -5191,6 +5315,5435 @@
   <p:cSld>
     <p:spTree>
       <p:nvGrpSpPr>
+        <p:cNvPr id="1" name=""/>
+        <p:cNvGrpSpPr/>
+        <p:nvPr/>
+      </p:nvGrpSpPr>
+      <p:grpSpPr>
+        <a:xfrm>
+          <a:off x="0" y="0"/>
+          <a:ext cx="0" cy="0"/>
+          <a:chOff x="0" y="0"/>
+          <a:chExt cx="0" cy="0"/>
+        </a:xfrm>
+      </p:grpSpPr>
+      <p:sp>
+        <p:nvSpPr>
+          <p:cNvPr id="2" name="Title 1">
+            <a:extLst>
+              <a:ext uri="{FF2B5EF4-FFF2-40B4-BE49-F238E27FC236}">
+                <a16:creationId xmlns:a16="http://schemas.microsoft.com/office/drawing/2014/main" id="{12C5F26D-637F-7AC5-7877-7214D35528CE}"/>
+              </a:ext>
+            </a:extLst>
+          </p:cNvPr>
+          <p:cNvSpPr>
+            <a:spLocks noGrp="1"/>
+          </p:cNvSpPr>
+          <p:nvPr>
+            <p:ph type="title"/>
+          </p:nvPr>
+        </p:nvSpPr>
+        <p:spPr/>
+        <p:txBody>
+          <a:bodyPr>
+            <a:normAutofit fontScale="90000"/>
+          </a:bodyPr>
+          <a:lstStyle/>
+          <a:p>
+            <a:r>
+              <a:rPr lang="en-US" dirty="0"/>
+              <a:t>Scaffolding with </a:t>
+            </a:r>
+            <a:r>
+              <a:rPr lang="en-US" dirty="0" err="1"/>
+              <a:t>HiC</a:t>
+            </a:r>
+            <a:r>
+              <a:rPr lang="en-US" dirty="0"/>
+              <a:t> data</a:t>
+            </a:r>
+          </a:p>
+        </p:txBody>
+      </p:sp>
+      <p:sp>
+        <p:nvSpPr>
+          <p:cNvPr id="4" name="Slide Number Placeholder 3">
+            <a:extLst>
+              <a:ext uri="{FF2B5EF4-FFF2-40B4-BE49-F238E27FC236}">
+                <a16:creationId xmlns:a16="http://schemas.microsoft.com/office/drawing/2014/main" id="{F22E2B39-2653-0397-7528-49F5DE691F83}"/>
+              </a:ext>
+            </a:extLst>
+          </p:cNvPr>
+          <p:cNvSpPr>
+            <a:spLocks noGrp="1"/>
+          </p:cNvSpPr>
+          <p:nvPr>
+            <p:ph type="sldNum" sz="quarter" idx="12"/>
+          </p:nvPr>
+        </p:nvSpPr>
+        <p:spPr/>
+        <p:txBody>
+          <a:bodyPr/>
+          <a:lstStyle/>
+          <a:p>
+            <a:fld id="{B82CCC60-E8CD-4174-8B1A-7DF615B22EEF}" type="slidenum">
+              <a:rPr lang="en-US" smtClean="0"/>
+              <a:pPr/>
+              <a:t>10</a:t>
+            </a:fld>
+            <a:endParaRPr lang="en-US"/>
+          </a:p>
+        </p:txBody>
+      </p:sp>
+      <mc:AlternateContent xmlns:mc="http://schemas.openxmlformats.org/markup-compatibility/2006" xmlns:p14="http://schemas.microsoft.com/office/powerpoint/2010/main" xmlns:aink="http://schemas.microsoft.com/office/drawing/2016/ink">
+        <mc:Choice Requires="p14 aink">
+          <p:contentPart p14:bwMode="auto" r:id="rId2">
+            <p14:nvContentPartPr>
+              <p14:cNvPr id="5" name="Ink 4">
+                <a:extLst>
+                  <a:ext uri="{FF2B5EF4-FFF2-40B4-BE49-F238E27FC236}">
+                    <a16:creationId xmlns:a16="http://schemas.microsoft.com/office/drawing/2014/main" id="{5C8296EC-CDFC-8ABE-8726-F4A4E8C22295}"/>
+                  </a:ext>
+                </a:extLst>
+              </p14:cNvPr>
+              <p14:cNvContentPartPr/>
+              <p14:nvPr/>
+            </p14:nvContentPartPr>
+            <p14:xfrm>
+              <a:off x="1533120" y="3068554"/>
+              <a:ext cx="7830360" cy="183240"/>
+            </p14:xfrm>
+          </p:contentPart>
+        </mc:Choice>
+        <mc:Fallback xmlns="">
+          <p:pic>
+            <p:nvPicPr>
+              <p:cNvPr id="5" name="Ink 4">
+                <a:extLst>
+                  <a:ext uri="{FF2B5EF4-FFF2-40B4-BE49-F238E27FC236}">
+                    <a16:creationId xmlns:a16="http://schemas.microsoft.com/office/drawing/2014/main" id="{5C8296EC-CDFC-8ABE-8726-F4A4E8C22295}"/>
+                  </a:ext>
+                </a:extLst>
+              </p:cNvPr>
+              <p:cNvPicPr/>
+              <p:nvPr/>
+            </p:nvPicPr>
+            <p:blipFill>
+              <a:blip r:embed="rId3"/>
+              <a:stretch>
+                <a:fillRect/>
+              </a:stretch>
+            </p:blipFill>
+            <p:spPr>
+              <a:xfrm>
+                <a:off x="1524480" y="3059554"/>
+                <a:ext cx="7848000" cy="200880"/>
+              </a:xfrm>
+              <a:prstGeom prst="rect">
+                <a:avLst/>
+              </a:prstGeom>
+            </p:spPr>
+          </p:pic>
+        </mc:Fallback>
+      </mc:AlternateContent>
+      <mc:AlternateContent xmlns:mc="http://schemas.openxmlformats.org/markup-compatibility/2006" xmlns:p14="http://schemas.microsoft.com/office/powerpoint/2010/main" xmlns:aink="http://schemas.microsoft.com/office/drawing/2016/ink">
+        <mc:Choice Requires="p14 aink">
+          <p:contentPart p14:bwMode="auto" r:id="rId4">
+            <p14:nvContentPartPr>
+              <p14:cNvPr id="6" name="Ink 5">
+                <a:extLst>
+                  <a:ext uri="{FF2B5EF4-FFF2-40B4-BE49-F238E27FC236}">
+                    <a16:creationId xmlns:a16="http://schemas.microsoft.com/office/drawing/2014/main" id="{4DF7E8AC-A130-3150-1A60-FDC345F5C99B}"/>
+                  </a:ext>
+                </a:extLst>
+              </p14:cNvPr>
+              <p14:cNvContentPartPr/>
+              <p14:nvPr/>
+            </p14:nvContentPartPr>
+            <p14:xfrm>
+              <a:off x="1647375" y="4817070"/>
+              <a:ext cx="6689160" cy="232200"/>
+            </p14:xfrm>
+          </p:contentPart>
+        </mc:Choice>
+        <mc:Fallback xmlns="">
+          <p:pic>
+            <p:nvPicPr>
+              <p:cNvPr id="6" name="Ink 5">
+                <a:extLst>
+                  <a:ext uri="{FF2B5EF4-FFF2-40B4-BE49-F238E27FC236}">
+                    <a16:creationId xmlns:a16="http://schemas.microsoft.com/office/drawing/2014/main" id="{4DF7E8AC-A130-3150-1A60-FDC345F5C99B}"/>
+                  </a:ext>
+                </a:extLst>
+              </p:cNvPr>
+              <p:cNvPicPr/>
+              <p:nvPr/>
+            </p:nvPicPr>
+            <p:blipFill>
+              <a:blip r:embed="rId5"/>
+              <a:stretch>
+                <a:fillRect/>
+              </a:stretch>
+            </p:blipFill>
+            <p:spPr>
+              <a:xfrm>
+                <a:off x="1638735" y="4808070"/>
+                <a:ext cx="6706800" cy="249840"/>
+              </a:xfrm>
+              <a:prstGeom prst="rect">
+                <a:avLst/>
+              </a:prstGeom>
+            </p:spPr>
+          </p:pic>
+        </mc:Fallback>
+      </mc:AlternateContent>
+      <p:cxnSp>
+        <p:nvCxnSpPr>
+          <p:cNvPr id="8" name="Straight Arrow Connector 7">
+            <a:extLst>
+              <a:ext uri="{FF2B5EF4-FFF2-40B4-BE49-F238E27FC236}">
+                <a16:creationId xmlns:a16="http://schemas.microsoft.com/office/drawing/2014/main" id="{FDE1B588-48AC-2A57-581B-673210CD1131}"/>
+              </a:ext>
+            </a:extLst>
+          </p:cNvPr>
+          <p:cNvCxnSpPr/>
+          <p:nvPr/>
+        </p:nvCxnSpPr>
+        <p:spPr>
+          <a:xfrm>
+            <a:off x="2466975" y="2847975"/>
+            <a:ext cx="381000" cy="0"/>
+          </a:xfrm>
+          <a:prstGeom prst="straightConnector1">
+            <a:avLst/>
+          </a:prstGeom>
+          <a:ln w="31750">
+            <a:tailEnd type="triangle"/>
+          </a:ln>
+        </p:spPr>
+        <p:style>
+          <a:lnRef idx="1">
+            <a:schemeClr val="accent1"/>
+          </a:lnRef>
+          <a:fillRef idx="0">
+            <a:schemeClr val="accent1"/>
+          </a:fillRef>
+          <a:effectRef idx="0">
+            <a:schemeClr val="accent1"/>
+          </a:effectRef>
+          <a:fontRef idx="minor">
+            <a:schemeClr val="tx1"/>
+          </a:fontRef>
+        </p:style>
+      </p:cxnSp>
+      <p:cxnSp>
+        <p:nvCxnSpPr>
+          <p:cNvPr id="9" name="Straight Arrow Connector 8">
+            <a:extLst>
+              <a:ext uri="{FF2B5EF4-FFF2-40B4-BE49-F238E27FC236}">
+                <a16:creationId xmlns:a16="http://schemas.microsoft.com/office/drawing/2014/main" id="{C9B6D4DD-A7D3-198B-2199-79FA37B15109}"/>
+              </a:ext>
+            </a:extLst>
+          </p:cNvPr>
+          <p:cNvCxnSpPr/>
+          <p:nvPr/>
+        </p:nvCxnSpPr>
+        <p:spPr>
+          <a:xfrm>
+            <a:off x="6257925" y="3013588"/>
+            <a:ext cx="381000" cy="0"/>
+          </a:xfrm>
+          <a:prstGeom prst="straightConnector1">
+            <a:avLst/>
+          </a:prstGeom>
+          <a:ln w="31750">
+            <a:tailEnd type="triangle"/>
+          </a:ln>
+        </p:spPr>
+        <p:style>
+          <a:lnRef idx="1">
+            <a:schemeClr val="accent1"/>
+          </a:lnRef>
+          <a:fillRef idx="0">
+            <a:schemeClr val="accent1"/>
+          </a:fillRef>
+          <a:effectRef idx="0">
+            <a:schemeClr val="accent1"/>
+          </a:effectRef>
+          <a:fontRef idx="minor">
+            <a:schemeClr val="tx1"/>
+          </a:fontRef>
+        </p:style>
+      </p:cxnSp>
+      <p:cxnSp>
+        <p:nvCxnSpPr>
+          <p:cNvPr id="12" name="Straight Arrow Connector 11">
+            <a:extLst>
+              <a:ext uri="{FF2B5EF4-FFF2-40B4-BE49-F238E27FC236}">
+                <a16:creationId xmlns:a16="http://schemas.microsoft.com/office/drawing/2014/main" id="{C3188086-5D46-D094-28C5-4729B16740CD}"/>
+              </a:ext>
+            </a:extLst>
+          </p:cNvPr>
+          <p:cNvCxnSpPr/>
+          <p:nvPr/>
+        </p:nvCxnSpPr>
+        <p:spPr>
+          <a:xfrm>
+            <a:off x="4238625" y="2900040"/>
+            <a:ext cx="381000" cy="0"/>
+          </a:xfrm>
+          <a:prstGeom prst="straightConnector1">
+            <a:avLst/>
+          </a:prstGeom>
+          <a:ln w="31750">
+            <a:headEnd type="triangle"/>
+            <a:tailEnd type="none"/>
+          </a:ln>
+        </p:spPr>
+        <p:style>
+          <a:lnRef idx="1">
+            <a:schemeClr val="accent1"/>
+          </a:lnRef>
+          <a:fillRef idx="0">
+            <a:schemeClr val="accent1"/>
+          </a:fillRef>
+          <a:effectRef idx="0">
+            <a:schemeClr val="accent1"/>
+          </a:effectRef>
+          <a:fontRef idx="minor">
+            <a:schemeClr val="tx1"/>
+          </a:fontRef>
+        </p:style>
+      </p:cxnSp>
+      <p:cxnSp>
+        <p:nvCxnSpPr>
+          <p:cNvPr id="13" name="Straight Arrow Connector 12">
+            <a:extLst>
+              <a:ext uri="{FF2B5EF4-FFF2-40B4-BE49-F238E27FC236}">
+                <a16:creationId xmlns:a16="http://schemas.microsoft.com/office/drawing/2014/main" id="{7E5A3213-7D82-0DAD-824D-F06305C284DE}"/>
+              </a:ext>
+            </a:extLst>
+          </p:cNvPr>
+          <p:cNvCxnSpPr/>
+          <p:nvPr/>
+        </p:nvCxnSpPr>
+        <p:spPr>
+          <a:xfrm>
+            <a:off x="5127625" y="2900040"/>
+            <a:ext cx="381000" cy="0"/>
+          </a:xfrm>
+          <a:prstGeom prst="straightConnector1">
+            <a:avLst/>
+          </a:prstGeom>
+          <a:ln w="31750">
+            <a:tailEnd type="triangle"/>
+          </a:ln>
+        </p:spPr>
+        <p:style>
+          <a:lnRef idx="1">
+            <a:schemeClr val="accent1"/>
+          </a:lnRef>
+          <a:fillRef idx="0">
+            <a:schemeClr val="accent1"/>
+          </a:fillRef>
+          <a:effectRef idx="0">
+            <a:schemeClr val="accent1"/>
+          </a:effectRef>
+          <a:fontRef idx="minor">
+            <a:schemeClr val="tx1"/>
+          </a:fontRef>
+        </p:style>
+      </p:cxnSp>
+      <p:sp>
+        <p:nvSpPr>
+          <p:cNvPr id="14" name="Freeform: Shape 13">
+            <a:extLst>
+              <a:ext uri="{FF2B5EF4-FFF2-40B4-BE49-F238E27FC236}">
+                <a16:creationId xmlns:a16="http://schemas.microsoft.com/office/drawing/2014/main" id="{3310791E-89A2-9F7A-4718-8C068604C5AB}"/>
+              </a:ext>
+            </a:extLst>
+          </p:cNvPr>
+          <p:cNvSpPr/>
+          <p:nvPr/>
+        </p:nvSpPr>
+        <p:spPr>
+          <a:xfrm>
+            <a:off x="4400550" y="2090413"/>
+            <a:ext cx="933450" cy="809627"/>
+          </a:xfrm>
+          <a:custGeom>
+            <a:avLst/>
+            <a:gdLst>
+              <a:gd name="connsiteX0" fmla="*/ 0 w 6305550"/>
+              <a:gd name="connsiteY0" fmla="*/ 809627 h 809627"/>
+              <a:gd name="connsiteX1" fmla="*/ 3190875 w 6305550"/>
+              <a:gd name="connsiteY1" fmla="*/ 2 h 809627"/>
+              <a:gd name="connsiteX2" fmla="*/ 6305550 w 6305550"/>
+              <a:gd name="connsiteY2" fmla="*/ 800102 h 809627"/>
+            </a:gdLst>
+            <a:ahLst/>
+            <a:cxnLst>
+              <a:cxn ang="0">
+                <a:pos x="connsiteX0" y="connsiteY0"/>
+              </a:cxn>
+              <a:cxn ang="0">
+                <a:pos x="connsiteX1" y="connsiteY1"/>
+              </a:cxn>
+              <a:cxn ang="0">
+                <a:pos x="connsiteX2" y="connsiteY2"/>
+              </a:cxn>
+            </a:cxnLst>
+            <a:rect l="l" t="t" r="r" b="b"/>
+            <a:pathLst>
+              <a:path w="6305550" h="809627">
+                <a:moveTo>
+                  <a:pt x="0" y="809627"/>
+                </a:moveTo>
+                <a:cubicBezTo>
+                  <a:pt x="1069975" y="405608"/>
+                  <a:pt x="2139950" y="1589"/>
+                  <a:pt x="3190875" y="2"/>
+                </a:cubicBezTo>
+                <a:cubicBezTo>
+                  <a:pt x="4241800" y="-1585"/>
+                  <a:pt x="6178550" y="690565"/>
+                  <a:pt x="6305550" y="800102"/>
+                </a:cubicBezTo>
+              </a:path>
+            </a:pathLst>
+          </a:custGeom>
+          <a:noFill/>
+          <a:ln w="12700"/>
+        </p:spPr>
+        <p:style>
+          <a:lnRef idx="2">
+            <a:schemeClr val="accent1">
+              <a:shade val="15000"/>
+            </a:schemeClr>
+          </a:lnRef>
+          <a:fillRef idx="1">
+            <a:schemeClr val="accent1"/>
+          </a:fillRef>
+          <a:effectRef idx="0">
+            <a:schemeClr val="accent1"/>
+          </a:effectRef>
+          <a:fontRef idx="minor">
+            <a:schemeClr val="lt1"/>
+          </a:fontRef>
+        </p:style>
+        <p:txBody>
+          <a:bodyPr rtlCol="0" anchor="ctr"/>
+          <a:lstStyle/>
+          <a:p>
+            <a:pPr algn="ctr"/>
+            <a:endParaRPr lang="en-US"/>
+          </a:p>
+        </p:txBody>
+      </p:sp>
+      <p:cxnSp>
+        <p:nvCxnSpPr>
+          <p:cNvPr id="15" name="Straight Arrow Connector 14">
+            <a:extLst>
+              <a:ext uri="{FF2B5EF4-FFF2-40B4-BE49-F238E27FC236}">
+                <a16:creationId xmlns:a16="http://schemas.microsoft.com/office/drawing/2014/main" id="{33705556-44D8-D0A6-3FFC-778B9C854CE9}"/>
+              </a:ext>
+            </a:extLst>
+          </p:cNvPr>
+          <p:cNvCxnSpPr/>
+          <p:nvPr/>
+        </p:nvCxnSpPr>
+        <p:spPr>
+          <a:xfrm>
+            <a:off x="5791200" y="2909564"/>
+            <a:ext cx="381000" cy="0"/>
+          </a:xfrm>
+          <a:prstGeom prst="straightConnector1">
+            <a:avLst/>
+          </a:prstGeom>
+          <a:ln w="31750">
+            <a:tailEnd type="triangle"/>
+          </a:ln>
+        </p:spPr>
+        <p:style>
+          <a:lnRef idx="1">
+            <a:schemeClr val="accent1"/>
+          </a:lnRef>
+          <a:fillRef idx="0">
+            <a:schemeClr val="accent1"/>
+          </a:fillRef>
+          <a:effectRef idx="0">
+            <a:schemeClr val="accent1"/>
+          </a:effectRef>
+          <a:fontRef idx="minor">
+            <a:schemeClr val="tx1"/>
+          </a:fontRef>
+        </p:style>
+      </p:cxnSp>
+      <p:cxnSp>
+        <p:nvCxnSpPr>
+          <p:cNvPr id="16" name="Straight Arrow Connector 15">
+            <a:extLst>
+              <a:ext uri="{FF2B5EF4-FFF2-40B4-BE49-F238E27FC236}">
+                <a16:creationId xmlns:a16="http://schemas.microsoft.com/office/drawing/2014/main" id="{C9EE24FD-DB73-04ED-DC64-D58AE5C27530}"/>
+              </a:ext>
+            </a:extLst>
+          </p:cNvPr>
+          <p:cNvCxnSpPr/>
+          <p:nvPr/>
+        </p:nvCxnSpPr>
+        <p:spPr>
+          <a:xfrm>
+            <a:off x="6680200" y="2909564"/>
+            <a:ext cx="381000" cy="0"/>
+          </a:xfrm>
+          <a:prstGeom prst="straightConnector1">
+            <a:avLst/>
+          </a:prstGeom>
+          <a:ln w="31750">
+            <a:headEnd type="triangle"/>
+            <a:tailEnd type="none"/>
+          </a:ln>
+        </p:spPr>
+        <p:style>
+          <a:lnRef idx="1">
+            <a:schemeClr val="accent1"/>
+          </a:lnRef>
+          <a:fillRef idx="0">
+            <a:schemeClr val="accent1"/>
+          </a:fillRef>
+          <a:effectRef idx="0">
+            <a:schemeClr val="accent1"/>
+          </a:effectRef>
+          <a:fontRef idx="minor">
+            <a:schemeClr val="tx1"/>
+          </a:fontRef>
+        </p:style>
+      </p:cxnSp>
+      <p:sp>
+        <p:nvSpPr>
+          <p:cNvPr id="17" name="Freeform: Shape 16">
+            <a:extLst>
+              <a:ext uri="{FF2B5EF4-FFF2-40B4-BE49-F238E27FC236}">
+                <a16:creationId xmlns:a16="http://schemas.microsoft.com/office/drawing/2014/main" id="{5EBE7A47-C638-99E8-3F34-FB340B0A71CE}"/>
+              </a:ext>
+            </a:extLst>
+          </p:cNvPr>
+          <p:cNvSpPr/>
+          <p:nvPr/>
+        </p:nvSpPr>
+        <p:spPr>
+          <a:xfrm>
+            <a:off x="5953125" y="2099937"/>
+            <a:ext cx="933450" cy="809627"/>
+          </a:xfrm>
+          <a:custGeom>
+            <a:avLst/>
+            <a:gdLst>
+              <a:gd name="connsiteX0" fmla="*/ 0 w 6305550"/>
+              <a:gd name="connsiteY0" fmla="*/ 809627 h 809627"/>
+              <a:gd name="connsiteX1" fmla="*/ 3190875 w 6305550"/>
+              <a:gd name="connsiteY1" fmla="*/ 2 h 809627"/>
+              <a:gd name="connsiteX2" fmla="*/ 6305550 w 6305550"/>
+              <a:gd name="connsiteY2" fmla="*/ 800102 h 809627"/>
+            </a:gdLst>
+            <a:ahLst/>
+            <a:cxnLst>
+              <a:cxn ang="0">
+                <a:pos x="connsiteX0" y="connsiteY0"/>
+              </a:cxn>
+              <a:cxn ang="0">
+                <a:pos x="connsiteX1" y="connsiteY1"/>
+              </a:cxn>
+              <a:cxn ang="0">
+                <a:pos x="connsiteX2" y="connsiteY2"/>
+              </a:cxn>
+            </a:cxnLst>
+            <a:rect l="l" t="t" r="r" b="b"/>
+            <a:pathLst>
+              <a:path w="6305550" h="809627">
+                <a:moveTo>
+                  <a:pt x="0" y="809627"/>
+                </a:moveTo>
+                <a:cubicBezTo>
+                  <a:pt x="1069975" y="405608"/>
+                  <a:pt x="2139950" y="1589"/>
+                  <a:pt x="3190875" y="2"/>
+                </a:cubicBezTo>
+                <a:cubicBezTo>
+                  <a:pt x="4241800" y="-1585"/>
+                  <a:pt x="6178550" y="690565"/>
+                  <a:pt x="6305550" y="800102"/>
+                </a:cubicBezTo>
+              </a:path>
+            </a:pathLst>
+          </a:custGeom>
+          <a:noFill/>
+          <a:ln w="12700"/>
+        </p:spPr>
+        <p:style>
+          <a:lnRef idx="2">
+            <a:schemeClr val="accent1">
+              <a:shade val="15000"/>
+            </a:schemeClr>
+          </a:lnRef>
+          <a:fillRef idx="1">
+            <a:schemeClr val="accent1"/>
+          </a:fillRef>
+          <a:effectRef idx="0">
+            <a:schemeClr val="accent1"/>
+          </a:effectRef>
+          <a:fontRef idx="minor">
+            <a:schemeClr val="lt1"/>
+          </a:fontRef>
+        </p:style>
+        <p:txBody>
+          <a:bodyPr rtlCol="0" anchor="ctr"/>
+          <a:lstStyle/>
+          <a:p>
+            <a:pPr algn="ctr"/>
+            <a:endParaRPr lang="en-US"/>
+          </a:p>
+        </p:txBody>
+      </p:sp>
+      <p:cxnSp>
+        <p:nvCxnSpPr>
+          <p:cNvPr id="18" name="Straight Arrow Connector 17">
+            <a:extLst>
+              <a:ext uri="{FF2B5EF4-FFF2-40B4-BE49-F238E27FC236}">
+                <a16:creationId xmlns:a16="http://schemas.microsoft.com/office/drawing/2014/main" id="{420DB376-312E-6447-DAE9-09E3D4438030}"/>
+              </a:ext>
+            </a:extLst>
+          </p:cNvPr>
+          <p:cNvCxnSpPr/>
+          <p:nvPr/>
+        </p:nvCxnSpPr>
+        <p:spPr>
+          <a:xfrm>
+            <a:off x="3028950" y="4750610"/>
+            <a:ext cx="381000" cy="0"/>
+          </a:xfrm>
+          <a:prstGeom prst="straightConnector1">
+            <a:avLst/>
+          </a:prstGeom>
+          <a:ln w="31750">
+            <a:tailEnd type="triangle"/>
+          </a:ln>
+        </p:spPr>
+        <p:style>
+          <a:lnRef idx="1">
+            <a:schemeClr val="accent1"/>
+          </a:lnRef>
+          <a:fillRef idx="0">
+            <a:schemeClr val="accent1"/>
+          </a:fillRef>
+          <a:effectRef idx="0">
+            <a:schemeClr val="accent1"/>
+          </a:effectRef>
+          <a:fontRef idx="minor">
+            <a:schemeClr val="tx1"/>
+          </a:fontRef>
+        </p:style>
+      </p:cxnSp>
+      <p:cxnSp>
+        <p:nvCxnSpPr>
+          <p:cNvPr id="19" name="Straight Arrow Connector 18">
+            <a:extLst>
+              <a:ext uri="{FF2B5EF4-FFF2-40B4-BE49-F238E27FC236}">
+                <a16:creationId xmlns:a16="http://schemas.microsoft.com/office/drawing/2014/main" id="{7721D3BD-326B-8110-A44F-71E3404621A3}"/>
+              </a:ext>
+            </a:extLst>
+          </p:cNvPr>
+          <p:cNvCxnSpPr/>
+          <p:nvPr/>
+        </p:nvCxnSpPr>
+        <p:spPr>
+          <a:xfrm>
+            <a:off x="3917950" y="4750610"/>
+            <a:ext cx="381000" cy="0"/>
+          </a:xfrm>
+          <a:prstGeom prst="straightConnector1">
+            <a:avLst/>
+          </a:prstGeom>
+          <a:ln w="31750">
+            <a:tailEnd type="triangle"/>
+          </a:ln>
+        </p:spPr>
+        <p:style>
+          <a:lnRef idx="1">
+            <a:schemeClr val="accent1"/>
+          </a:lnRef>
+          <a:fillRef idx="0">
+            <a:schemeClr val="accent1"/>
+          </a:fillRef>
+          <a:effectRef idx="0">
+            <a:schemeClr val="accent1"/>
+          </a:effectRef>
+          <a:fontRef idx="minor">
+            <a:schemeClr val="tx1"/>
+          </a:fontRef>
+        </p:style>
+      </p:cxnSp>
+      <p:sp>
+        <p:nvSpPr>
+          <p:cNvPr id="20" name="Freeform: Shape 19">
+            <a:extLst>
+              <a:ext uri="{FF2B5EF4-FFF2-40B4-BE49-F238E27FC236}">
+                <a16:creationId xmlns:a16="http://schemas.microsoft.com/office/drawing/2014/main" id="{D71AF64B-34D0-123C-DD07-F7E631000F30}"/>
+              </a:ext>
+            </a:extLst>
+          </p:cNvPr>
+          <p:cNvSpPr/>
+          <p:nvPr/>
+        </p:nvSpPr>
+        <p:spPr>
+          <a:xfrm>
+            <a:off x="3190875" y="3940983"/>
+            <a:ext cx="933450" cy="809627"/>
+          </a:xfrm>
+          <a:custGeom>
+            <a:avLst/>
+            <a:gdLst>
+              <a:gd name="connsiteX0" fmla="*/ 0 w 6305550"/>
+              <a:gd name="connsiteY0" fmla="*/ 809627 h 809627"/>
+              <a:gd name="connsiteX1" fmla="*/ 3190875 w 6305550"/>
+              <a:gd name="connsiteY1" fmla="*/ 2 h 809627"/>
+              <a:gd name="connsiteX2" fmla="*/ 6305550 w 6305550"/>
+              <a:gd name="connsiteY2" fmla="*/ 800102 h 809627"/>
+            </a:gdLst>
+            <a:ahLst/>
+            <a:cxnLst>
+              <a:cxn ang="0">
+                <a:pos x="connsiteX0" y="connsiteY0"/>
+              </a:cxn>
+              <a:cxn ang="0">
+                <a:pos x="connsiteX1" y="connsiteY1"/>
+              </a:cxn>
+              <a:cxn ang="0">
+                <a:pos x="connsiteX2" y="connsiteY2"/>
+              </a:cxn>
+            </a:cxnLst>
+            <a:rect l="l" t="t" r="r" b="b"/>
+            <a:pathLst>
+              <a:path w="6305550" h="809627">
+                <a:moveTo>
+                  <a:pt x="0" y="809627"/>
+                </a:moveTo>
+                <a:cubicBezTo>
+                  <a:pt x="1069975" y="405608"/>
+                  <a:pt x="2139950" y="1589"/>
+                  <a:pt x="3190875" y="2"/>
+                </a:cubicBezTo>
+                <a:cubicBezTo>
+                  <a:pt x="4241800" y="-1585"/>
+                  <a:pt x="6178550" y="690565"/>
+                  <a:pt x="6305550" y="800102"/>
+                </a:cubicBezTo>
+              </a:path>
+            </a:pathLst>
+          </a:custGeom>
+          <a:noFill/>
+          <a:ln w="12700"/>
+        </p:spPr>
+        <p:style>
+          <a:lnRef idx="2">
+            <a:schemeClr val="accent1">
+              <a:shade val="15000"/>
+            </a:schemeClr>
+          </a:lnRef>
+          <a:fillRef idx="1">
+            <a:schemeClr val="accent1"/>
+          </a:fillRef>
+          <a:effectRef idx="0">
+            <a:schemeClr val="accent1"/>
+          </a:effectRef>
+          <a:fontRef idx="minor">
+            <a:schemeClr val="lt1"/>
+          </a:fontRef>
+        </p:style>
+        <p:txBody>
+          <a:bodyPr rtlCol="0" anchor="ctr"/>
+          <a:lstStyle/>
+          <a:p>
+            <a:pPr algn="ctr"/>
+            <a:endParaRPr lang="en-US"/>
+          </a:p>
+        </p:txBody>
+      </p:sp>
+      <p:cxnSp>
+        <p:nvCxnSpPr>
+          <p:cNvPr id="21" name="Straight Arrow Connector 20">
+            <a:extLst>
+              <a:ext uri="{FF2B5EF4-FFF2-40B4-BE49-F238E27FC236}">
+                <a16:creationId xmlns:a16="http://schemas.microsoft.com/office/drawing/2014/main" id="{C1228649-8CEA-E7C5-48C8-D9F1669EF4CD}"/>
+              </a:ext>
+            </a:extLst>
+          </p:cNvPr>
+          <p:cNvCxnSpPr/>
+          <p:nvPr/>
+        </p:nvCxnSpPr>
+        <p:spPr>
+          <a:xfrm>
+            <a:off x="3670300" y="4671180"/>
+            <a:ext cx="381000" cy="0"/>
+          </a:xfrm>
+          <a:prstGeom prst="straightConnector1">
+            <a:avLst/>
+          </a:prstGeom>
+          <a:ln w="31750">
+            <a:headEnd type="triangle"/>
+            <a:tailEnd type="none"/>
+          </a:ln>
+        </p:spPr>
+        <p:style>
+          <a:lnRef idx="1">
+            <a:schemeClr val="accent1"/>
+          </a:lnRef>
+          <a:fillRef idx="0">
+            <a:schemeClr val="accent1"/>
+          </a:fillRef>
+          <a:effectRef idx="0">
+            <a:schemeClr val="accent1"/>
+          </a:effectRef>
+          <a:fontRef idx="minor">
+            <a:schemeClr val="tx1"/>
+          </a:fontRef>
+        </p:style>
+      </p:cxnSp>
+      <p:cxnSp>
+        <p:nvCxnSpPr>
+          <p:cNvPr id="22" name="Straight Arrow Connector 21">
+            <a:extLst>
+              <a:ext uri="{FF2B5EF4-FFF2-40B4-BE49-F238E27FC236}">
+                <a16:creationId xmlns:a16="http://schemas.microsoft.com/office/drawing/2014/main" id="{C1E982CC-406C-16B0-29EC-E652B5D59287}"/>
+              </a:ext>
+            </a:extLst>
+          </p:cNvPr>
+          <p:cNvCxnSpPr/>
+          <p:nvPr/>
+        </p:nvCxnSpPr>
+        <p:spPr>
+          <a:xfrm>
+            <a:off x="4559300" y="4671180"/>
+            <a:ext cx="381000" cy="0"/>
+          </a:xfrm>
+          <a:prstGeom prst="straightConnector1">
+            <a:avLst/>
+          </a:prstGeom>
+          <a:ln w="31750">
+            <a:headEnd type="none"/>
+            <a:tailEnd type="triangle"/>
+          </a:ln>
+        </p:spPr>
+        <p:style>
+          <a:lnRef idx="1">
+            <a:schemeClr val="accent1"/>
+          </a:lnRef>
+          <a:fillRef idx="0">
+            <a:schemeClr val="accent1"/>
+          </a:fillRef>
+          <a:effectRef idx="0">
+            <a:schemeClr val="accent1"/>
+          </a:effectRef>
+          <a:fontRef idx="minor">
+            <a:schemeClr val="tx1"/>
+          </a:fontRef>
+        </p:style>
+      </p:cxnSp>
+      <p:sp>
+        <p:nvSpPr>
+          <p:cNvPr id="23" name="Freeform: Shape 22">
+            <a:extLst>
+              <a:ext uri="{FF2B5EF4-FFF2-40B4-BE49-F238E27FC236}">
+                <a16:creationId xmlns:a16="http://schemas.microsoft.com/office/drawing/2014/main" id="{3226AC43-BEE6-5463-187C-49625E652F2E}"/>
+              </a:ext>
+            </a:extLst>
+          </p:cNvPr>
+          <p:cNvSpPr/>
+          <p:nvPr/>
+        </p:nvSpPr>
+        <p:spPr>
+          <a:xfrm>
+            <a:off x="3832225" y="3861553"/>
+            <a:ext cx="933450" cy="809627"/>
+          </a:xfrm>
+          <a:custGeom>
+            <a:avLst/>
+            <a:gdLst>
+              <a:gd name="connsiteX0" fmla="*/ 0 w 6305550"/>
+              <a:gd name="connsiteY0" fmla="*/ 809627 h 809627"/>
+              <a:gd name="connsiteX1" fmla="*/ 3190875 w 6305550"/>
+              <a:gd name="connsiteY1" fmla="*/ 2 h 809627"/>
+              <a:gd name="connsiteX2" fmla="*/ 6305550 w 6305550"/>
+              <a:gd name="connsiteY2" fmla="*/ 800102 h 809627"/>
+            </a:gdLst>
+            <a:ahLst/>
+            <a:cxnLst>
+              <a:cxn ang="0">
+                <a:pos x="connsiteX0" y="connsiteY0"/>
+              </a:cxn>
+              <a:cxn ang="0">
+                <a:pos x="connsiteX1" y="connsiteY1"/>
+              </a:cxn>
+              <a:cxn ang="0">
+                <a:pos x="connsiteX2" y="connsiteY2"/>
+              </a:cxn>
+            </a:cxnLst>
+            <a:rect l="l" t="t" r="r" b="b"/>
+            <a:pathLst>
+              <a:path w="6305550" h="809627">
+                <a:moveTo>
+                  <a:pt x="0" y="809627"/>
+                </a:moveTo>
+                <a:cubicBezTo>
+                  <a:pt x="1069975" y="405608"/>
+                  <a:pt x="2139950" y="1589"/>
+                  <a:pt x="3190875" y="2"/>
+                </a:cubicBezTo>
+                <a:cubicBezTo>
+                  <a:pt x="4241800" y="-1585"/>
+                  <a:pt x="6178550" y="690565"/>
+                  <a:pt x="6305550" y="800102"/>
+                </a:cubicBezTo>
+              </a:path>
+            </a:pathLst>
+          </a:custGeom>
+          <a:noFill/>
+          <a:ln w="12700"/>
+        </p:spPr>
+        <p:style>
+          <a:lnRef idx="2">
+            <a:schemeClr val="accent1">
+              <a:shade val="15000"/>
+            </a:schemeClr>
+          </a:lnRef>
+          <a:fillRef idx="1">
+            <a:schemeClr val="accent1"/>
+          </a:fillRef>
+          <a:effectRef idx="0">
+            <a:schemeClr val="accent1"/>
+          </a:effectRef>
+          <a:fontRef idx="minor">
+            <a:schemeClr val="lt1"/>
+          </a:fontRef>
+        </p:style>
+        <p:txBody>
+          <a:bodyPr rtlCol="0" anchor="ctr"/>
+          <a:lstStyle/>
+          <a:p>
+            <a:pPr algn="ctr"/>
+            <a:endParaRPr lang="en-US"/>
+          </a:p>
+        </p:txBody>
+      </p:sp>
+      <p:cxnSp>
+        <p:nvCxnSpPr>
+          <p:cNvPr id="24" name="Straight Arrow Connector 23">
+            <a:extLst>
+              <a:ext uri="{FF2B5EF4-FFF2-40B4-BE49-F238E27FC236}">
+                <a16:creationId xmlns:a16="http://schemas.microsoft.com/office/drawing/2014/main" id="{8371F950-534F-4C5B-65FF-B17691AC67CB}"/>
+              </a:ext>
+            </a:extLst>
+          </p:cNvPr>
+          <p:cNvCxnSpPr>
+            <a:cxnSpLocks/>
+          </p:cNvCxnSpPr>
+          <p:nvPr/>
+        </p:nvCxnSpPr>
+        <p:spPr>
+          <a:xfrm>
+            <a:off x="4965700" y="4783840"/>
+            <a:ext cx="381000" cy="0"/>
+          </a:xfrm>
+          <a:prstGeom prst="straightConnector1">
+            <a:avLst/>
+          </a:prstGeom>
+          <a:ln w="31750">
+            <a:headEnd type="triangle"/>
+            <a:tailEnd type="none"/>
+          </a:ln>
+        </p:spPr>
+        <p:style>
+          <a:lnRef idx="1">
+            <a:schemeClr val="accent1"/>
+          </a:lnRef>
+          <a:fillRef idx="0">
+            <a:schemeClr val="accent1"/>
+          </a:fillRef>
+          <a:effectRef idx="0">
+            <a:schemeClr val="accent1"/>
+          </a:effectRef>
+          <a:fontRef idx="minor">
+            <a:schemeClr val="tx1"/>
+          </a:fontRef>
+        </p:style>
+      </p:cxnSp>
+      <p:cxnSp>
+        <p:nvCxnSpPr>
+          <p:cNvPr id="25" name="Straight Arrow Connector 24">
+            <a:extLst>
+              <a:ext uri="{FF2B5EF4-FFF2-40B4-BE49-F238E27FC236}">
+                <a16:creationId xmlns:a16="http://schemas.microsoft.com/office/drawing/2014/main" id="{7340D12C-C9F5-72C3-4DD1-F1FF54C77862}"/>
+              </a:ext>
+            </a:extLst>
+          </p:cNvPr>
+          <p:cNvCxnSpPr>
+            <a:cxnSpLocks/>
+          </p:cNvCxnSpPr>
+          <p:nvPr/>
+        </p:nvCxnSpPr>
+        <p:spPr>
+          <a:xfrm>
+            <a:off x="6299200" y="4795655"/>
+            <a:ext cx="381000" cy="0"/>
+          </a:xfrm>
+          <a:prstGeom prst="straightConnector1">
+            <a:avLst/>
+          </a:prstGeom>
+          <a:ln w="31750">
+            <a:headEnd type="triangle"/>
+            <a:tailEnd type="none"/>
+          </a:ln>
+        </p:spPr>
+        <p:style>
+          <a:lnRef idx="1">
+            <a:schemeClr val="accent1"/>
+          </a:lnRef>
+          <a:fillRef idx="0">
+            <a:schemeClr val="accent1"/>
+          </a:fillRef>
+          <a:effectRef idx="0">
+            <a:schemeClr val="accent1"/>
+          </a:effectRef>
+          <a:fontRef idx="minor">
+            <a:schemeClr val="tx1"/>
+          </a:fontRef>
+        </p:style>
+      </p:cxnSp>
+      <p:sp>
+        <p:nvSpPr>
+          <p:cNvPr id="26" name="Freeform: Shape 25">
+            <a:extLst>
+              <a:ext uri="{FF2B5EF4-FFF2-40B4-BE49-F238E27FC236}">
+                <a16:creationId xmlns:a16="http://schemas.microsoft.com/office/drawing/2014/main" id="{EB97FA8A-176C-E7A8-AC5D-5ECB1D7852FB}"/>
+              </a:ext>
+            </a:extLst>
+          </p:cNvPr>
+          <p:cNvSpPr/>
+          <p:nvPr/>
+        </p:nvSpPr>
+        <p:spPr>
+          <a:xfrm>
+            <a:off x="5127625" y="3974213"/>
+            <a:ext cx="1320800" cy="809627"/>
+          </a:xfrm>
+          <a:custGeom>
+            <a:avLst/>
+            <a:gdLst>
+              <a:gd name="connsiteX0" fmla="*/ 0 w 6305550"/>
+              <a:gd name="connsiteY0" fmla="*/ 809627 h 809627"/>
+              <a:gd name="connsiteX1" fmla="*/ 3190875 w 6305550"/>
+              <a:gd name="connsiteY1" fmla="*/ 2 h 809627"/>
+              <a:gd name="connsiteX2" fmla="*/ 6305550 w 6305550"/>
+              <a:gd name="connsiteY2" fmla="*/ 800102 h 809627"/>
+            </a:gdLst>
+            <a:ahLst/>
+            <a:cxnLst>
+              <a:cxn ang="0">
+                <a:pos x="connsiteX0" y="connsiteY0"/>
+              </a:cxn>
+              <a:cxn ang="0">
+                <a:pos x="connsiteX1" y="connsiteY1"/>
+              </a:cxn>
+              <a:cxn ang="0">
+                <a:pos x="connsiteX2" y="connsiteY2"/>
+              </a:cxn>
+            </a:cxnLst>
+            <a:rect l="l" t="t" r="r" b="b"/>
+            <a:pathLst>
+              <a:path w="6305550" h="809627">
+                <a:moveTo>
+                  <a:pt x="0" y="809627"/>
+                </a:moveTo>
+                <a:cubicBezTo>
+                  <a:pt x="1069975" y="405608"/>
+                  <a:pt x="2139950" y="1589"/>
+                  <a:pt x="3190875" y="2"/>
+                </a:cubicBezTo>
+                <a:cubicBezTo>
+                  <a:pt x="4241800" y="-1585"/>
+                  <a:pt x="6178550" y="690565"/>
+                  <a:pt x="6305550" y="800102"/>
+                </a:cubicBezTo>
+              </a:path>
+            </a:pathLst>
+          </a:custGeom>
+          <a:noFill/>
+          <a:ln w="12700"/>
+        </p:spPr>
+        <p:style>
+          <a:lnRef idx="2">
+            <a:schemeClr val="accent1">
+              <a:shade val="15000"/>
+            </a:schemeClr>
+          </a:lnRef>
+          <a:fillRef idx="1">
+            <a:schemeClr val="accent1"/>
+          </a:fillRef>
+          <a:effectRef idx="0">
+            <a:schemeClr val="accent1"/>
+          </a:effectRef>
+          <a:fontRef idx="minor">
+            <a:schemeClr val="lt1"/>
+          </a:fontRef>
+        </p:style>
+        <p:txBody>
+          <a:bodyPr rtlCol="0" anchor="ctr"/>
+          <a:lstStyle/>
+          <a:p>
+            <a:pPr algn="ctr"/>
+            <a:endParaRPr lang="en-US"/>
+          </a:p>
+        </p:txBody>
+      </p:sp>
+      <p:cxnSp>
+        <p:nvCxnSpPr>
+          <p:cNvPr id="32" name="Straight Arrow Connector 31">
+            <a:extLst>
+              <a:ext uri="{FF2B5EF4-FFF2-40B4-BE49-F238E27FC236}">
+                <a16:creationId xmlns:a16="http://schemas.microsoft.com/office/drawing/2014/main" id="{37E3447D-C9CA-30DC-425A-606924CD602B}"/>
+              </a:ext>
+            </a:extLst>
+          </p:cNvPr>
+          <p:cNvCxnSpPr/>
+          <p:nvPr/>
+        </p:nvCxnSpPr>
+        <p:spPr>
+          <a:xfrm>
+            <a:off x="4391025" y="3052440"/>
+            <a:ext cx="381000" cy="0"/>
+          </a:xfrm>
+          <a:prstGeom prst="straightConnector1">
+            <a:avLst/>
+          </a:prstGeom>
+          <a:ln w="31750">
+            <a:tailEnd type="triangle"/>
+          </a:ln>
+        </p:spPr>
+        <p:style>
+          <a:lnRef idx="1">
+            <a:schemeClr val="accent1"/>
+          </a:lnRef>
+          <a:fillRef idx="0">
+            <a:schemeClr val="accent1"/>
+          </a:fillRef>
+          <a:effectRef idx="0">
+            <a:schemeClr val="accent1"/>
+          </a:effectRef>
+          <a:fontRef idx="minor">
+            <a:schemeClr val="tx1"/>
+          </a:fontRef>
+        </p:style>
+      </p:cxnSp>
+      <p:cxnSp>
+        <p:nvCxnSpPr>
+          <p:cNvPr id="33" name="Straight Arrow Connector 32">
+            <a:extLst>
+              <a:ext uri="{FF2B5EF4-FFF2-40B4-BE49-F238E27FC236}">
+                <a16:creationId xmlns:a16="http://schemas.microsoft.com/office/drawing/2014/main" id="{5D756661-C434-ECEC-1356-F09AACA9A506}"/>
+              </a:ext>
+            </a:extLst>
+          </p:cNvPr>
+          <p:cNvCxnSpPr/>
+          <p:nvPr/>
+        </p:nvCxnSpPr>
+        <p:spPr>
+          <a:xfrm>
+            <a:off x="5280025" y="3052440"/>
+            <a:ext cx="381000" cy="0"/>
+          </a:xfrm>
+          <a:prstGeom prst="straightConnector1">
+            <a:avLst/>
+          </a:prstGeom>
+          <a:ln w="31750">
+            <a:tailEnd type="triangle"/>
+          </a:ln>
+        </p:spPr>
+        <p:style>
+          <a:lnRef idx="1">
+            <a:schemeClr val="accent1"/>
+          </a:lnRef>
+          <a:fillRef idx="0">
+            <a:schemeClr val="accent1"/>
+          </a:fillRef>
+          <a:effectRef idx="0">
+            <a:schemeClr val="accent1"/>
+          </a:effectRef>
+          <a:fontRef idx="minor">
+            <a:schemeClr val="tx1"/>
+          </a:fontRef>
+        </p:style>
+      </p:cxnSp>
+      <p:sp>
+        <p:nvSpPr>
+          <p:cNvPr id="34" name="Freeform: Shape 33">
+            <a:extLst>
+              <a:ext uri="{FF2B5EF4-FFF2-40B4-BE49-F238E27FC236}">
+                <a16:creationId xmlns:a16="http://schemas.microsoft.com/office/drawing/2014/main" id="{431C7A63-9F02-F623-5881-9807C4E113B4}"/>
+              </a:ext>
+            </a:extLst>
+          </p:cNvPr>
+          <p:cNvSpPr/>
+          <p:nvPr/>
+        </p:nvSpPr>
+        <p:spPr>
+          <a:xfrm>
+            <a:off x="4552950" y="2242813"/>
+            <a:ext cx="933450" cy="809627"/>
+          </a:xfrm>
+          <a:custGeom>
+            <a:avLst/>
+            <a:gdLst>
+              <a:gd name="connsiteX0" fmla="*/ 0 w 6305550"/>
+              <a:gd name="connsiteY0" fmla="*/ 809627 h 809627"/>
+              <a:gd name="connsiteX1" fmla="*/ 3190875 w 6305550"/>
+              <a:gd name="connsiteY1" fmla="*/ 2 h 809627"/>
+              <a:gd name="connsiteX2" fmla="*/ 6305550 w 6305550"/>
+              <a:gd name="connsiteY2" fmla="*/ 800102 h 809627"/>
+            </a:gdLst>
+            <a:ahLst/>
+            <a:cxnLst>
+              <a:cxn ang="0">
+                <a:pos x="connsiteX0" y="connsiteY0"/>
+              </a:cxn>
+              <a:cxn ang="0">
+                <a:pos x="connsiteX1" y="connsiteY1"/>
+              </a:cxn>
+              <a:cxn ang="0">
+                <a:pos x="connsiteX2" y="connsiteY2"/>
+              </a:cxn>
+            </a:cxnLst>
+            <a:rect l="l" t="t" r="r" b="b"/>
+            <a:pathLst>
+              <a:path w="6305550" h="809627">
+                <a:moveTo>
+                  <a:pt x="0" y="809627"/>
+                </a:moveTo>
+                <a:cubicBezTo>
+                  <a:pt x="1069975" y="405608"/>
+                  <a:pt x="2139950" y="1589"/>
+                  <a:pt x="3190875" y="2"/>
+                </a:cubicBezTo>
+                <a:cubicBezTo>
+                  <a:pt x="4241800" y="-1585"/>
+                  <a:pt x="6178550" y="690565"/>
+                  <a:pt x="6305550" y="800102"/>
+                </a:cubicBezTo>
+              </a:path>
+            </a:pathLst>
+          </a:custGeom>
+          <a:noFill/>
+          <a:ln w="12700"/>
+        </p:spPr>
+        <p:style>
+          <a:lnRef idx="2">
+            <a:schemeClr val="accent1">
+              <a:shade val="15000"/>
+            </a:schemeClr>
+          </a:lnRef>
+          <a:fillRef idx="1">
+            <a:schemeClr val="accent1"/>
+          </a:fillRef>
+          <a:effectRef idx="0">
+            <a:schemeClr val="accent1"/>
+          </a:effectRef>
+          <a:fontRef idx="minor">
+            <a:schemeClr val="lt1"/>
+          </a:fontRef>
+        </p:style>
+        <p:txBody>
+          <a:bodyPr rtlCol="0" anchor="ctr"/>
+          <a:lstStyle/>
+          <a:p>
+            <a:pPr algn="ctr"/>
+            <a:endParaRPr lang="en-US"/>
+          </a:p>
+        </p:txBody>
+      </p:sp>
+      <p:cxnSp>
+        <p:nvCxnSpPr>
+          <p:cNvPr id="35" name="Straight Arrow Connector 34">
+            <a:extLst>
+              <a:ext uri="{FF2B5EF4-FFF2-40B4-BE49-F238E27FC236}">
+                <a16:creationId xmlns:a16="http://schemas.microsoft.com/office/drawing/2014/main" id="{53ECE987-50DF-2219-BEC8-947BACE48A0C}"/>
+              </a:ext>
+            </a:extLst>
+          </p:cNvPr>
+          <p:cNvCxnSpPr/>
+          <p:nvPr/>
+        </p:nvCxnSpPr>
+        <p:spPr>
+          <a:xfrm>
+            <a:off x="1733550" y="4750610"/>
+            <a:ext cx="381000" cy="0"/>
+          </a:xfrm>
+          <a:prstGeom prst="straightConnector1">
+            <a:avLst/>
+          </a:prstGeom>
+          <a:ln w="31750">
+            <a:tailEnd type="triangle"/>
+          </a:ln>
+        </p:spPr>
+        <p:style>
+          <a:lnRef idx="1">
+            <a:schemeClr val="accent1"/>
+          </a:lnRef>
+          <a:fillRef idx="0">
+            <a:schemeClr val="accent1"/>
+          </a:fillRef>
+          <a:effectRef idx="0">
+            <a:schemeClr val="accent1"/>
+          </a:effectRef>
+          <a:fontRef idx="minor">
+            <a:schemeClr val="tx1"/>
+          </a:fontRef>
+        </p:style>
+      </p:cxnSp>
+      <p:cxnSp>
+        <p:nvCxnSpPr>
+          <p:cNvPr id="36" name="Straight Arrow Connector 35">
+            <a:extLst>
+              <a:ext uri="{FF2B5EF4-FFF2-40B4-BE49-F238E27FC236}">
+                <a16:creationId xmlns:a16="http://schemas.microsoft.com/office/drawing/2014/main" id="{DF59B62A-BCC0-BA89-B26B-FB01DEFC0C5B}"/>
+              </a:ext>
+            </a:extLst>
+          </p:cNvPr>
+          <p:cNvCxnSpPr/>
+          <p:nvPr/>
+        </p:nvCxnSpPr>
+        <p:spPr>
+          <a:xfrm>
+            <a:off x="7385050" y="4748245"/>
+            <a:ext cx="381000" cy="0"/>
+          </a:xfrm>
+          <a:prstGeom prst="straightConnector1">
+            <a:avLst/>
+          </a:prstGeom>
+          <a:ln w="31750">
+            <a:headEnd type="triangle"/>
+            <a:tailEnd type="none"/>
+          </a:ln>
+        </p:spPr>
+        <p:style>
+          <a:lnRef idx="1">
+            <a:schemeClr val="accent1"/>
+          </a:lnRef>
+          <a:fillRef idx="0">
+            <a:schemeClr val="accent1"/>
+          </a:fillRef>
+          <a:effectRef idx="0">
+            <a:schemeClr val="accent1"/>
+          </a:effectRef>
+          <a:fontRef idx="minor">
+            <a:schemeClr val="tx1"/>
+          </a:fontRef>
+        </p:style>
+      </p:cxnSp>
+      <p:sp>
+        <p:nvSpPr>
+          <p:cNvPr id="37" name="Freeform: Shape 36">
+            <a:extLst>
+              <a:ext uri="{FF2B5EF4-FFF2-40B4-BE49-F238E27FC236}">
+                <a16:creationId xmlns:a16="http://schemas.microsoft.com/office/drawing/2014/main" id="{9BAF0540-B78F-39E0-1289-B3920FF94E75}"/>
+              </a:ext>
+            </a:extLst>
+          </p:cNvPr>
+          <p:cNvSpPr/>
+          <p:nvPr/>
+        </p:nvSpPr>
+        <p:spPr>
+          <a:xfrm>
+            <a:off x="1895475" y="3940983"/>
+            <a:ext cx="5638800" cy="809627"/>
+          </a:xfrm>
+          <a:custGeom>
+            <a:avLst/>
+            <a:gdLst>
+              <a:gd name="connsiteX0" fmla="*/ 0 w 6305550"/>
+              <a:gd name="connsiteY0" fmla="*/ 809627 h 809627"/>
+              <a:gd name="connsiteX1" fmla="*/ 3190875 w 6305550"/>
+              <a:gd name="connsiteY1" fmla="*/ 2 h 809627"/>
+              <a:gd name="connsiteX2" fmla="*/ 6305550 w 6305550"/>
+              <a:gd name="connsiteY2" fmla="*/ 800102 h 809627"/>
+            </a:gdLst>
+            <a:ahLst/>
+            <a:cxnLst>
+              <a:cxn ang="0">
+                <a:pos x="connsiteX0" y="connsiteY0"/>
+              </a:cxn>
+              <a:cxn ang="0">
+                <a:pos x="connsiteX1" y="connsiteY1"/>
+              </a:cxn>
+              <a:cxn ang="0">
+                <a:pos x="connsiteX2" y="connsiteY2"/>
+              </a:cxn>
+            </a:cxnLst>
+            <a:rect l="l" t="t" r="r" b="b"/>
+            <a:pathLst>
+              <a:path w="6305550" h="809627">
+                <a:moveTo>
+                  <a:pt x="0" y="809627"/>
+                </a:moveTo>
+                <a:cubicBezTo>
+                  <a:pt x="1069975" y="405608"/>
+                  <a:pt x="2139950" y="1589"/>
+                  <a:pt x="3190875" y="2"/>
+                </a:cubicBezTo>
+                <a:cubicBezTo>
+                  <a:pt x="4241800" y="-1585"/>
+                  <a:pt x="6178550" y="690565"/>
+                  <a:pt x="6305550" y="800102"/>
+                </a:cubicBezTo>
+              </a:path>
+            </a:pathLst>
+          </a:custGeom>
+          <a:noFill/>
+          <a:ln w="12700"/>
+        </p:spPr>
+        <p:style>
+          <a:lnRef idx="2">
+            <a:schemeClr val="accent1">
+              <a:shade val="15000"/>
+            </a:schemeClr>
+          </a:lnRef>
+          <a:fillRef idx="1">
+            <a:schemeClr val="accent1"/>
+          </a:fillRef>
+          <a:effectRef idx="0">
+            <a:schemeClr val="accent1"/>
+          </a:effectRef>
+          <a:fontRef idx="minor">
+            <a:schemeClr val="lt1"/>
+          </a:fontRef>
+        </p:style>
+        <p:txBody>
+          <a:bodyPr rtlCol="0" anchor="ctr"/>
+          <a:lstStyle/>
+          <a:p>
+            <a:pPr algn="ctr"/>
+            <a:endParaRPr lang="en-US"/>
+          </a:p>
+        </p:txBody>
+      </p:sp>
+      <p:cxnSp>
+        <p:nvCxnSpPr>
+          <p:cNvPr id="38" name="Straight Arrow Connector 37">
+            <a:extLst>
+              <a:ext uri="{FF2B5EF4-FFF2-40B4-BE49-F238E27FC236}">
+                <a16:creationId xmlns:a16="http://schemas.microsoft.com/office/drawing/2014/main" id="{92E79611-0A2E-7D4A-ADEB-0A3CB6C98270}"/>
+              </a:ext>
+            </a:extLst>
+          </p:cNvPr>
+          <p:cNvCxnSpPr/>
+          <p:nvPr/>
+        </p:nvCxnSpPr>
+        <p:spPr>
+          <a:xfrm>
+            <a:off x="1571625" y="2810379"/>
+            <a:ext cx="381000" cy="0"/>
+          </a:xfrm>
+          <a:prstGeom prst="straightConnector1">
+            <a:avLst/>
+          </a:prstGeom>
+          <a:ln w="31750">
+            <a:headEnd type="triangle"/>
+            <a:tailEnd type="none"/>
+          </a:ln>
+        </p:spPr>
+        <p:style>
+          <a:lnRef idx="1">
+            <a:schemeClr val="accent1"/>
+          </a:lnRef>
+          <a:fillRef idx="0">
+            <a:schemeClr val="accent1"/>
+          </a:fillRef>
+          <a:effectRef idx="0">
+            <a:schemeClr val="accent1"/>
+          </a:effectRef>
+          <a:fontRef idx="minor">
+            <a:schemeClr val="tx1"/>
+          </a:fontRef>
+        </p:style>
+      </p:cxnSp>
+      <p:cxnSp>
+        <p:nvCxnSpPr>
+          <p:cNvPr id="39" name="Straight Arrow Connector 38">
+            <a:extLst>
+              <a:ext uri="{FF2B5EF4-FFF2-40B4-BE49-F238E27FC236}">
+                <a16:creationId xmlns:a16="http://schemas.microsoft.com/office/drawing/2014/main" id="{73DD3A0D-5673-20F5-D2A0-C047DAC91276}"/>
+              </a:ext>
+            </a:extLst>
+          </p:cNvPr>
+          <p:cNvCxnSpPr/>
+          <p:nvPr/>
+        </p:nvCxnSpPr>
+        <p:spPr>
+          <a:xfrm>
+            <a:off x="7531100" y="2810379"/>
+            <a:ext cx="381000" cy="0"/>
+          </a:xfrm>
+          <a:prstGeom prst="straightConnector1">
+            <a:avLst/>
+          </a:prstGeom>
+          <a:ln w="31750">
+            <a:tailEnd type="triangle"/>
+          </a:ln>
+        </p:spPr>
+        <p:style>
+          <a:lnRef idx="1">
+            <a:schemeClr val="accent1"/>
+          </a:lnRef>
+          <a:fillRef idx="0">
+            <a:schemeClr val="accent1"/>
+          </a:fillRef>
+          <a:effectRef idx="0">
+            <a:schemeClr val="accent1"/>
+          </a:effectRef>
+          <a:fontRef idx="minor">
+            <a:schemeClr val="tx1"/>
+          </a:fontRef>
+        </p:style>
+      </p:cxnSp>
+      <p:sp>
+        <p:nvSpPr>
+          <p:cNvPr id="40" name="Freeform: Shape 39">
+            <a:extLst>
+              <a:ext uri="{FF2B5EF4-FFF2-40B4-BE49-F238E27FC236}">
+                <a16:creationId xmlns:a16="http://schemas.microsoft.com/office/drawing/2014/main" id="{01BDC7D7-BB37-DE6C-4382-3F7469354585}"/>
+              </a:ext>
+            </a:extLst>
+          </p:cNvPr>
+          <p:cNvSpPr/>
+          <p:nvPr/>
+        </p:nvSpPr>
+        <p:spPr>
+          <a:xfrm>
+            <a:off x="1733550" y="2000752"/>
+            <a:ext cx="5924550" cy="809627"/>
+          </a:xfrm>
+          <a:custGeom>
+            <a:avLst/>
+            <a:gdLst>
+              <a:gd name="connsiteX0" fmla="*/ 0 w 6305550"/>
+              <a:gd name="connsiteY0" fmla="*/ 809627 h 809627"/>
+              <a:gd name="connsiteX1" fmla="*/ 3190875 w 6305550"/>
+              <a:gd name="connsiteY1" fmla="*/ 2 h 809627"/>
+              <a:gd name="connsiteX2" fmla="*/ 6305550 w 6305550"/>
+              <a:gd name="connsiteY2" fmla="*/ 800102 h 809627"/>
+            </a:gdLst>
+            <a:ahLst/>
+            <a:cxnLst>
+              <a:cxn ang="0">
+                <a:pos x="connsiteX0" y="connsiteY0"/>
+              </a:cxn>
+              <a:cxn ang="0">
+                <a:pos x="connsiteX1" y="connsiteY1"/>
+              </a:cxn>
+              <a:cxn ang="0">
+                <a:pos x="connsiteX2" y="connsiteY2"/>
+              </a:cxn>
+            </a:cxnLst>
+            <a:rect l="l" t="t" r="r" b="b"/>
+            <a:pathLst>
+              <a:path w="6305550" h="809627">
+                <a:moveTo>
+                  <a:pt x="0" y="809627"/>
+                </a:moveTo>
+                <a:cubicBezTo>
+                  <a:pt x="1069975" y="405608"/>
+                  <a:pt x="2139950" y="1589"/>
+                  <a:pt x="3190875" y="2"/>
+                </a:cubicBezTo>
+                <a:cubicBezTo>
+                  <a:pt x="4241800" y="-1585"/>
+                  <a:pt x="6178550" y="690565"/>
+                  <a:pt x="6305550" y="800102"/>
+                </a:cubicBezTo>
+              </a:path>
+            </a:pathLst>
+          </a:custGeom>
+          <a:noFill/>
+          <a:ln w="12700"/>
+        </p:spPr>
+        <p:style>
+          <a:lnRef idx="2">
+            <a:schemeClr val="accent1">
+              <a:shade val="15000"/>
+            </a:schemeClr>
+          </a:lnRef>
+          <a:fillRef idx="1">
+            <a:schemeClr val="accent1"/>
+          </a:fillRef>
+          <a:effectRef idx="0">
+            <a:schemeClr val="accent1"/>
+          </a:effectRef>
+          <a:fontRef idx="minor">
+            <a:schemeClr val="lt1"/>
+          </a:fontRef>
+        </p:style>
+        <p:txBody>
+          <a:bodyPr rtlCol="0" anchor="ctr"/>
+          <a:lstStyle/>
+          <a:p>
+            <a:pPr algn="ctr"/>
+            <a:endParaRPr lang="en-US"/>
+          </a:p>
+        </p:txBody>
+      </p:sp>
+      <p:cxnSp>
+        <p:nvCxnSpPr>
+          <p:cNvPr id="41" name="Straight Arrow Connector 40">
+            <a:extLst>
+              <a:ext uri="{FF2B5EF4-FFF2-40B4-BE49-F238E27FC236}">
+                <a16:creationId xmlns:a16="http://schemas.microsoft.com/office/drawing/2014/main" id="{1EC61FF8-9FCB-23BF-1010-E4CDDBF84C87}"/>
+              </a:ext>
+            </a:extLst>
+          </p:cNvPr>
+          <p:cNvCxnSpPr/>
+          <p:nvPr/>
+        </p:nvCxnSpPr>
+        <p:spPr>
+          <a:xfrm>
+            <a:off x="5610225" y="4624195"/>
+            <a:ext cx="381000" cy="0"/>
+          </a:xfrm>
+          <a:prstGeom prst="straightConnector1">
+            <a:avLst/>
+          </a:prstGeom>
+          <a:ln w="31750">
+            <a:tailEnd type="triangle"/>
+          </a:ln>
+        </p:spPr>
+        <p:style>
+          <a:lnRef idx="1">
+            <a:schemeClr val="accent1"/>
+          </a:lnRef>
+          <a:fillRef idx="0">
+            <a:schemeClr val="accent1"/>
+          </a:fillRef>
+          <a:effectRef idx="0">
+            <a:schemeClr val="accent1"/>
+          </a:effectRef>
+          <a:fontRef idx="minor">
+            <a:schemeClr val="tx1"/>
+          </a:fontRef>
+        </p:style>
+      </p:cxnSp>
+      <p:cxnSp>
+        <p:nvCxnSpPr>
+          <p:cNvPr id="42" name="Straight Arrow Connector 41">
+            <a:extLst>
+              <a:ext uri="{FF2B5EF4-FFF2-40B4-BE49-F238E27FC236}">
+                <a16:creationId xmlns:a16="http://schemas.microsoft.com/office/drawing/2014/main" id="{A8BF60E4-A8DA-B555-A524-1FBD788A28EF}"/>
+              </a:ext>
+            </a:extLst>
+          </p:cNvPr>
+          <p:cNvCxnSpPr/>
+          <p:nvPr/>
+        </p:nvCxnSpPr>
+        <p:spPr>
+          <a:xfrm>
+            <a:off x="6543675" y="4624195"/>
+            <a:ext cx="381000" cy="0"/>
+          </a:xfrm>
+          <a:prstGeom prst="straightConnector1">
+            <a:avLst/>
+          </a:prstGeom>
+          <a:ln w="31750">
+            <a:headEnd type="triangle"/>
+            <a:tailEnd type="none"/>
+          </a:ln>
+        </p:spPr>
+        <p:style>
+          <a:lnRef idx="1">
+            <a:schemeClr val="accent1"/>
+          </a:lnRef>
+          <a:fillRef idx="0">
+            <a:schemeClr val="accent1"/>
+          </a:fillRef>
+          <a:effectRef idx="0">
+            <a:schemeClr val="accent1"/>
+          </a:effectRef>
+          <a:fontRef idx="minor">
+            <a:schemeClr val="tx1"/>
+          </a:fontRef>
+        </p:style>
+      </p:cxnSp>
+      <p:sp>
+        <p:nvSpPr>
+          <p:cNvPr id="43" name="Freeform: Shape 42">
+            <a:extLst>
+              <a:ext uri="{FF2B5EF4-FFF2-40B4-BE49-F238E27FC236}">
+                <a16:creationId xmlns:a16="http://schemas.microsoft.com/office/drawing/2014/main" id="{6A6669BF-82A8-C194-93EB-0D0460DBDDF7}"/>
+              </a:ext>
+            </a:extLst>
+          </p:cNvPr>
+          <p:cNvSpPr/>
+          <p:nvPr/>
+        </p:nvSpPr>
+        <p:spPr>
+          <a:xfrm>
+            <a:off x="5800725" y="3810129"/>
+            <a:ext cx="933450" cy="809627"/>
+          </a:xfrm>
+          <a:custGeom>
+            <a:avLst/>
+            <a:gdLst>
+              <a:gd name="connsiteX0" fmla="*/ 0 w 6305550"/>
+              <a:gd name="connsiteY0" fmla="*/ 809627 h 809627"/>
+              <a:gd name="connsiteX1" fmla="*/ 3190875 w 6305550"/>
+              <a:gd name="connsiteY1" fmla="*/ 2 h 809627"/>
+              <a:gd name="connsiteX2" fmla="*/ 6305550 w 6305550"/>
+              <a:gd name="connsiteY2" fmla="*/ 800102 h 809627"/>
+            </a:gdLst>
+            <a:ahLst/>
+            <a:cxnLst>
+              <a:cxn ang="0">
+                <a:pos x="connsiteX0" y="connsiteY0"/>
+              </a:cxn>
+              <a:cxn ang="0">
+                <a:pos x="connsiteX1" y="connsiteY1"/>
+              </a:cxn>
+              <a:cxn ang="0">
+                <a:pos x="connsiteX2" y="connsiteY2"/>
+              </a:cxn>
+            </a:cxnLst>
+            <a:rect l="l" t="t" r="r" b="b"/>
+            <a:pathLst>
+              <a:path w="6305550" h="809627">
+                <a:moveTo>
+                  <a:pt x="0" y="809627"/>
+                </a:moveTo>
+                <a:cubicBezTo>
+                  <a:pt x="1069975" y="405608"/>
+                  <a:pt x="2139950" y="1589"/>
+                  <a:pt x="3190875" y="2"/>
+                </a:cubicBezTo>
+                <a:cubicBezTo>
+                  <a:pt x="4241800" y="-1585"/>
+                  <a:pt x="6178550" y="690565"/>
+                  <a:pt x="6305550" y="800102"/>
+                </a:cubicBezTo>
+              </a:path>
+            </a:pathLst>
+          </a:custGeom>
+          <a:noFill/>
+          <a:ln w="12700"/>
+        </p:spPr>
+        <p:style>
+          <a:lnRef idx="2">
+            <a:schemeClr val="accent1">
+              <a:shade val="15000"/>
+            </a:schemeClr>
+          </a:lnRef>
+          <a:fillRef idx="1">
+            <a:schemeClr val="accent1"/>
+          </a:fillRef>
+          <a:effectRef idx="0">
+            <a:schemeClr val="accent1"/>
+          </a:effectRef>
+          <a:fontRef idx="minor">
+            <a:schemeClr val="lt1"/>
+          </a:fontRef>
+        </p:style>
+        <p:txBody>
+          <a:bodyPr rtlCol="0" anchor="ctr"/>
+          <a:lstStyle/>
+          <a:p>
+            <a:pPr algn="ctr"/>
+            <a:endParaRPr lang="en-US"/>
+          </a:p>
+        </p:txBody>
+      </p:sp>
+      <p:cxnSp>
+        <p:nvCxnSpPr>
+          <p:cNvPr id="44" name="Straight Arrow Connector 43">
+            <a:extLst>
+              <a:ext uri="{FF2B5EF4-FFF2-40B4-BE49-F238E27FC236}">
+                <a16:creationId xmlns:a16="http://schemas.microsoft.com/office/drawing/2014/main" id="{075E74A5-C79A-DF90-E400-3B7452BFC274}"/>
+              </a:ext>
+            </a:extLst>
+          </p:cNvPr>
+          <p:cNvCxnSpPr/>
+          <p:nvPr/>
+        </p:nvCxnSpPr>
+        <p:spPr>
+          <a:xfrm>
+            <a:off x="3859213" y="2773286"/>
+            <a:ext cx="381000" cy="0"/>
+          </a:xfrm>
+          <a:prstGeom prst="straightConnector1">
+            <a:avLst/>
+          </a:prstGeom>
+          <a:ln w="31750">
+            <a:tailEnd type="triangle"/>
+          </a:ln>
+        </p:spPr>
+        <p:style>
+          <a:lnRef idx="1">
+            <a:schemeClr val="accent1"/>
+          </a:lnRef>
+          <a:fillRef idx="0">
+            <a:schemeClr val="accent1"/>
+          </a:fillRef>
+          <a:effectRef idx="0">
+            <a:schemeClr val="accent1"/>
+          </a:effectRef>
+          <a:fontRef idx="minor">
+            <a:schemeClr val="tx1"/>
+          </a:fontRef>
+        </p:style>
+      </p:cxnSp>
+      <p:cxnSp>
+        <p:nvCxnSpPr>
+          <p:cNvPr id="45" name="Straight Arrow Connector 44">
+            <a:extLst>
+              <a:ext uri="{FF2B5EF4-FFF2-40B4-BE49-F238E27FC236}">
+                <a16:creationId xmlns:a16="http://schemas.microsoft.com/office/drawing/2014/main" id="{53B1D2AD-5EFB-F917-ADE7-4DDFE29CCBE7}"/>
+              </a:ext>
+            </a:extLst>
+          </p:cNvPr>
+          <p:cNvCxnSpPr/>
+          <p:nvPr/>
+        </p:nvCxnSpPr>
+        <p:spPr>
+          <a:xfrm>
+            <a:off x="4748213" y="2773286"/>
+            <a:ext cx="381000" cy="0"/>
+          </a:xfrm>
+          <a:prstGeom prst="straightConnector1">
+            <a:avLst/>
+          </a:prstGeom>
+          <a:ln w="31750">
+            <a:headEnd type="triangle"/>
+            <a:tailEnd type="none"/>
+          </a:ln>
+        </p:spPr>
+        <p:style>
+          <a:lnRef idx="1">
+            <a:schemeClr val="accent1"/>
+          </a:lnRef>
+          <a:fillRef idx="0">
+            <a:schemeClr val="accent1"/>
+          </a:fillRef>
+          <a:effectRef idx="0">
+            <a:schemeClr val="accent1"/>
+          </a:effectRef>
+          <a:fontRef idx="minor">
+            <a:schemeClr val="tx1"/>
+          </a:fontRef>
+        </p:style>
+      </p:cxnSp>
+      <p:sp>
+        <p:nvSpPr>
+          <p:cNvPr id="46" name="Freeform: Shape 45">
+            <a:extLst>
+              <a:ext uri="{FF2B5EF4-FFF2-40B4-BE49-F238E27FC236}">
+                <a16:creationId xmlns:a16="http://schemas.microsoft.com/office/drawing/2014/main" id="{107D02C1-7E0C-2DE5-1D01-604485DA446E}"/>
+              </a:ext>
+            </a:extLst>
+          </p:cNvPr>
+          <p:cNvSpPr/>
+          <p:nvPr/>
+        </p:nvSpPr>
+        <p:spPr>
+          <a:xfrm>
+            <a:off x="4021138" y="1963659"/>
+            <a:ext cx="933450" cy="809627"/>
+          </a:xfrm>
+          <a:custGeom>
+            <a:avLst/>
+            <a:gdLst>
+              <a:gd name="connsiteX0" fmla="*/ 0 w 6305550"/>
+              <a:gd name="connsiteY0" fmla="*/ 809627 h 809627"/>
+              <a:gd name="connsiteX1" fmla="*/ 3190875 w 6305550"/>
+              <a:gd name="connsiteY1" fmla="*/ 2 h 809627"/>
+              <a:gd name="connsiteX2" fmla="*/ 6305550 w 6305550"/>
+              <a:gd name="connsiteY2" fmla="*/ 800102 h 809627"/>
+            </a:gdLst>
+            <a:ahLst/>
+            <a:cxnLst>
+              <a:cxn ang="0">
+                <a:pos x="connsiteX0" y="connsiteY0"/>
+              </a:cxn>
+              <a:cxn ang="0">
+                <a:pos x="connsiteX1" y="connsiteY1"/>
+              </a:cxn>
+              <a:cxn ang="0">
+                <a:pos x="connsiteX2" y="connsiteY2"/>
+              </a:cxn>
+            </a:cxnLst>
+            <a:rect l="l" t="t" r="r" b="b"/>
+            <a:pathLst>
+              <a:path w="6305550" h="809627">
+                <a:moveTo>
+                  <a:pt x="0" y="809627"/>
+                </a:moveTo>
+                <a:cubicBezTo>
+                  <a:pt x="1069975" y="405608"/>
+                  <a:pt x="2139950" y="1589"/>
+                  <a:pt x="3190875" y="2"/>
+                </a:cubicBezTo>
+                <a:cubicBezTo>
+                  <a:pt x="4241800" y="-1585"/>
+                  <a:pt x="6178550" y="690565"/>
+                  <a:pt x="6305550" y="800102"/>
+                </a:cubicBezTo>
+              </a:path>
+            </a:pathLst>
+          </a:custGeom>
+          <a:noFill/>
+          <a:ln w="12700"/>
+        </p:spPr>
+        <p:style>
+          <a:lnRef idx="2">
+            <a:schemeClr val="accent1">
+              <a:shade val="15000"/>
+            </a:schemeClr>
+          </a:lnRef>
+          <a:fillRef idx="1">
+            <a:schemeClr val="accent1"/>
+          </a:fillRef>
+          <a:effectRef idx="0">
+            <a:schemeClr val="accent1"/>
+          </a:effectRef>
+          <a:fontRef idx="minor">
+            <a:schemeClr val="lt1"/>
+          </a:fontRef>
+        </p:style>
+        <p:txBody>
+          <a:bodyPr rtlCol="0" anchor="ctr"/>
+          <a:lstStyle/>
+          <a:p>
+            <a:pPr algn="ctr"/>
+            <a:endParaRPr lang="en-US"/>
+          </a:p>
+        </p:txBody>
+      </p:sp>
+      <p:cxnSp>
+        <p:nvCxnSpPr>
+          <p:cNvPr id="47" name="Straight Arrow Connector 46">
+            <a:extLst>
+              <a:ext uri="{FF2B5EF4-FFF2-40B4-BE49-F238E27FC236}">
+                <a16:creationId xmlns:a16="http://schemas.microsoft.com/office/drawing/2014/main" id="{DC5A4616-9830-C39D-6D7E-50D66B003C58}"/>
+              </a:ext>
+            </a:extLst>
+          </p:cNvPr>
+          <p:cNvCxnSpPr/>
+          <p:nvPr/>
+        </p:nvCxnSpPr>
+        <p:spPr>
+          <a:xfrm>
+            <a:off x="5448300" y="2738765"/>
+            <a:ext cx="381000" cy="0"/>
+          </a:xfrm>
+          <a:prstGeom prst="straightConnector1">
+            <a:avLst/>
+          </a:prstGeom>
+          <a:ln w="31750">
+            <a:tailEnd type="triangle"/>
+          </a:ln>
+        </p:spPr>
+        <p:style>
+          <a:lnRef idx="1">
+            <a:schemeClr val="accent1"/>
+          </a:lnRef>
+          <a:fillRef idx="0">
+            <a:schemeClr val="accent1"/>
+          </a:fillRef>
+          <a:effectRef idx="0">
+            <a:schemeClr val="accent1"/>
+          </a:effectRef>
+          <a:fontRef idx="minor">
+            <a:schemeClr val="tx1"/>
+          </a:fontRef>
+        </p:style>
+      </p:cxnSp>
+      <p:cxnSp>
+        <p:nvCxnSpPr>
+          <p:cNvPr id="48" name="Straight Arrow Connector 47">
+            <a:extLst>
+              <a:ext uri="{FF2B5EF4-FFF2-40B4-BE49-F238E27FC236}">
+                <a16:creationId xmlns:a16="http://schemas.microsoft.com/office/drawing/2014/main" id="{638C9453-5050-7181-6709-0E7D0400D7FE}"/>
+              </a:ext>
+            </a:extLst>
+          </p:cNvPr>
+          <p:cNvCxnSpPr/>
+          <p:nvPr/>
+        </p:nvCxnSpPr>
+        <p:spPr>
+          <a:xfrm>
+            <a:off x="6337300" y="2738765"/>
+            <a:ext cx="381000" cy="0"/>
+          </a:xfrm>
+          <a:prstGeom prst="straightConnector1">
+            <a:avLst/>
+          </a:prstGeom>
+          <a:ln w="31750">
+            <a:headEnd type="triangle"/>
+            <a:tailEnd type="none"/>
+          </a:ln>
+        </p:spPr>
+        <p:style>
+          <a:lnRef idx="1">
+            <a:schemeClr val="accent1"/>
+          </a:lnRef>
+          <a:fillRef idx="0">
+            <a:schemeClr val="accent1"/>
+          </a:fillRef>
+          <a:effectRef idx="0">
+            <a:schemeClr val="accent1"/>
+          </a:effectRef>
+          <a:fontRef idx="minor">
+            <a:schemeClr val="tx1"/>
+          </a:fontRef>
+        </p:style>
+      </p:cxnSp>
+      <p:sp>
+        <p:nvSpPr>
+          <p:cNvPr id="49" name="Freeform: Shape 48">
+            <a:extLst>
+              <a:ext uri="{FF2B5EF4-FFF2-40B4-BE49-F238E27FC236}">
+                <a16:creationId xmlns:a16="http://schemas.microsoft.com/office/drawing/2014/main" id="{B9ABDE01-0756-2D2E-CC85-AFD0843B7C35}"/>
+              </a:ext>
+            </a:extLst>
+          </p:cNvPr>
+          <p:cNvSpPr/>
+          <p:nvPr/>
+        </p:nvSpPr>
+        <p:spPr>
+          <a:xfrm>
+            <a:off x="5610225" y="1929138"/>
+            <a:ext cx="933450" cy="809627"/>
+          </a:xfrm>
+          <a:custGeom>
+            <a:avLst/>
+            <a:gdLst>
+              <a:gd name="connsiteX0" fmla="*/ 0 w 6305550"/>
+              <a:gd name="connsiteY0" fmla="*/ 809627 h 809627"/>
+              <a:gd name="connsiteX1" fmla="*/ 3190875 w 6305550"/>
+              <a:gd name="connsiteY1" fmla="*/ 2 h 809627"/>
+              <a:gd name="connsiteX2" fmla="*/ 6305550 w 6305550"/>
+              <a:gd name="connsiteY2" fmla="*/ 800102 h 809627"/>
+            </a:gdLst>
+            <a:ahLst/>
+            <a:cxnLst>
+              <a:cxn ang="0">
+                <a:pos x="connsiteX0" y="connsiteY0"/>
+              </a:cxn>
+              <a:cxn ang="0">
+                <a:pos x="connsiteX1" y="connsiteY1"/>
+              </a:cxn>
+              <a:cxn ang="0">
+                <a:pos x="connsiteX2" y="connsiteY2"/>
+              </a:cxn>
+            </a:cxnLst>
+            <a:rect l="l" t="t" r="r" b="b"/>
+            <a:pathLst>
+              <a:path w="6305550" h="809627">
+                <a:moveTo>
+                  <a:pt x="0" y="809627"/>
+                </a:moveTo>
+                <a:cubicBezTo>
+                  <a:pt x="1069975" y="405608"/>
+                  <a:pt x="2139950" y="1589"/>
+                  <a:pt x="3190875" y="2"/>
+                </a:cubicBezTo>
+                <a:cubicBezTo>
+                  <a:pt x="4241800" y="-1585"/>
+                  <a:pt x="6178550" y="690565"/>
+                  <a:pt x="6305550" y="800102"/>
+                </a:cubicBezTo>
+              </a:path>
+            </a:pathLst>
+          </a:custGeom>
+          <a:noFill/>
+          <a:ln w="12700"/>
+        </p:spPr>
+        <p:style>
+          <a:lnRef idx="2">
+            <a:schemeClr val="accent1">
+              <a:shade val="15000"/>
+            </a:schemeClr>
+          </a:lnRef>
+          <a:fillRef idx="1">
+            <a:schemeClr val="accent1"/>
+          </a:fillRef>
+          <a:effectRef idx="0">
+            <a:schemeClr val="accent1"/>
+          </a:effectRef>
+          <a:fontRef idx="minor">
+            <a:schemeClr val="lt1"/>
+          </a:fontRef>
+        </p:style>
+        <p:txBody>
+          <a:bodyPr rtlCol="0" anchor="ctr"/>
+          <a:lstStyle/>
+          <a:p>
+            <a:pPr algn="ctr"/>
+            <a:endParaRPr lang="en-US"/>
+          </a:p>
+        </p:txBody>
+      </p:sp>
+      <p:cxnSp>
+        <p:nvCxnSpPr>
+          <p:cNvPr id="50" name="Straight Arrow Connector 49">
+            <a:extLst>
+              <a:ext uri="{FF2B5EF4-FFF2-40B4-BE49-F238E27FC236}">
+                <a16:creationId xmlns:a16="http://schemas.microsoft.com/office/drawing/2014/main" id="{2DC15646-EA04-55AD-955C-4054D90E7B6D}"/>
+              </a:ext>
+            </a:extLst>
+          </p:cNvPr>
+          <p:cNvCxnSpPr/>
+          <p:nvPr/>
+        </p:nvCxnSpPr>
+        <p:spPr>
+          <a:xfrm>
+            <a:off x="4076700" y="4482579"/>
+            <a:ext cx="381000" cy="0"/>
+          </a:xfrm>
+          <a:prstGeom prst="straightConnector1">
+            <a:avLst/>
+          </a:prstGeom>
+          <a:ln w="31750">
+            <a:tailEnd type="triangle"/>
+          </a:ln>
+        </p:spPr>
+        <p:style>
+          <a:lnRef idx="1">
+            <a:schemeClr val="accent1"/>
+          </a:lnRef>
+          <a:fillRef idx="0">
+            <a:schemeClr val="accent1"/>
+          </a:fillRef>
+          <a:effectRef idx="0">
+            <a:schemeClr val="accent1"/>
+          </a:effectRef>
+          <a:fontRef idx="minor">
+            <a:schemeClr val="tx1"/>
+          </a:fontRef>
+        </p:style>
+      </p:cxnSp>
+      <p:cxnSp>
+        <p:nvCxnSpPr>
+          <p:cNvPr id="51" name="Straight Arrow Connector 50">
+            <a:extLst>
+              <a:ext uri="{FF2B5EF4-FFF2-40B4-BE49-F238E27FC236}">
+                <a16:creationId xmlns:a16="http://schemas.microsoft.com/office/drawing/2014/main" id="{8798D9C3-BC84-6B8C-7543-9E97D7F77448}"/>
+              </a:ext>
+            </a:extLst>
+          </p:cNvPr>
+          <p:cNvCxnSpPr/>
+          <p:nvPr/>
+        </p:nvCxnSpPr>
+        <p:spPr>
+          <a:xfrm>
+            <a:off x="5330825" y="4482579"/>
+            <a:ext cx="381000" cy="0"/>
+          </a:xfrm>
+          <a:prstGeom prst="straightConnector1">
+            <a:avLst/>
+          </a:prstGeom>
+          <a:ln w="31750">
+            <a:headEnd type="triangle"/>
+            <a:tailEnd type="none"/>
+          </a:ln>
+        </p:spPr>
+        <p:style>
+          <a:lnRef idx="1">
+            <a:schemeClr val="accent1"/>
+          </a:lnRef>
+          <a:fillRef idx="0">
+            <a:schemeClr val="accent1"/>
+          </a:fillRef>
+          <a:effectRef idx="0">
+            <a:schemeClr val="accent1"/>
+          </a:effectRef>
+          <a:fontRef idx="minor">
+            <a:schemeClr val="tx1"/>
+          </a:fontRef>
+        </p:style>
+      </p:cxnSp>
+      <p:sp>
+        <p:nvSpPr>
+          <p:cNvPr id="52" name="Freeform: Shape 51">
+            <a:extLst>
+              <a:ext uri="{FF2B5EF4-FFF2-40B4-BE49-F238E27FC236}">
+                <a16:creationId xmlns:a16="http://schemas.microsoft.com/office/drawing/2014/main" id="{AA6BA50E-72D3-507E-D5F0-C304D7BFD9E1}"/>
+              </a:ext>
+            </a:extLst>
+          </p:cNvPr>
+          <p:cNvSpPr/>
+          <p:nvPr/>
+        </p:nvSpPr>
+        <p:spPr>
+          <a:xfrm>
+            <a:off x="4238624" y="3672952"/>
+            <a:ext cx="1330325" cy="809627"/>
+          </a:xfrm>
+          <a:custGeom>
+            <a:avLst/>
+            <a:gdLst>
+              <a:gd name="connsiteX0" fmla="*/ 0 w 6305550"/>
+              <a:gd name="connsiteY0" fmla="*/ 809627 h 809627"/>
+              <a:gd name="connsiteX1" fmla="*/ 3190875 w 6305550"/>
+              <a:gd name="connsiteY1" fmla="*/ 2 h 809627"/>
+              <a:gd name="connsiteX2" fmla="*/ 6305550 w 6305550"/>
+              <a:gd name="connsiteY2" fmla="*/ 800102 h 809627"/>
+            </a:gdLst>
+            <a:ahLst/>
+            <a:cxnLst>
+              <a:cxn ang="0">
+                <a:pos x="connsiteX0" y="connsiteY0"/>
+              </a:cxn>
+              <a:cxn ang="0">
+                <a:pos x="connsiteX1" y="connsiteY1"/>
+              </a:cxn>
+              <a:cxn ang="0">
+                <a:pos x="connsiteX2" y="connsiteY2"/>
+              </a:cxn>
+            </a:cxnLst>
+            <a:rect l="l" t="t" r="r" b="b"/>
+            <a:pathLst>
+              <a:path w="6305550" h="809627">
+                <a:moveTo>
+                  <a:pt x="0" y="809627"/>
+                </a:moveTo>
+                <a:cubicBezTo>
+                  <a:pt x="1069975" y="405608"/>
+                  <a:pt x="2139950" y="1589"/>
+                  <a:pt x="3190875" y="2"/>
+                </a:cubicBezTo>
+                <a:cubicBezTo>
+                  <a:pt x="4241800" y="-1585"/>
+                  <a:pt x="6178550" y="690565"/>
+                  <a:pt x="6305550" y="800102"/>
+                </a:cubicBezTo>
+              </a:path>
+            </a:pathLst>
+          </a:custGeom>
+          <a:noFill/>
+          <a:ln w="12700"/>
+        </p:spPr>
+        <p:style>
+          <a:lnRef idx="2">
+            <a:schemeClr val="accent1">
+              <a:shade val="15000"/>
+            </a:schemeClr>
+          </a:lnRef>
+          <a:fillRef idx="1">
+            <a:schemeClr val="accent1"/>
+          </a:fillRef>
+          <a:effectRef idx="0">
+            <a:schemeClr val="accent1"/>
+          </a:effectRef>
+          <a:fontRef idx="minor">
+            <a:schemeClr val="lt1"/>
+          </a:fontRef>
+        </p:style>
+        <p:txBody>
+          <a:bodyPr rtlCol="0" anchor="ctr"/>
+          <a:lstStyle/>
+          <a:p>
+            <a:pPr algn="ctr"/>
+            <a:endParaRPr lang="en-US"/>
+          </a:p>
+        </p:txBody>
+      </p:sp>
+      <p:cxnSp>
+        <p:nvCxnSpPr>
+          <p:cNvPr id="53" name="Straight Arrow Connector 52">
+            <a:extLst>
+              <a:ext uri="{FF2B5EF4-FFF2-40B4-BE49-F238E27FC236}">
+                <a16:creationId xmlns:a16="http://schemas.microsoft.com/office/drawing/2014/main" id="{2016503C-3852-6FF6-B0BD-F4522D32EBE9}"/>
+              </a:ext>
+            </a:extLst>
+          </p:cNvPr>
+          <p:cNvCxnSpPr/>
+          <p:nvPr/>
+        </p:nvCxnSpPr>
+        <p:spPr>
+          <a:xfrm>
+            <a:off x="2809875" y="4495299"/>
+            <a:ext cx="381000" cy="0"/>
+          </a:xfrm>
+          <a:prstGeom prst="straightConnector1">
+            <a:avLst/>
+          </a:prstGeom>
+          <a:ln w="31750">
+            <a:tailEnd type="triangle"/>
+          </a:ln>
+        </p:spPr>
+        <p:style>
+          <a:lnRef idx="1">
+            <a:schemeClr val="accent1"/>
+          </a:lnRef>
+          <a:fillRef idx="0">
+            <a:schemeClr val="accent1"/>
+          </a:fillRef>
+          <a:effectRef idx="0">
+            <a:schemeClr val="accent1"/>
+          </a:effectRef>
+          <a:fontRef idx="minor">
+            <a:schemeClr val="tx1"/>
+          </a:fontRef>
+        </p:style>
+      </p:cxnSp>
+      <p:cxnSp>
+        <p:nvCxnSpPr>
+          <p:cNvPr id="54" name="Straight Arrow Connector 53">
+            <a:extLst>
+              <a:ext uri="{FF2B5EF4-FFF2-40B4-BE49-F238E27FC236}">
+                <a16:creationId xmlns:a16="http://schemas.microsoft.com/office/drawing/2014/main" id="{6503E43B-CFDA-5D5D-1F65-2576668E6AD1}"/>
+              </a:ext>
+            </a:extLst>
+          </p:cNvPr>
+          <p:cNvCxnSpPr/>
+          <p:nvPr/>
+        </p:nvCxnSpPr>
+        <p:spPr>
+          <a:xfrm>
+            <a:off x="3009901" y="2756672"/>
+            <a:ext cx="381000" cy="0"/>
+          </a:xfrm>
+          <a:prstGeom prst="straightConnector1">
+            <a:avLst/>
+          </a:prstGeom>
+          <a:ln w="31750">
+            <a:headEnd type="triangle"/>
+            <a:tailEnd type="none"/>
+          </a:ln>
+        </p:spPr>
+        <p:style>
+          <a:lnRef idx="1">
+            <a:schemeClr val="accent1"/>
+          </a:lnRef>
+          <a:fillRef idx="0">
+            <a:schemeClr val="accent1"/>
+          </a:fillRef>
+          <a:effectRef idx="0">
+            <a:schemeClr val="accent1"/>
+          </a:effectRef>
+          <a:fontRef idx="minor">
+            <a:schemeClr val="tx1"/>
+          </a:fontRef>
+        </p:style>
+      </p:cxnSp>
+      <p:sp>
+        <p:nvSpPr>
+          <p:cNvPr id="55" name="Freeform: Shape 54">
+            <a:extLst>
+              <a:ext uri="{FF2B5EF4-FFF2-40B4-BE49-F238E27FC236}">
+                <a16:creationId xmlns:a16="http://schemas.microsoft.com/office/drawing/2014/main" id="{9FB3E86F-6EB3-E3DA-EDF1-90196EBA5F26}"/>
+              </a:ext>
+            </a:extLst>
+          </p:cNvPr>
+          <p:cNvSpPr/>
+          <p:nvPr/>
+        </p:nvSpPr>
+        <p:spPr>
+          <a:xfrm>
+            <a:off x="2282826" y="1947045"/>
+            <a:ext cx="933450" cy="809627"/>
+          </a:xfrm>
+          <a:custGeom>
+            <a:avLst/>
+            <a:gdLst>
+              <a:gd name="connsiteX0" fmla="*/ 0 w 6305550"/>
+              <a:gd name="connsiteY0" fmla="*/ 809627 h 809627"/>
+              <a:gd name="connsiteX1" fmla="*/ 3190875 w 6305550"/>
+              <a:gd name="connsiteY1" fmla="*/ 2 h 809627"/>
+              <a:gd name="connsiteX2" fmla="*/ 6305550 w 6305550"/>
+              <a:gd name="connsiteY2" fmla="*/ 800102 h 809627"/>
+            </a:gdLst>
+            <a:ahLst/>
+            <a:cxnLst>
+              <a:cxn ang="0">
+                <a:pos x="connsiteX0" y="connsiteY0"/>
+              </a:cxn>
+              <a:cxn ang="0">
+                <a:pos x="connsiteX1" y="connsiteY1"/>
+              </a:cxn>
+              <a:cxn ang="0">
+                <a:pos x="connsiteX2" y="connsiteY2"/>
+              </a:cxn>
+            </a:cxnLst>
+            <a:rect l="l" t="t" r="r" b="b"/>
+            <a:pathLst>
+              <a:path w="6305550" h="809627">
+                <a:moveTo>
+                  <a:pt x="0" y="809627"/>
+                </a:moveTo>
+                <a:cubicBezTo>
+                  <a:pt x="1069975" y="405608"/>
+                  <a:pt x="2139950" y="1589"/>
+                  <a:pt x="3190875" y="2"/>
+                </a:cubicBezTo>
+                <a:cubicBezTo>
+                  <a:pt x="4241800" y="-1585"/>
+                  <a:pt x="6178550" y="690565"/>
+                  <a:pt x="6305550" y="800102"/>
+                </a:cubicBezTo>
+              </a:path>
+            </a:pathLst>
+          </a:custGeom>
+          <a:noFill/>
+          <a:ln w="12700"/>
+        </p:spPr>
+        <p:style>
+          <a:lnRef idx="2">
+            <a:schemeClr val="accent1">
+              <a:shade val="15000"/>
+            </a:schemeClr>
+          </a:lnRef>
+          <a:fillRef idx="1">
+            <a:schemeClr val="accent1"/>
+          </a:fillRef>
+          <a:effectRef idx="0">
+            <a:schemeClr val="accent1"/>
+          </a:effectRef>
+          <a:fontRef idx="minor">
+            <a:schemeClr val="lt1"/>
+          </a:fontRef>
+        </p:style>
+        <p:txBody>
+          <a:bodyPr rtlCol="0" anchor="ctr"/>
+          <a:lstStyle/>
+          <a:p>
+            <a:pPr algn="ctr"/>
+            <a:endParaRPr lang="en-US"/>
+          </a:p>
+        </p:txBody>
+      </p:sp>
+      <p:cxnSp>
+        <p:nvCxnSpPr>
+          <p:cNvPr id="56" name="Straight Arrow Connector 55">
+            <a:extLst>
+              <a:ext uri="{FF2B5EF4-FFF2-40B4-BE49-F238E27FC236}">
+                <a16:creationId xmlns:a16="http://schemas.microsoft.com/office/drawing/2014/main" id="{10BB22E6-B90E-98D5-4A7A-3C6EA0647084}"/>
+              </a:ext>
+            </a:extLst>
+          </p:cNvPr>
+          <p:cNvCxnSpPr/>
+          <p:nvPr/>
+        </p:nvCxnSpPr>
+        <p:spPr>
+          <a:xfrm>
+            <a:off x="7343775" y="2945015"/>
+            <a:ext cx="381000" cy="0"/>
+          </a:xfrm>
+          <a:prstGeom prst="straightConnector1">
+            <a:avLst/>
+          </a:prstGeom>
+          <a:ln w="31750">
+            <a:tailEnd type="triangle"/>
+          </a:ln>
+        </p:spPr>
+        <p:style>
+          <a:lnRef idx="1">
+            <a:schemeClr val="accent1"/>
+          </a:lnRef>
+          <a:fillRef idx="0">
+            <a:schemeClr val="accent1"/>
+          </a:fillRef>
+          <a:effectRef idx="0">
+            <a:schemeClr val="accent1"/>
+          </a:effectRef>
+          <a:fontRef idx="minor">
+            <a:schemeClr val="tx1"/>
+          </a:fontRef>
+        </p:style>
+      </p:cxnSp>
+      <p:cxnSp>
+        <p:nvCxnSpPr>
+          <p:cNvPr id="57" name="Straight Arrow Connector 56">
+            <a:extLst>
+              <a:ext uri="{FF2B5EF4-FFF2-40B4-BE49-F238E27FC236}">
+                <a16:creationId xmlns:a16="http://schemas.microsoft.com/office/drawing/2014/main" id="{57748CCA-4C1F-1592-A1B1-B0FAA0BBEBFE}"/>
+              </a:ext>
+            </a:extLst>
+          </p:cNvPr>
+          <p:cNvCxnSpPr/>
+          <p:nvPr/>
+        </p:nvCxnSpPr>
+        <p:spPr>
+          <a:xfrm>
+            <a:off x="8232775" y="2945015"/>
+            <a:ext cx="381000" cy="0"/>
+          </a:xfrm>
+          <a:prstGeom prst="straightConnector1">
+            <a:avLst/>
+          </a:prstGeom>
+          <a:ln w="31750">
+            <a:headEnd type="triangle"/>
+            <a:tailEnd type="none"/>
+          </a:ln>
+        </p:spPr>
+        <p:style>
+          <a:lnRef idx="1">
+            <a:schemeClr val="accent1"/>
+          </a:lnRef>
+          <a:fillRef idx="0">
+            <a:schemeClr val="accent1"/>
+          </a:fillRef>
+          <a:effectRef idx="0">
+            <a:schemeClr val="accent1"/>
+          </a:effectRef>
+          <a:fontRef idx="minor">
+            <a:schemeClr val="tx1"/>
+          </a:fontRef>
+        </p:style>
+      </p:cxnSp>
+      <p:sp>
+        <p:nvSpPr>
+          <p:cNvPr id="58" name="Freeform: Shape 57">
+            <a:extLst>
+              <a:ext uri="{FF2B5EF4-FFF2-40B4-BE49-F238E27FC236}">
+                <a16:creationId xmlns:a16="http://schemas.microsoft.com/office/drawing/2014/main" id="{0C5B7386-0BBD-B527-6F10-DB7562807D3D}"/>
+              </a:ext>
+            </a:extLst>
+          </p:cNvPr>
+          <p:cNvSpPr/>
+          <p:nvPr/>
+        </p:nvSpPr>
+        <p:spPr>
+          <a:xfrm>
+            <a:off x="7505700" y="2135388"/>
+            <a:ext cx="933450" cy="809627"/>
+          </a:xfrm>
+          <a:custGeom>
+            <a:avLst/>
+            <a:gdLst>
+              <a:gd name="connsiteX0" fmla="*/ 0 w 6305550"/>
+              <a:gd name="connsiteY0" fmla="*/ 809627 h 809627"/>
+              <a:gd name="connsiteX1" fmla="*/ 3190875 w 6305550"/>
+              <a:gd name="connsiteY1" fmla="*/ 2 h 809627"/>
+              <a:gd name="connsiteX2" fmla="*/ 6305550 w 6305550"/>
+              <a:gd name="connsiteY2" fmla="*/ 800102 h 809627"/>
+            </a:gdLst>
+            <a:ahLst/>
+            <a:cxnLst>
+              <a:cxn ang="0">
+                <a:pos x="connsiteX0" y="connsiteY0"/>
+              </a:cxn>
+              <a:cxn ang="0">
+                <a:pos x="connsiteX1" y="connsiteY1"/>
+              </a:cxn>
+              <a:cxn ang="0">
+                <a:pos x="connsiteX2" y="connsiteY2"/>
+              </a:cxn>
+            </a:cxnLst>
+            <a:rect l="l" t="t" r="r" b="b"/>
+            <a:pathLst>
+              <a:path w="6305550" h="809627">
+                <a:moveTo>
+                  <a:pt x="0" y="809627"/>
+                </a:moveTo>
+                <a:cubicBezTo>
+                  <a:pt x="1069975" y="405608"/>
+                  <a:pt x="2139950" y="1589"/>
+                  <a:pt x="3190875" y="2"/>
+                </a:cubicBezTo>
+                <a:cubicBezTo>
+                  <a:pt x="4241800" y="-1585"/>
+                  <a:pt x="6178550" y="690565"/>
+                  <a:pt x="6305550" y="800102"/>
+                </a:cubicBezTo>
+              </a:path>
+            </a:pathLst>
+          </a:custGeom>
+          <a:noFill/>
+          <a:ln w="12700"/>
+        </p:spPr>
+        <p:style>
+          <a:lnRef idx="2">
+            <a:schemeClr val="accent1">
+              <a:shade val="15000"/>
+            </a:schemeClr>
+          </a:lnRef>
+          <a:fillRef idx="1">
+            <a:schemeClr val="accent1"/>
+          </a:fillRef>
+          <a:effectRef idx="0">
+            <a:schemeClr val="accent1"/>
+          </a:effectRef>
+          <a:fontRef idx="minor">
+            <a:schemeClr val="lt1"/>
+          </a:fontRef>
+        </p:style>
+        <p:txBody>
+          <a:bodyPr rtlCol="0" anchor="ctr"/>
+          <a:lstStyle/>
+          <a:p>
+            <a:pPr algn="ctr"/>
+            <a:endParaRPr lang="en-US"/>
+          </a:p>
+        </p:txBody>
+      </p:sp>
+      <p:cxnSp>
+        <p:nvCxnSpPr>
+          <p:cNvPr id="59" name="Straight Arrow Connector 58">
+            <a:extLst>
+              <a:ext uri="{FF2B5EF4-FFF2-40B4-BE49-F238E27FC236}">
+                <a16:creationId xmlns:a16="http://schemas.microsoft.com/office/drawing/2014/main" id="{BC1A2884-EE32-EABF-F5D8-06E84BE89388}"/>
+              </a:ext>
+            </a:extLst>
+          </p:cNvPr>
+          <p:cNvCxnSpPr/>
+          <p:nvPr/>
+        </p:nvCxnSpPr>
+        <p:spPr>
+          <a:xfrm>
+            <a:off x="2441575" y="4671180"/>
+            <a:ext cx="381000" cy="0"/>
+          </a:xfrm>
+          <a:prstGeom prst="straightConnector1">
+            <a:avLst/>
+          </a:prstGeom>
+          <a:ln w="31750">
+            <a:tailEnd type="triangle"/>
+          </a:ln>
+        </p:spPr>
+        <p:style>
+          <a:lnRef idx="1">
+            <a:schemeClr val="accent1"/>
+          </a:lnRef>
+          <a:fillRef idx="0">
+            <a:schemeClr val="accent1"/>
+          </a:fillRef>
+          <a:effectRef idx="0">
+            <a:schemeClr val="accent1"/>
+          </a:effectRef>
+          <a:fontRef idx="minor">
+            <a:schemeClr val="tx1"/>
+          </a:fontRef>
+        </p:style>
+      </p:cxnSp>
+      <p:cxnSp>
+        <p:nvCxnSpPr>
+          <p:cNvPr id="60" name="Straight Arrow Connector 59">
+            <a:extLst>
+              <a:ext uri="{FF2B5EF4-FFF2-40B4-BE49-F238E27FC236}">
+                <a16:creationId xmlns:a16="http://schemas.microsoft.com/office/drawing/2014/main" id="{17440287-E244-C82C-35F0-88628BB7EC96}"/>
+              </a:ext>
+            </a:extLst>
+          </p:cNvPr>
+          <p:cNvCxnSpPr/>
+          <p:nvPr/>
+        </p:nvCxnSpPr>
+        <p:spPr>
+          <a:xfrm>
+            <a:off x="3330575" y="4671180"/>
+            <a:ext cx="381000" cy="0"/>
+          </a:xfrm>
+          <a:prstGeom prst="straightConnector1">
+            <a:avLst/>
+          </a:prstGeom>
+          <a:ln w="31750">
+            <a:headEnd type="triangle"/>
+            <a:tailEnd type="none"/>
+          </a:ln>
+        </p:spPr>
+        <p:style>
+          <a:lnRef idx="1">
+            <a:schemeClr val="accent1"/>
+          </a:lnRef>
+          <a:fillRef idx="0">
+            <a:schemeClr val="accent1"/>
+          </a:fillRef>
+          <a:effectRef idx="0">
+            <a:schemeClr val="accent1"/>
+          </a:effectRef>
+          <a:fontRef idx="minor">
+            <a:schemeClr val="tx1"/>
+          </a:fontRef>
+        </p:style>
+      </p:cxnSp>
+      <p:sp>
+        <p:nvSpPr>
+          <p:cNvPr id="61" name="Freeform: Shape 60">
+            <a:extLst>
+              <a:ext uri="{FF2B5EF4-FFF2-40B4-BE49-F238E27FC236}">
+                <a16:creationId xmlns:a16="http://schemas.microsoft.com/office/drawing/2014/main" id="{FE720001-5C9F-0F5F-E803-F6DA69EE5235}"/>
+              </a:ext>
+            </a:extLst>
+          </p:cNvPr>
+          <p:cNvSpPr/>
+          <p:nvPr/>
+        </p:nvSpPr>
+        <p:spPr>
+          <a:xfrm>
+            <a:off x="2603500" y="3861553"/>
+            <a:ext cx="933450" cy="809627"/>
+          </a:xfrm>
+          <a:custGeom>
+            <a:avLst/>
+            <a:gdLst>
+              <a:gd name="connsiteX0" fmla="*/ 0 w 6305550"/>
+              <a:gd name="connsiteY0" fmla="*/ 809627 h 809627"/>
+              <a:gd name="connsiteX1" fmla="*/ 3190875 w 6305550"/>
+              <a:gd name="connsiteY1" fmla="*/ 2 h 809627"/>
+              <a:gd name="connsiteX2" fmla="*/ 6305550 w 6305550"/>
+              <a:gd name="connsiteY2" fmla="*/ 800102 h 809627"/>
+            </a:gdLst>
+            <a:ahLst/>
+            <a:cxnLst>
+              <a:cxn ang="0">
+                <a:pos x="connsiteX0" y="connsiteY0"/>
+              </a:cxn>
+              <a:cxn ang="0">
+                <a:pos x="connsiteX1" y="connsiteY1"/>
+              </a:cxn>
+              <a:cxn ang="0">
+                <a:pos x="connsiteX2" y="connsiteY2"/>
+              </a:cxn>
+            </a:cxnLst>
+            <a:rect l="l" t="t" r="r" b="b"/>
+            <a:pathLst>
+              <a:path w="6305550" h="809627">
+                <a:moveTo>
+                  <a:pt x="0" y="809627"/>
+                </a:moveTo>
+                <a:cubicBezTo>
+                  <a:pt x="1069975" y="405608"/>
+                  <a:pt x="2139950" y="1589"/>
+                  <a:pt x="3190875" y="2"/>
+                </a:cubicBezTo>
+                <a:cubicBezTo>
+                  <a:pt x="4241800" y="-1585"/>
+                  <a:pt x="6178550" y="690565"/>
+                  <a:pt x="6305550" y="800102"/>
+                </a:cubicBezTo>
+              </a:path>
+            </a:pathLst>
+          </a:custGeom>
+          <a:noFill/>
+          <a:ln w="12700"/>
+        </p:spPr>
+        <p:style>
+          <a:lnRef idx="2">
+            <a:schemeClr val="accent1">
+              <a:shade val="15000"/>
+            </a:schemeClr>
+          </a:lnRef>
+          <a:fillRef idx="1">
+            <a:schemeClr val="accent1"/>
+          </a:fillRef>
+          <a:effectRef idx="0">
+            <a:schemeClr val="accent1"/>
+          </a:effectRef>
+          <a:fontRef idx="minor">
+            <a:schemeClr val="lt1"/>
+          </a:fontRef>
+        </p:style>
+        <p:txBody>
+          <a:bodyPr rtlCol="0" anchor="ctr"/>
+          <a:lstStyle/>
+          <a:p>
+            <a:pPr algn="ctr"/>
+            <a:endParaRPr lang="en-US"/>
+          </a:p>
+        </p:txBody>
+      </p:sp>
+      <p:cxnSp>
+        <p:nvCxnSpPr>
+          <p:cNvPr id="62" name="Straight Arrow Connector 61">
+            <a:extLst>
+              <a:ext uri="{FF2B5EF4-FFF2-40B4-BE49-F238E27FC236}">
+                <a16:creationId xmlns:a16="http://schemas.microsoft.com/office/drawing/2014/main" id="{20C6D6D4-BBBD-0491-5615-EE32B1B8FA2A}"/>
+              </a:ext>
+            </a:extLst>
+          </p:cNvPr>
+          <p:cNvCxnSpPr/>
+          <p:nvPr/>
+        </p:nvCxnSpPr>
+        <p:spPr>
+          <a:xfrm>
+            <a:off x="6877050" y="4830040"/>
+            <a:ext cx="381000" cy="0"/>
+          </a:xfrm>
+          <a:prstGeom prst="straightConnector1">
+            <a:avLst/>
+          </a:prstGeom>
+          <a:ln w="31750">
+            <a:tailEnd type="triangle"/>
+          </a:ln>
+        </p:spPr>
+        <p:style>
+          <a:lnRef idx="1">
+            <a:schemeClr val="accent1"/>
+          </a:lnRef>
+          <a:fillRef idx="0">
+            <a:schemeClr val="accent1"/>
+          </a:fillRef>
+          <a:effectRef idx="0">
+            <a:schemeClr val="accent1"/>
+          </a:effectRef>
+          <a:fontRef idx="minor">
+            <a:schemeClr val="tx1"/>
+          </a:fontRef>
+        </p:style>
+      </p:cxnSp>
+      <p:cxnSp>
+        <p:nvCxnSpPr>
+          <p:cNvPr id="63" name="Straight Arrow Connector 62">
+            <a:extLst>
+              <a:ext uri="{FF2B5EF4-FFF2-40B4-BE49-F238E27FC236}">
+                <a16:creationId xmlns:a16="http://schemas.microsoft.com/office/drawing/2014/main" id="{A861F74E-2024-26A9-82F7-11496BD6159A}"/>
+              </a:ext>
+            </a:extLst>
+          </p:cNvPr>
+          <p:cNvCxnSpPr/>
+          <p:nvPr/>
+        </p:nvCxnSpPr>
+        <p:spPr>
+          <a:xfrm>
+            <a:off x="7766050" y="4830040"/>
+            <a:ext cx="381000" cy="0"/>
+          </a:xfrm>
+          <a:prstGeom prst="straightConnector1">
+            <a:avLst/>
+          </a:prstGeom>
+          <a:ln w="31750">
+            <a:headEnd type="triangle"/>
+            <a:tailEnd type="none"/>
+          </a:ln>
+        </p:spPr>
+        <p:style>
+          <a:lnRef idx="1">
+            <a:schemeClr val="accent1"/>
+          </a:lnRef>
+          <a:fillRef idx="0">
+            <a:schemeClr val="accent1"/>
+          </a:fillRef>
+          <a:effectRef idx="0">
+            <a:schemeClr val="accent1"/>
+          </a:effectRef>
+          <a:fontRef idx="minor">
+            <a:schemeClr val="tx1"/>
+          </a:fontRef>
+        </p:style>
+      </p:cxnSp>
+      <p:sp>
+        <p:nvSpPr>
+          <p:cNvPr id="64" name="Freeform: Shape 63">
+            <a:extLst>
+              <a:ext uri="{FF2B5EF4-FFF2-40B4-BE49-F238E27FC236}">
+                <a16:creationId xmlns:a16="http://schemas.microsoft.com/office/drawing/2014/main" id="{5EA00AD2-FDD3-8F85-ED9B-2135F74E40F0}"/>
+              </a:ext>
+            </a:extLst>
+          </p:cNvPr>
+          <p:cNvSpPr/>
+          <p:nvPr/>
+        </p:nvSpPr>
+        <p:spPr>
+          <a:xfrm>
+            <a:off x="7038975" y="4020413"/>
+            <a:ext cx="933450" cy="809627"/>
+          </a:xfrm>
+          <a:custGeom>
+            <a:avLst/>
+            <a:gdLst>
+              <a:gd name="connsiteX0" fmla="*/ 0 w 6305550"/>
+              <a:gd name="connsiteY0" fmla="*/ 809627 h 809627"/>
+              <a:gd name="connsiteX1" fmla="*/ 3190875 w 6305550"/>
+              <a:gd name="connsiteY1" fmla="*/ 2 h 809627"/>
+              <a:gd name="connsiteX2" fmla="*/ 6305550 w 6305550"/>
+              <a:gd name="connsiteY2" fmla="*/ 800102 h 809627"/>
+            </a:gdLst>
+            <a:ahLst/>
+            <a:cxnLst>
+              <a:cxn ang="0">
+                <a:pos x="connsiteX0" y="connsiteY0"/>
+              </a:cxn>
+              <a:cxn ang="0">
+                <a:pos x="connsiteX1" y="connsiteY1"/>
+              </a:cxn>
+              <a:cxn ang="0">
+                <a:pos x="connsiteX2" y="connsiteY2"/>
+              </a:cxn>
+            </a:cxnLst>
+            <a:rect l="l" t="t" r="r" b="b"/>
+            <a:pathLst>
+              <a:path w="6305550" h="809627">
+                <a:moveTo>
+                  <a:pt x="0" y="809627"/>
+                </a:moveTo>
+                <a:cubicBezTo>
+                  <a:pt x="1069975" y="405608"/>
+                  <a:pt x="2139950" y="1589"/>
+                  <a:pt x="3190875" y="2"/>
+                </a:cubicBezTo>
+                <a:cubicBezTo>
+                  <a:pt x="4241800" y="-1585"/>
+                  <a:pt x="6178550" y="690565"/>
+                  <a:pt x="6305550" y="800102"/>
+                </a:cubicBezTo>
+              </a:path>
+            </a:pathLst>
+          </a:custGeom>
+          <a:noFill/>
+          <a:ln w="12700"/>
+        </p:spPr>
+        <p:style>
+          <a:lnRef idx="2">
+            <a:schemeClr val="accent1">
+              <a:shade val="15000"/>
+            </a:schemeClr>
+          </a:lnRef>
+          <a:fillRef idx="1">
+            <a:schemeClr val="accent1"/>
+          </a:fillRef>
+          <a:effectRef idx="0">
+            <a:schemeClr val="accent1"/>
+          </a:effectRef>
+          <a:fontRef idx="minor">
+            <a:schemeClr val="lt1"/>
+          </a:fontRef>
+        </p:style>
+        <p:txBody>
+          <a:bodyPr rtlCol="0" anchor="ctr"/>
+          <a:lstStyle/>
+          <a:p>
+            <a:pPr algn="ctr"/>
+            <a:endParaRPr lang="en-US"/>
+          </a:p>
+        </p:txBody>
+      </p:sp>
+      <p:cxnSp>
+        <p:nvCxnSpPr>
+          <p:cNvPr id="65" name="Straight Arrow Connector 64">
+            <a:extLst>
+              <a:ext uri="{FF2B5EF4-FFF2-40B4-BE49-F238E27FC236}">
+                <a16:creationId xmlns:a16="http://schemas.microsoft.com/office/drawing/2014/main" id="{E78907D9-7D69-CC8D-65F5-E0A49D080F6A}"/>
+              </a:ext>
+            </a:extLst>
+          </p:cNvPr>
+          <p:cNvCxnSpPr/>
+          <p:nvPr/>
+        </p:nvCxnSpPr>
+        <p:spPr>
+          <a:xfrm>
+            <a:off x="2857500" y="2945015"/>
+            <a:ext cx="381000" cy="0"/>
+          </a:xfrm>
+          <a:prstGeom prst="straightConnector1">
+            <a:avLst/>
+          </a:prstGeom>
+          <a:ln w="31750">
+            <a:tailEnd type="triangle"/>
+          </a:ln>
+        </p:spPr>
+        <p:style>
+          <a:lnRef idx="1">
+            <a:schemeClr val="accent1"/>
+          </a:lnRef>
+          <a:fillRef idx="0">
+            <a:schemeClr val="accent1"/>
+          </a:fillRef>
+          <a:effectRef idx="0">
+            <a:schemeClr val="accent1"/>
+          </a:effectRef>
+          <a:fontRef idx="minor">
+            <a:schemeClr val="tx1"/>
+          </a:fontRef>
+        </p:style>
+      </p:cxnSp>
+      <p:cxnSp>
+        <p:nvCxnSpPr>
+          <p:cNvPr id="66" name="Straight Arrow Connector 65">
+            <a:extLst>
+              <a:ext uri="{FF2B5EF4-FFF2-40B4-BE49-F238E27FC236}">
+                <a16:creationId xmlns:a16="http://schemas.microsoft.com/office/drawing/2014/main" id="{BB9A48C1-B456-28C2-B863-7C90D310B568}"/>
+              </a:ext>
+            </a:extLst>
+          </p:cNvPr>
+          <p:cNvCxnSpPr/>
+          <p:nvPr/>
+        </p:nvCxnSpPr>
+        <p:spPr>
+          <a:xfrm>
+            <a:off x="3746500" y="2945015"/>
+            <a:ext cx="381000" cy="0"/>
+          </a:xfrm>
+          <a:prstGeom prst="straightConnector1">
+            <a:avLst/>
+          </a:prstGeom>
+          <a:ln w="31750">
+            <a:headEnd type="none"/>
+            <a:tailEnd type="triangle"/>
+          </a:ln>
+        </p:spPr>
+        <p:style>
+          <a:lnRef idx="1">
+            <a:schemeClr val="accent1"/>
+          </a:lnRef>
+          <a:fillRef idx="0">
+            <a:schemeClr val="accent1"/>
+          </a:fillRef>
+          <a:effectRef idx="0">
+            <a:schemeClr val="accent1"/>
+          </a:effectRef>
+          <a:fontRef idx="minor">
+            <a:schemeClr val="tx1"/>
+          </a:fontRef>
+        </p:style>
+      </p:cxnSp>
+      <p:sp>
+        <p:nvSpPr>
+          <p:cNvPr id="67" name="Freeform: Shape 66">
+            <a:extLst>
+              <a:ext uri="{FF2B5EF4-FFF2-40B4-BE49-F238E27FC236}">
+                <a16:creationId xmlns:a16="http://schemas.microsoft.com/office/drawing/2014/main" id="{7163A55F-AF74-5DAF-D3FD-743A5599BDE4}"/>
+              </a:ext>
+            </a:extLst>
+          </p:cNvPr>
+          <p:cNvSpPr/>
+          <p:nvPr/>
+        </p:nvSpPr>
+        <p:spPr>
+          <a:xfrm>
+            <a:off x="3019425" y="2135388"/>
+            <a:ext cx="933450" cy="809627"/>
+          </a:xfrm>
+          <a:custGeom>
+            <a:avLst/>
+            <a:gdLst>
+              <a:gd name="connsiteX0" fmla="*/ 0 w 6305550"/>
+              <a:gd name="connsiteY0" fmla="*/ 809627 h 809627"/>
+              <a:gd name="connsiteX1" fmla="*/ 3190875 w 6305550"/>
+              <a:gd name="connsiteY1" fmla="*/ 2 h 809627"/>
+              <a:gd name="connsiteX2" fmla="*/ 6305550 w 6305550"/>
+              <a:gd name="connsiteY2" fmla="*/ 800102 h 809627"/>
+            </a:gdLst>
+            <a:ahLst/>
+            <a:cxnLst>
+              <a:cxn ang="0">
+                <a:pos x="connsiteX0" y="connsiteY0"/>
+              </a:cxn>
+              <a:cxn ang="0">
+                <a:pos x="connsiteX1" y="connsiteY1"/>
+              </a:cxn>
+              <a:cxn ang="0">
+                <a:pos x="connsiteX2" y="connsiteY2"/>
+              </a:cxn>
+            </a:cxnLst>
+            <a:rect l="l" t="t" r="r" b="b"/>
+            <a:pathLst>
+              <a:path w="6305550" h="809627">
+                <a:moveTo>
+                  <a:pt x="0" y="809627"/>
+                </a:moveTo>
+                <a:cubicBezTo>
+                  <a:pt x="1069975" y="405608"/>
+                  <a:pt x="2139950" y="1589"/>
+                  <a:pt x="3190875" y="2"/>
+                </a:cubicBezTo>
+                <a:cubicBezTo>
+                  <a:pt x="4241800" y="-1585"/>
+                  <a:pt x="6178550" y="690565"/>
+                  <a:pt x="6305550" y="800102"/>
+                </a:cubicBezTo>
+              </a:path>
+            </a:pathLst>
+          </a:custGeom>
+          <a:noFill/>
+          <a:ln w="12700"/>
+        </p:spPr>
+        <p:style>
+          <a:lnRef idx="2">
+            <a:schemeClr val="accent1">
+              <a:shade val="15000"/>
+            </a:schemeClr>
+          </a:lnRef>
+          <a:fillRef idx="1">
+            <a:schemeClr val="accent1"/>
+          </a:fillRef>
+          <a:effectRef idx="0">
+            <a:schemeClr val="accent1"/>
+          </a:effectRef>
+          <a:fontRef idx="minor">
+            <a:schemeClr val="lt1"/>
+          </a:fontRef>
+        </p:style>
+        <p:txBody>
+          <a:bodyPr rtlCol="0" anchor="ctr"/>
+          <a:lstStyle/>
+          <a:p>
+            <a:pPr algn="ctr"/>
+            <a:endParaRPr lang="en-US"/>
+          </a:p>
+        </p:txBody>
+      </p:sp>
+      <p:sp>
+        <p:nvSpPr>
+          <p:cNvPr id="68" name="Freeform: Shape 67">
+            <a:extLst>
+              <a:ext uri="{FF2B5EF4-FFF2-40B4-BE49-F238E27FC236}">
+                <a16:creationId xmlns:a16="http://schemas.microsoft.com/office/drawing/2014/main" id="{169DE915-FFA2-2932-9F6F-86BCBA38D979}"/>
+              </a:ext>
+            </a:extLst>
+          </p:cNvPr>
+          <p:cNvSpPr/>
+          <p:nvPr/>
+        </p:nvSpPr>
+        <p:spPr>
+          <a:xfrm>
+            <a:off x="2962275" y="1798101"/>
+            <a:ext cx="3486150" cy="2707224"/>
+          </a:xfrm>
+          <a:custGeom>
+            <a:avLst/>
+            <a:gdLst>
+              <a:gd name="connsiteX0" fmla="*/ 0 w 3486150"/>
+              <a:gd name="connsiteY0" fmla="*/ 2707224 h 2707224"/>
+              <a:gd name="connsiteX1" fmla="*/ 2390775 w 3486150"/>
+              <a:gd name="connsiteY1" fmla="*/ 30699 h 2707224"/>
+              <a:gd name="connsiteX2" fmla="*/ 3486150 w 3486150"/>
+              <a:gd name="connsiteY2" fmla="*/ 1221324 h 2707224"/>
+            </a:gdLst>
+            <a:ahLst/>
+            <a:cxnLst>
+              <a:cxn ang="0">
+                <a:pos x="connsiteX0" y="connsiteY0"/>
+              </a:cxn>
+              <a:cxn ang="0">
+                <a:pos x="connsiteX1" y="connsiteY1"/>
+              </a:cxn>
+              <a:cxn ang="0">
+                <a:pos x="connsiteX2" y="connsiteY2"/>
+              </a:cxn>
+            </a:cxnLst>
+            <a:rect l="l" t="t" r="r" b="b"/>
+            <a:pathLst>
+              <a:path w="3486150" h="2707224">
+                <a:moveTo>
+                  <a:pt x="0" y="2707224"/>
+                </a:moveTo>
+                <a:cubicBezTo>
+                  <a:pt x="904875" y="1492786"/>
+                  <a:pt x="1809750" y="278349"/>
+                  <a:pt x="2390775" y="30699"/>
+                </a:cubicBezTo>
+                <a:cubicBezTo>
+                  <a:pt x="2971800" y="-216951"/>
+                  <a:pt x="3330575" y="1111787"/>
+                  <a:pt x="3486150" y="1221324"/>
+                </a:cubicBezTo>
+              </a:path>
+            </a:pathLst>
+          </a:custGeom>
+          <a:ln/>
+        </p:spPr>
+        <p:style>
+          <a:lnRef idx="1">
+            <a:schemeClr val="accent2"/>
+          </a:lnRef>
+          <a:fillRef idx="0">
+            <a:schemeClr val="accent2"/>
+          </a:fillRef>
+          <a:effectRef idx="0">
+            <a:schemeClr val="accent2"/>
+          </a:effectRef>
+          <a:fontRef idx="minor">
+            <a:schemeClr val="tx1"/>
+          </a:fontRef>
+        </p:style>
+        <p:txBody>
+          <a:bodyPr rtlCol="0" anchor="ctr"/>
+          <a:lstStyle/>
+          <a:p>
+            <a:pPr algn="ctr"/>
+            <a:endParaRPr lang="en-US"/>
+          </a:p>
+        </p:txBody>
+      </p:sp>
+      <p:cxnSp>
+        <p:nvCxnSpPr>
+          <p:cNvPr id="69" name="Straight Arrow Connector 68">
+            <a:extLst>
+              <a:ext uri="{FF2B5EF4-FFF2-40B4-BE49-F238E27FC236}">
+                <a16:creationId xmlns:a16="http://schemas.microsoft.com/office/drawing/2014/main" id="{A61CF65B-4083-CA65-960B-0951C21F0DB1}"/>
+              </a:ext>
+            </a:extLst>
+          </p:cNvPr>
+          <p:cNvCxnSpPr/>
+          <p:nvPr/>
+        </p:nvCxnSpPr>
+        <p:spPr>
+          <a:xfrm>
+            <a:off x="2638425" y="4783840"/>
+            <a:ext cx="381000" cy="0"/>
+          </a:xfrm>
+          <a:prstGeom prst="straightConnector1">
+            <a:avLst/>
+          </a:prstGeom>
+          <a:ln w="31750">
+            <a:tailEnd type="triangle"/>
+          </a:ln>
+        </p:spPr>
+        <p:style>
+          <a:lnRef idx="1">
+            <a:schemeClr val="accent1"/>
+          </a:lnRef>
+          <a:fillRef idx="0">
+            <a:schemeClr val="accent1"/>
+          </a:fillRef>
+          <a:effectRef idx="0">
+            <a:schemeClr val="accent1"/>
+          </a:effectRef>
+          <a:fontRef idx="minor">
+            <a:schemeClr val="tx1"/>
+          </a:fontRef>
+        </p:style>
+      </p:cxnSp>
+      <p:cxnSp>
+        <p:nvCxnSpPr>
+          <p:cNvPr id="70" name="Straight Arrow Connector 69">
+            <a:extLst>
+              <a:ext uri="{FF2B5EF4-FFF2-40B4-BE49-F238E27FC236}">
+                <a16:creationId xmlns:a16="http://schemas.microsoft.com/office/drawing/2014/main" id="{F1F91D81-1220-43E6-425D-13886437BD6F}"/>
+              </a:ext>
+            </a:extLst>
+          </p:cNvPr>
+          <p:cNvCxnSpPr/>
+          <p:nvPr/>
+        </p:nvCxnSpPr>
+        <p:spPr>
+          <a:xfrm>
+            <a:off x="5775100" y="4766460"/>
+            <a:ext cx="381000" cy="0"/>
+          </a:xfrm>
+          <a:prstGeom prst="straightConnector1">
+            <a:avLst/>
+          </a:prstGeom>
+          <a:ln w="31750">
+            <a:headEnd type="triangle"/>
+            <a:tailEnd type="none"/>
+          </a:ln>
+        </p:spPr>
+        <p:style>
+          <a:lnRef idx="1">
+            <a:schemeClr val="accent1"/>
+          </a:lnRef>
+          <a:fillRef idx="0">
+            <a:schemeClr val="accent1"/>
+          </a:fillRef>
+          <a:effectRef idx="0">
+            <a:schemeClr val="accent1"/>
+          </a:effectRef>
+          <a:fontRef idx="minor">
+            <a:schemeClr val="tx1"/>
+          </a:fontRef>
+        </p:style>
+      </p:cxnSp>
+      <p:sp>
+        <p:nvSpPr>
+          <p:cNvPr id="71" name="Freeform: Shape 70">
+            <a:extLst>
+              <a:ext uri="{FF2B5EF4-FFF2-40B4-BE49-F238E27FC236}">
+                <a16:creationId xmlns:a16="http://schemas.microsoft.com/office/drawing/2014/main" id="{21A78C2D-2BD8-59BD-CE45-BC90D9F8DADD}"/>
+              </a:ext>
+            </a:extLst>
+          </p:cNvPr>
+          <p:cNvSpPr/>
+          <p:nvPr/>
+        </p:nvSpPr>
+        <p:spPr>
+          <a:xfrm>
+            <a:off x="2857499" y="3959198"/>
+            <a:ext cx="3066825" cy="809627"/>
+          </a:xfrm>
+          <a:custGeom>
+            <a:avLst/>
+            <a:gdLst>
+              <a:gd name="connsiteX0" fmla="*/ 0 w 6305550"/>
+              <a:gd name="connsiteY0" fmla="*/ 809627 h 809627"/>
+              <a:gd name="connsiteX1" fmla="*/ 3190875 w 6305550"/>
+              <a:gd name="connsiteY1" fmla="*/ 2 h 809627"/>
+              <a:gd name="connsiteX2" fmla="*/ 6305550 w 6305550"/>
+              <a:gd name="connsiteY2" fmla="*/ 800102 h 809627"/>
+            </a:gdLst>
+            <a:ahLst/>
+            <a:cxnLst>
+              <a:cxn ang="0">
+                <a:pos x="connsiteX0" y="connsiteY0"/>
+              </a:cxn>
+              <a:cxn ang="0">
+                <a:pos x="connsiteX1" y="connsiteY1"/>
+              </a:cxn>
+              <a:cxn ang="0">
+                <a:pos x="connsiteX2" y="connsiteY2"/>
+              </a:cxn>
+            </a:cxnLst>
+            <a:rect l="l" t="t" r="r" b="b"/>
+            <a:pathLst>
+              <a:path w="6305550" h="809627">
+                <a:moveTo>
+                  <a:pt x="0" y="809627"/>
+                </a:moveTo>
+                <a:cubicBezTo>
+                  <a:pt x="1069975" y="405608"/>
+                  <a:pt x="2139950" y="1589"/>
+                  <a:pt x="3190875" y="2"/>
+                </a:cubicBezTo>
+                <a:cubicBezTo>
+                  <a:pt x="4241800" y="-1585"/>
+                  <a:pt x="6178550" y="690565"/>
+                  <a:pt x="6305550" y="800102"/>
+                </a:cubicBezTo>
+              </a:path>
+            </a:pathLst>
+          </a:custGeom>
+          <a:noFill/>
+          <a:ln w="12700"/>
+        </p:spPr>
+        <p:style>
+          <a:lnRef idx="2">
+            <a:schemeClr val="accent1">
+              <a:shade val="15000"/>
+            </a:schemeClr>
+          </a:lnRef>
+          <a:fillRef idx="1">
+            <a:schemeClr val="accent1"/>
+          </a:fillRef>
+          <a:effectRef idx="0">
+            <a:schemeClr val="accent1"/>
+          </a:effectRef>
+          <a:fontRef idx="minor">
+            <a:schemeClr val="lt1"/>
+          </a:fontRef>
+        </p:style>
+        <p:txBody>
+          <a:bodyPr rtlCol="0" anchor="ctr"/>
+          <a:lstStyle/>
+          <a:p>
+            <a:pPr algn="ctr"/>
+            <a:endParaRPr lang="en-US"/>
+          </a:p>
+        </p:txBody>
+      </p:sp>
+      <p:sp>
+        <p:nvSpPr>
+          <p:cNvPr id="72" name="TextBox 71">
+            <a:extLst>
+              <a:ext uri="{FF2B5EF4-FFF2-40B4-BE49-F238E27FC236}">
+                <a16:creationId xmlns:a16="http://schemas.microsoft.com/office/drawing/2014/main" id="{4EBE0451-44CE-978A-CE15-E844C4263E4D}"/>
+              </a:ext>
+            </a:extLst>
+          </p:cNvPr>
+          <p:cNvSpPr txBox="1"/>
+          <p:nvPr/>
+        </p:nvSpPr>
+        <p:spPr>
+          <a:xfrm>
+            <a:off x="933450" y="5543550"/>
+            <a:ext cx="9460731" cy="584775"/>
+          </a:xfrm>
+          <a:prstGeom prst="rect">
+            <a:avLst/>
+          </a:prstGeom>
+          <a:noFill/>
+        </p:spPr>
+        <p:txBody>
+          <a:bodyPr wrap="none" rtlCol="0">
+            <a:spAutoFit/>
+          </a:bodyPr>
+          <a:lstStyle/>
+          <a:p>
+            <a:r>
+              <a:rPr lang="en-US" sz="3200" dirty="0"/>
+              <a:t>Pairs or reads: random orientations, unknown distances</a:t>
+            </a:r>
+          </a:p>
+        </p:txBody>
+      </p:sp>
+    </p:spTree>
+    <p:extLst>
+      <p:ext uri="{BB962C8B-B14F-4D97-AF65-F5344CB8AC3E}">
+        <p14:creationId xmlns:p14="http://schemas.microsoft.com/office/powerpoint/2010/main" val="475957125"/>
+      </p:ext>
+    </p:extLst>
+  </p:cSld>
+  <p:clrMapOvr>
+    <a:masterClrMapping/>
+  </p:clrMapOvr>
+</p:sld>
+</file>
+
+<file path=ppt/slides/slide11.xml><?xml version="1.0" encoding="utf-8"?>
+<p:sld xmlns:a="http://schemas.openxmlformats.org/drawingml/2006/main" xmlns:r="http://schemas.openxmlformats.org/officeDocument/2006/relationships" xmlns:p="http://schemas.openxmlformats.org/presentationml/2006/main">
+  <p:cSld>
+    <p:spTree>
+      <p:nvGrpSpPr>
+        <p:cNvPr id="1" name=""/>
+        <p:cNvGrpSpPr/>
+        <p:nvPr/>
+      </p:nvGrpSpPr>
+      <p:grpSpPr>
+        <a:xfrm>
+          <a:off x="0" y="0"/>
+          <a:ext cx="0" cy="0"/>
+          <a:chOff x="0" y="0"/>
+          <a:chExt cx="0" cy="0"/>
+        </a:xfrm>
+      </p:grpSpPr>
+      <p:sp>
+        <p:nvSpPr>
+          <p:cNvPr id="43010" name="Rectangle 2"/>
+          <p:cNvSpPr>
+            <a:spLocks noGrp="1" noRot="1" noChangeArrowheads="1"/>
+          </p:cNvSpPr>
+          <p:nvPr>
+            <p:ph type="title"/>
+          </p:nvPr>
+        </p:nvSpPr>
+        <p:spPr>
+          <a:xfrm>
+            <a:off x="311793" y="253798"/>
+            <a:ext cx="8603673" cy="738664"/>
+          </a:xfrm>
+        </p:spPr>
+        <p:txBody>
+          <a:bodyPr>
+            <a:normAutofit/>
+          </a:bodyPr>
+          <a:lstStyle/>
+          <a:p>
+            <a:pPr eaLnBrk="1" hangingPunct="1">
+              <a:defRPr/>
+            </a:pPr>
+            <a:r>
+              <a:rPr lang="en-US" dirty="0"/>
+              <a:t>Hi-C scaffolding: why it works?</a:t>
+            </a:r>
+            <a:endParaRPr lang="en-US" i="1" dirty="0"/>
+          </a:p>
+        </p:txBody>
+      </p:sp>
+      <p:sp>
+        <p:nvSpPr>
+          <p:cNvPr id="2" name="Slide Number Placeholder 1"/>
+          <p:cNvSpPr>
+            <a:spLocks noGrp="1"/>
+          </p:cNvSpPr>
+          <p:nvPr>
+            <p:ph type="sldNum" sz="quarter" idx="12"/>
+          </p:nvPr>
+        </p:nvSpPr>
+        <p:spPr/>
+        <p:txBody>
+          <a:bodyPr/>
+          <a:lstStyle/>
+          <a:p>
+            <a:pPr>
+              <a:defRPr/>
+            </a:pPr>
+            <a:fld id="{56009898-25C4-4402-990A-A393F7094583}" type="slidenum">
+              <a:rPr lang="en-US" smtClean="0"/>
+              <a:pPr>
+                <a:defRPr/>
+              </a:pPr>
+              <a:t>11</a:t>
+            </a:fld>
+            <a:endParaRPr lang="en-US"/>
+          </a:p>
+        </p:txBody>
+      </p:sp>
+      <p:sp>
+        <p:nvSpPr>
+          <p:cNvPr id="20" name="TextBox 19">
+            <a:extLst>
+              <a:ext uri="{FF2B5EF4-FFF2-40B4-BE49-F238E27FC236}">
+                <a16:creationId xmlns:a16="http://schemas.microsoft.com/office/drawing/2014/main" id="{F02BB783-FBE8-45FF-BD10-50F4D47E4134}"/>
+              </a:ext>
+            </a:extLst>
+          </p:cNvPr>
+          <p:cNvSpPr txBox="1"/>
+          <p:nvPr/>
+        </p:nvSpPr>
+        <p:spPr>
+          <a:xfrm>
+            <a:off x="311793" y="6417864"/>
+            <a:ext cx="8747687" cy="307777"/>
+          </a:xfrm>
+          <a:prstGeom prst="rect">
+            <a:avLst/>
+          </a:prstGeom>
+          <a:noFill/>
+        </p:spPr>
+        <p:txBody>
+          <a:bodyPr wrap="square" rtlCol="0">
+            <a:spAutoFit/>
+          </a:bodyPr>
+          <a:lstStyle/>
+          <a:p>
+            <a:r>
+              <a:rPr lang="en-US" sz="1400"/>
+              <a:t>Image from: https://www.bioconductor.org/packages/release/bioc/vignettes/FitHiC/inst/doc/fithic.html</a:t>
+            </a:r>
+          </a:p>
+        </p:txBody>
+      </p:sp>
+      <p:sp>
+        <p:nvSpPr>
+          <p:cNvPr id="22" name="TextBox 21">
+            <a:extLst>
+              <a:ext uri="{FF2B5EF4-FFF2-40B4-BE49-F238E27FC236}">
+                <a16:creationId xmlns:a16="http://schemas.microsoft.com/office/drawing/2014/main" id="{7D2EE49B-CC02-4E4F-8285-CF7E904E8345}"/>
+              </a:ext>
+            </a:extLst>
+          </p:cNvPr>
+          <p:cNvSpPr txBox="1"/>
+          <p:nvPr/>
+        </p:nvSpPr>
+        <p:spPr>
+          <a:xfrm>
+            <a:off x="3447328" y="3259335"/>
+            <a:ext cx="386542" cy="379614"/>
+          </a:xfrm>
+          <a:prstGeom prst="rect">
+            <a:avLst/>
+          </a:prstGeom>
+          <a:solidFill>
+            <a:schemeClr val="bg1"/>
+          </a:solidFill>
+        </p:spPr>
+        <p:txBody>
+          <a:bodyPr wrap="square" rtlCol="0">
+            <a:spAutoFit/>
+          </a:bodyPr>
+          <a:lstStyle/>
+          <a:p>
+            <a:endParaRPr lang="en-US"/>
+          </a:p>
+        </p:txBody>
+      </p:sp>
+      <p:sp>
+        <p:nvSpPr>
+          <p:cNvPr id="9" name="TextBox 8">
+            <a:extLst>
+              <a:ext uri="{FF2B5EF4-FFF2-40B4-BE49-F238E27FC236}">
+                <a16:creationId xmlns:a16="http://schemas.microsoft.com/office/drawing/2014/main" id="{484B9DBB-D947-4E21-90C1-F117C20BDE2C}"/>
+              </a:ext>
+            </a:extLst>
+          </p:cNvPr>
+          <p:cNvSpPr txBox="1"/>
+          <p:nvPr/>
+        </p:nvSpPr>
+        <p:spPr>
+          <a:xfrm>
+            <a:off x="1514850" y="3734410"/>
+            <a:ext cx="191193" cy="369332"/>
+          </a:xfrm>
+          <a:prstGeom prst="rect">
+            <a:avLst/>
+          </a:prstGeom>
+          <a:solidFill>
+            <a:schemeClr val="bg1"/>
+          </a:solidFill>
+        </p:spPr>
+        <p:txBody>
+          <a:bodyPr wrap="square" rtlCol="0">
+            <a:spAutoFit/>
+          </a:bodyPr>
+          <a:lstStyle/>
+          <a:p>
+            <a:endParaRPr lang="en-US"/>
+          </a:p>
+        </p:txBody>
+      </p:sp>
+      <p:pic>
+        <p:nvPicPr>
+          <p:cNvPr id="8" name="Picture 7" descr="A picture containing shape&#10;&#10;Description automatically generated">
+            <a:extLst>
+              <a:ext uri="{FF2B5EF4-FFF2-40B4-BE49-F238E27FC236}">
+                <a16:creationId xmlns:a16="http://schemas.microsoft.com/office/drawing/2014/main" id="{37377E67-1CB6-4A77-928B-950B11FBBD2A}"/>
+              </a:ext>
+            </a:extLst>
+          </p:cNvPr>
+          <p:cNvPicPr>
+            <a:picLocks noChangeAspect="1"/>
+          </p:cNvPicPr>
+          <p:nvPr/>
+        </p:nvPicPr>
+        <p:blipFill>
+          <a:blip r:embed="rId2">
+            <a:extLst>
+              <a:ext uri="{28A0092B-C50C-407E-A947-70E740481C1C}">
+                <a14:useLocalDpi xmlns:a14="http://schemas.microsoft.com/office/drawing/2010/main" val="0"/>
+              </a:ext>
+            </a:extLst>
+          </a:blip>
+          <a:stretch>
+            <a:fillRect/>
+          </a:stretch>
+        </p:blipFill>
+        <p:spPr>
+          <a:xfrm>
+            <a:off x="411262" y="1642026"/>
+            <a:ext cx="6413281" cy="4809961"/>
+          </a:xfrm>
+          <a:prstGeom prst="rect">
+            <a:avLst/>
+          </a:prstGeom>
+        </p:spPr>
+      </p:pic>
+      <p:cxnSp>
+        <p:nvCxnSpPr>
+          <p:cNvPr id="11" name="Straight Connector 10">
+            <a:extLst>
+              <a:ext uri="{FF2B5EF4-FFF2-40B4-BE49-F238E27FC236}">
+                <a16:creationId xmlns:a16="http://schemas.microsoft.com/office/drawing/2014/main" id="{62D17F53-B12D-4C49-AF23-DD699AA578F6}"/>
+              </a:ext>
+            </a:extLst>
+          </p:cNvPr>
+          <p:cNvCxnSpPr/>
+          <p:nvPr/>
+        </p:nvCxnSpPr>
+        <p:spPr>
+          <a:xfrm>
+            <a:off x="7012230" y="3887115"/>
+            <a:ext cx="1832460" cy="0"/>
+          </a:xfrm>
+          <a:prstGeom prst="line">
+            <a:avLst/>
+          </a:prstGeom>
+          <a:ln w="41275"/>
+        </p:spPr>
+        <p:style>
+          <a:lnRef idx="1">
+            <a:schemeClr val="accent1"/>
+          </a:lnRef>
+          <a:fillRef idx="0">
+            <a:schemeClr val="accent1"/>
+          </a:fillRef>
+          <a:effectRef idx="0">
+            <a:schemeClr val="accent1"/>
+          </a:effectRef>
+          <a:fontRef idx="minor">
+            <a:schemeClr val="tx1"/>
+          </a:fontRef>
+        </p:style>
+      </p:cxnSp>
+      <p:cxnSp>
+        <p:nvCxnSpPr>
+          <p:cNvPr id="18" name="Straight Connector 17">
+            <a:extLst>
+              <a:ext uri="{FF2B5EF4-FFF2-40B4-BE49-F238E27FC236}">
+                <a16:creationId xmlns:a16="http://schemas.microsoft.com/office/drawing/2014/main" id="{A7162EB8-B4F1-4393-BF2E-BE3AE8ED34DF}"/>
+              </a:ext>
+            </a:extLst>
+          </p:cNvPr>
+          <p:cNvCxnSpPr/>
+          <p:nvPr/>
+        </p:nvCxnSpPr>
+        <p:spPr>
+          <a:xfrm>
+            <a:off x="9385486" y="3881755"/>
+            <a:ext cx="1832460" cy="0"/>
+          </a:xfrm>
+          <a:prstGeom prst="line">
+            <a:avLst/>
+          </a:prstGeom>
+          <a:ln w="41275"/>
+        </p:spPr>
+        <p:style>
+          <a:lnRef idx="1">
+            <a:schemeClr val="accent1"/>
+          </a:lnRef>
+          <a:fillRef idx="0">
+            <a:schemeClr val="accent1"/>
+          </a:fillRef>
+          <a:effectRef idx="0">
+            <a:schemeClr val="accent1"/>
+          </a:effectRef>
+          <a:fontRef idx="minor">
+            <a:schemeClr val="tx1"/>
+          </a:fontRef>
+        </p:style>
+      </p:cxnSp>
+      <p:grpSp>
+        <p:nvGrpSpPr>
+          <p:cNvPr id="32" name="Group 31">
+            <a:extLst>
+              <a:ext uri="{FF2B5EF4-FFF2-40B4-BE49-F238E27FC236}">
+                <a16:creationId xmlns:a16="http://schemas.microsoft.com/office/drawing/2014/main" id="{F785F8BD-71B9-4D2F-B23E-EC7D7137BE70}"/>
+              </a:ext>
+            </a:extLst>
+          </p:cNvPr>
+          <p:cNvGrpSpPr/>
+          <p:nvPr/>
+        </p:nvGrpSpPr>
+        <p:grpSpPr>
+          <a:xfrm>
+            <a:off x="8539280" y="3259335"/>
+            <a:ext cx="1221640" cy="622420"/>
+            <a:chOff x="8539280" y="3259335"/>
+            <a:chExt cx="1221640" cy="622420"/>
+          </a:xfrm>
+        </p:grpSpPr>
+        <p:cxnSp>
+          <p:nvCxnSpPr>
+            <p:cNvPr id="27" name="Straight Connector 26">
+              <a:extLst>
+                <a:ext uri="{FF2B5EF4-FFF2-40B4-BE49-F238E27FC236}">
+                  <a16:creationId xmlns:a16="http://schemas.microsoft.com/office/drawing/2014/main" id="{56BF1084-BE2C-432A-8701-CE80DEBD6245}"/>
+                </a:ext>
+              </a:extLst>
+            </p:cNvPr>
+            <p:cNvCxnSpPr/>
+            <p:nvPr/>
+          </p:nvCxnSpPr>
+          <p:spPr>
+            <a:xfrm flipV="1">
+              <a:off x="8539280" y="3259335"/>
+              <a:ext cx="610820" cy="622420"/>
+            </a:xfrm>
+            <a:prstGeom prst="line">
+              <a:avLst/>
+            </a:prstGeom>
+          </p:spPr>
+          <p:style>
+            <a:lnRef idx="1">
+              <a:schemeClr val="accent1"/>
+            </a:lnRef>
+            <a:fillRef idx="0">
+              <a:schemeClr val="accent1"/>
+            </a:fillRef>
+            <a:effectRef idx="0">
+              <a:schemeClr val="accent1"/>
+            </a:effectRef>
+            <a:fontRef idx="minor">
+              <a:schemeClr val="tx1"/>
+            </a:fontRef>
+          </p:style>
+        </p:cxnSp>
+        <p:cxnSp>
+          <p:nvCxnSpPr>
+            <p:cNvPr id="30" name="Straight Connector 29">
+              <a:extLst>
+                <a:ext uri="{FF2B5EF4-FFF2-40B4-BE49-F238E27FC236}">
+                  <a16:creationId xmlns:a16="http://schemas.microsoft.com/office/drawing/2014/main" id="{1969A158-CD01-4BFB-995A-231A3A9AC7C6}"/>
+                </a:ext>
+              </a:extLst>
+            </p:cNvPr>
+            <p:cNvCxnSpPr>
+              <a:cxnSpLocks/>
+            </p:cNvCxnSpPr>
+            <p:nvPr/>
+          </p:nvCxnSpPr>
+          <p:spPr>
+            <a:xfrm flipH="1" flipV="1">
+              <a:off x="9150100" y="3259335"/>
+              <a:ext cx="610820" cy="622420"/>
+            </a:xfrm>
+            <a:prstGeom prst="line">
+              <a:avLst/>
+            </a:prstGeom>
+          </p:spPr>
+          <p:style>
+            <a:lnRef idx="1">
+              <a:schemeClr val="accent1"/>
+            </a:lnRef>
+            <a:fillRef idx="0">
+              <a:schemeClr val="accent1"/>
+            </a:fillRef>
+            <a:effectRef idx="0">
+              <a:schemeClr val="accent1"/>
+            </a:effectRef>
+            <a:fontRef idx="minor">
+              <a:schemeClr val="tx1"/>
+            </a:fontRef>
+          </p:style>
+        </p:cxnSp>
+      </p:grpSp>
+      <p:grpSp>
+        <p:nvGrpSpPr>
+          <p:cNvPr id="34" name="Group 33">
+            <a:extLst>
+              <a:ext uri="{FF2B5EF4-FFF2-40B4-BE49-F238E27FC236}">
+                <a16:creationId xmlns:a16="http://schemas.microsoft.com/office/drawing/2014/main" id="{870F5E41-EFC8-43AB-87FF-5A2B00FA70C1}"/>
+              </a:ext>
+            </a:extLst>
+          </p:cNvPr>
+          <p:cNvGrpSpPr/>
+          <p:nvPr/>
+        </p:nvGrpSpPr>
+        <p:grpSpPr>
+          <a:xfrm>
+            <a:off x="8366837" y="3244724"/>
+            <a:ext cx="1221640" cy="622420"/>
+            <a:chOff x="8539280" y="3259335"/>
+            <a:chExt cx="1221640" cy="622420"/>
+          </a:xfrm>
+        </p:grpSpPr>
+        <p:cxnSp>
+          <p:nvCxnSpPr>
+            <p:cNvPr id="35" name="Straight Connector 34">
+              <a:extLst>
+                <a:ext uri="{FF2B5EF4-FFF2-40B4-BE49-F238E27FC236}">
+                  <a16:creationId xmlns:a16="http://schemas.microsoft.com/office/drawing/2014/main" id="{0BD940DC-4211-483C-9ED4-F366B767B84A}"/>
+                </a:ext>
+              </a:extLst>
+            </p:cNvPr>
+            <p:cNvCxnSpPr/>
+            <p:nvPr/>
+          </p:nvCxnSpPr>
+          <p:spPr>
+            <a:xfrm flipV="1">
+              <a:off x="8539280" y="3259335"/>
+              <a:ext cx="610820" cy="622420"/>
+            </a:xfrm>
+            <a:prstGeom prst="line">
+              <a:avLst/>
+            </a:prstGeom>
+          </p:spPr>
+          <p:style>
+            <a:lnRef idx="1">
+              <a:schemeClr val="accent1"/>
+            </a:lnRef>
+            <a:fillRef idx="0">
+              <a:schemeClr val="accent1"/>
+            </a:fillRef>
+            <a:effectRef idx="0">
+              <a:schemeClr val="accent1"/>
+            </a:effectRef>
+            <a:fontRef idx="minor">
+              <a:schemeClr val="tx1"/>
+            </a:fontRef>
+          </p:style>
+        </p:cxnSp>
+        <p:cxnSp>
+          <p:nvCxnSpPr>
+            <p:cNvPr id="36" name="Straight Connector 35">
+              <a:extLst>
+                <a:ext uri="{FF2B5EF4-FFF2-40B4-BE49-F238E27FC236}">
+                  <a16:creationId xmlns:a16="http://schemas.microsoft.com/office/drawing/2014/main" id="{AE513302-3BDE-4868-B290-5852BD3EF13A}"/>
+                </a:ext>
+              </a:extLst>
+            </p:cNvPr>
+            <p:cNvCxnSpPr>
+              <a:cxnSpLocks/>
+            </p:cNvCxnSpPr>
+            <p:nvPr/>
+          </p:nvCxnSpPr>
+          <p:spPr>
+            <a:xfrm flipH="1" flipV="1">
+              <a:off x="9150100" y="3259335"/>
+              <a:ext cx="610820" cy="622420"/>
+            </a:xfrm>
+            <a:prstGeom prst="line">
+              <a:avLst/>
+            </a:prstGeom>
+          </p:spPr>
+          <p:style>
+            <a:lnRef idx="1">
+              <a:schemeClr val="accent1"/>
+            </a:lnRef>
+            <a:fillRef idx="0">
+              <a:schemeClr val="accent1"/>
+            </a:fillRef>
+            <a:effectRef idx="0">
+              <a:schemeClr val="accent1"/>
+            </a:effectRef>
+            <a:fontRef idx="minor">
+              <a:schemeClr val="tx1"/>
+            </a:fontRef>
+          </p:style>
+        </p:cxnSp>
+      </p:grpSp>
+      <p:grpSp>
+        <p:nvGrpSpPr>
+          <p:cNvPr id="37" name="Group 36">
+            <a:extLst>
+              <a:ext uri="{FF2B5EF4-FFF2-40B4-BE49-F238E27FC236}">
+                <a16:creationId xmlns:a16="http://schemas.microsoft.com/office/drawing/2014/main" id="{8A6CAC75-7AB5-4150-B8E8-EE050319C036}"/>
+              </a:ext>
+            </a:extLst>
+          </p:cNvPr>
+          <p:cNvGrpSpPr/>
+          <p:nvPr/>
+        </p:nvGrpSpPr>
+        <p:grpSpPr>
+          <a:xfrm>
+            <a:off x="8719326" y="3244724"/>
+            <a:ext cx="1221640" cy="622420"/>
+            <a:chOff x="8539280" y="3259335"/>
+            <a:chExt cx="1221640" cy="622420"/>
+          </a:xfrm>
+        </p:grpSpPr>
+        <p:cxnSp>
+          <p:nvCxnSpPr>
+            <p:cNvPr id="38" name="Straight Connector 37">
+              <a:extLst>
+                <a:ext uri="{FF2B5EF4-FFF2-40B4-BE49-F238E27FC236}">
+                  <a16:creationId xmlns:a16="http://schemas.microsoft.com/office/drawing/2014/main" id="{3E8626A1-6040-4D52-B229-BE651D28AD69}"/>
+                </a:ext>
+              </a:extLst>
+            </p:cNvPr>
+            <p:cNvCxnSpPr/>
+            <p:nvPr/>
+          </p:nvCxnSpPr>
+          <p:spPr>
+            <a:xfrm flipV="1">
+              <a:off x="8539280" y="3259335"/>
+              <a:ext cx="610820" cy="622420"/>
+            </a:xfrm>
+            <a:prstGeom prst="line">
+              <a:avLst/>
+            </a:prstGeom>
+          </p:spPr>
+          <p:style>
+            <a:lnRef idx="1">
+              <a:schemeClr val="accent1"/>
+            </a:lnRef>
+            <a:fillRef idx="0">
+              <a:schemeClr val="accent1"/>
+            </a:fillRef>
+            <a:effectRef idx="0">
+              <a:schemeClr val="accent1"/>
+            </a:effectRef>
+            <a:fontRef idx="minor">
+              <a:schemeClr val="tx1"/>
+            </a:fontRef>
+          </p:style>
+        </p:cxnSp>
+        <p:cxnSp>
+          <p:nvCxnSpPr>
+            <p:cNvPr id="39" name="Straight Connector 38">
+              <a:extLst>
+                <a:ext uri="{FF2B5EF4-FFF2-40B4-BE49-F238E27FC236}">
+                  <a16:creationId xmlns:a16="http://schemas.microsoft.com/office/drawing/2014/main" id="{28FFA446-67F0-463F-8AB8-D401B061701E}"/>
+                </a:ext>
+              </a:extLst>
+            </p:cNvPr>
+            <p:cNvCxnSpPr>
+              <a:cxnSpLocks/>
+            </p:cNvCxnSpPr>
+            <p:nvPr/>
+          </p:nvCxnSpPr>
+          <p:spPr>
+            <a:xfrm flipH="1" flipV="1">
+              <a:off x="9150100" y="3259335"/>
+              <a:ext cx="610820" cy="622420"/>
+            </a:xfrm>
+            <a:prstGeom prst="line">
+              <a:avLst/>
+            </a:prstGeom>
+          </p:spPr>
+          <p:style>
+            <a:lnRef idx="1">
+              <a:schemeClr val="accent1"/>
+            </a:lnRef>
+            <a:fillRef idx="0">
+              <a:schemeClr val="accent1"/>
+            </a:fillRef>
+            <a:effectRef idx="0">
+              <a:schemeClr val="accent1"/>
+            </a:effectRef>
+            <a:fontRef idx="minor">
+              <a:schemeClr val="tx1"/>
+            </a:fontRef>
+          </p:style>
+        </p:cxnSp>
+      </p:grpSp>
+      <p:grpSp>
+        <p:nvGrpSpPr>
+          <p:cNvPr id="40" name="Group 39">
+            <a:extLst>
+              <a:ext uri="{FF2B5EF4-FFF2-40B4-BE49-F238E27FC236}">
+                <a16:creationId xmlns:a16="http://schemas.microsoft.com/office/drawing/2014/main" id="{C82D1ADF-939D-480C-8811-553EAD2DB927}"/>
+              </a:ext>
+            </a:extLst>
+          </p:cNvPr>
+          <p:cNvGrpSpPr/>
+          <p:nvPr/>
+        </p:nvGrpSpPr>
+        <p:grpSpPr>
+          <a:xfrm>
+            <a:off x="8506024" y="3076396"/>
+            <a:ext cx="1554086" cy="795373"/>
+            <a:chOff x="8539280" y="3259335"/>
+            <a:chExt cx="1221640" cy="622420"/>
+          </a:xfrm>
+        </p:grpSpPr>
+        <p:cxnSp>
+          <p:nvCxnSpPr>
+            <p:cNvPr id="41" name="Straight Connector 40">
+              <a:extLst>
+                <a:ext uri="{FF2B5EF4-FFF2-40B4-BE49-F238E27FC236}">
+                  <a16:creationId xmlns:a16="http://schemas.microsoft.com/office/drawing/2014/main" id="{19CA6352-2B3C-43AB-A24C-1C3AF3E07AF4}"/>
+                </a:ext>
+              </a:extLst>
+            </p:cNvPr>
+            <p:cNvCxnSpPr/>
+            <p:nvPr/>
+          </p:nvCxnSpPr>
+          <p:spPr>
+            <a:xfrm flipV="1">
+              <a:off x="8539280" y="3259335"/>
+              <a:ext cx="610820" cy="622420"/>
+            </a:xfrm>
+            <a:prstGeom prst="line">
+              <a:avLst/>
+            </a:prstGeom>
+          </p:spPr>
+          <p:style>
+            <a:lnRef idx="1">
+              <a:schemeClr val="accent1"/>
+            </a:lnRef>
+            <a:fillRef idx="0">
+              <a:schemeClr val="accent1"/>
+            </a:fillRef>
+            <a:effectRef idx="0">
+              <a:schemeClr val="accent1"/>
+            </a:effectRef>
+            <a:fontRef idx="minor">
+              <a:schemeClr val="tx1"/>
+            </a:fontRef>
+          </p:style>
+        </p:cxnSp>
+        <p:cxnSp>
+          <p:nvCxnSpPr>
+            <p:cNvPr id="42" name="Straight Connector 41">
+              <a:extLst>
+                <a:ext uri="{FF2B5EF4-FFF2-40B4-BE49-F238E27FC236}">
+                  <a16:creationId xmlns:a16="http://schemas.microsoft.com/office/drawing/2014/main" id="{63E20AB4-972A-4898-8720-1F24169DB59B}"/>
+                </a:ext>
+              </a:extLst>
+            </p:cNvPr>
+            <p:cNvCxnSpPr>
+              <a:cxnSpLocks/>
+            </p:cNvCxnSpPr>
+            <p:nvPr/>
+          </p:nvCxnSpPr>
+          <p:spPr>
+            <a:xfrm flipH="1" flipV="1">
+              <a:off x="9150100" y="3259335"/>
+              <a:ext cx="610820" cy="622420"/>
+            </a:xfrm>
+            <a:prstGeom prst="line">
+              <a:avLst/>
+            </a:prstGeom>
+          </p:spPr>
+          <p:style>
+            <a:lnRef idx="1">
+              <a:schemeClr val="accent1"/>
+            </a:lnRef>
+            <a:fillRef idx="0">
+              <a:schemeClr val="accent1"/>
+            </a:fillRef>
+            <a:effectRef idx="0">
+              <a:schemeClr val="accent1"/>
+            </a:effectRef>
+            <a:fontRef idx="minor">
+              <a:schemeClr val="tx1"/>
+            </a:fontRef>
+          </p:style>
+        </p:cxnSp>
+      </p:grpSp>
+      <p:grpSp>
+        <p:nvGrpSpPr>
+          <p:cNvPr id="43" name="Group 42">
+            <a:extLst>
+              <a:ext uri="{FF2B5EF4-FFF2-40B4-BE49-F238E27FC236}">
+                <a16:creationId xmlns:a16="http://schemas.microsoft.com/office/drawing/2014/main" id="{BAAA8EC6-F119-4FE6-B11F-54A323133C77}"/>
+              </a:ext>
+            </a:extLst>
+          </p:cNvPr>
+          <p:cNvGrpSpPr/>
+          <p:nvPr/>
+        </p:nvGrpSpPr>
+        <p:grpSpPr>
+          <a:xfrm>
+            <a:off x="8258404" y="3087607"/>
+            <a:ext cx="1554086" cy="795373"/>
+            <a:chOff x="8539280" y="3259335"/>
+            <a:chExt cx="1221640" cy="622420"/>
+          </a:xfrm>
+        </p:grpSpPr>
+        <p:cxnSp>
+          <p:nvCxnSpPr>
+            <p:cNvPr id="44" name="Straight Connector 43">
+              <a:extLst>
+                <a:ext uri="{FF2B5EF4-FFF2-40B4-BE49-F238E27FC236}">
+                  <a16:creationId xmlns:a16="http://schemas.microsoft.com/office/drawing/2014/main" id="{F733B166-1458-449B-BE18-4789098A4626}"/>
+                </a:ext>
+              </a:extLst>
+            </p:cNvPr>
+            <p:cNvCxnSpPr/>
+            <p:nvPr/>
+          </p:nvCxnSpPr>
+          <p:spPr>
+            <a:xfrm flipV="1">
+              <a:off x="8539280" y="3259335"/>
+              <a:ext cx="610820" cy="622420"/>
+            </a:xfrm>
+            <a:prstGeom prst="line">
+              <a:avLst/>
+            </a:prstGeom>
+          </p:spPr>
+          <p:style>
+            <a:lnRef idx="1">
+              <a:schemeClr val="accent1"/>
+            </a:lnRef>
+            <a:fillRef idx="0">
+              <a:schemeClr val="accent1"/>
+            </a:fillRef>
+            <a:effectRef idx="0">
+              <a:schemeClr val="accent1"/>
+            </a:effectRef>
+            <a:fontRef idx="minor">
+              <a:schemeClr val="tx1"/>
+            </a:fontRef>
+          </p:style>
+        </p:cxnSp>
+        <p:cxnSp>
+          <p:nvCxnSpPr>
+            <p:cNvPr id="45" name="Straight Connector 44">
+              <a:extLst>
+                <a:ext uri="{FF2B5EF4-FFF2-40B4-BE49-F238E27FC236}">
+                  <a16:creationId xmlns:a16="http://schemas.microsoft.com/office/drawing/2014/main" id="{4FBEAB9B-72FA-4AE8-8E0D-BFD68CD37133}"/>
+                </a:ext>
+              </a:extLst>
+            </p:cNvPr>
+            <p:cNvCxnSpPr>
+              <a:cxnSpLocks/>
+            </p:cNvCxnSpPr>
+            <p:nvPr/>
+          </p:nvCxnSpPr>
+          <p:spPr>
+            <a:xfrm flipH="1" flipV="1">
+              <a:off x="9150100" y="3259335"/>
+              <a:ext cx="610820" cy="622420"/>
+            </a:xfrm>
+            <a:prstGeom prst="line">
+              <a:avLst/>
+            </a:prstGeom>
+          </p:spPr>
+          <p:style>
+            <a:lnRef idx="1">
+              <a:schemeClr val="accent1"/>
+            </a:lnRef>
+            <a:fillRef idx="0">
+              <a:schemeClr val="accent1"/>
+            </a:fillRef>
+            <a:effectRef idx="0">
+              <a:schemeClr val="accent1"/>
+            </a:effectRef>
+            <a:fontRef idx="minor">
+              <a:schemeClr val="tx1"/>
+            </a:fontRef>
+          </p:style>
+        </p:cxnSp>
+      </p:grpSp>
+      <p:grpSp>
+        <p:nvGrpSpPr>
+          <p:cNvPr id="46" name="Group 45">
+            <a:extLst>
+              <a:ext uri="{FF2B5EF4-FFF2-40B4-BE49-F238E27FC236}">
+                <a16:creationId xmlns:a16="http://schemas.microsoft.com/office/drawing/2014/main" id="{A9F16FEF-6F3E-416D-A071-7990823796E9}"/>
+              </a:ext>
+            </a:extLst>
+          </p:cNvPr>
+          <p:cNvGrpSpPr/>
+          <p:nvPr/>
+        </p:nvGrpSpPr>
+        <p:grpSpPr>
+          <a:xfrm>
+            <a:off x="8008075" y="2769492"/>
+            <a:ext cx="2284050" cy="1116398"/>
+            <a:chOff x="8539280" y="3259335"/>
+            <a:chExt cx="1221640" cy="622420"/>
+          </a:xfrm>
+        </p:grpSpPr>
+        <p:cxnSp>
+          <p:nvCxnSpPr>
+            <p:cNvPr id="47" name="Straight Connector 46">
+              <a:extLst>
+                <a:ext uri="{FF2B5EF4-FFF2-40B4-BE49-F238E27FC236}">
+                  <a16:creationId xmlns:a16="http://schemas.microsoft.com/office/drawing/2014/main" id="{C2B9FA1F-BB5C-436F-9AA9-8E819EA2652C}"/>
+                </a:ext>
+              </a:extLst>
+            </p:cNvPr>
+            <p:cNvCxnSpPr/>
+            <p:nvPr/>
+          </p:nvCxnSpPr>
+          <p:spPr>
+            <a:xfrm flipV="1">
+              <a:off x="8539280" y="3259335"/>
+              <a:ext cx="610820" cy="622420"/>
+            </a:xfrm>
+            <a:prstGeom prst="line">
+              <a:avLst/>
+            </a:prstGeom>
+          </p:spPr>
+          <p:style>
+            <a:lnRef idx="1">
+              <a:schemeClr val="accent1"/>
+            </a:lnRef>
+            <a:fillRef idx="0">
+              <a:schemeClr val="accent1"/>
+            </a:fillRef>
+            <a:effectRef idx="0">
+              <a:schemeClr val="accent1"/>
+            </a:effectRef>
+            <a:fontRef idx="minor">
+              <a:schemeClr val="tx1"/>
+            </a:fontRef>
+          </p:style>
+        </p:cxnSp>
+        <p:cxnSp>
+          <p:nvCxnSpPr>
+            <p:cNvPr id="48" name="Straight Connector 47">
+              <a:extLst>
+                <a:ext uri="{FF2B5EF4-FFF2-40B4-BE49-F238E27FC236}">
+                  <a16:creationId xmlns:a16="http://schemas.microsoft.com/office/drawing/2014/main" id="{1B0E5748-AD29-4780-8C6A-76195A9A4DF6}"/>
+                </a:ext>
+              </a:extLst>
+            </p:cNvPr>
+            <p:cNvCxnSpPr>
+              <a:cxnSpLocks/>
+            </p:cNvCxnSpPr>
+            <p:nvPr/>
+          </p:nvCxnSpPr>
+          <p:spPr>
+            <a:xfrm flipH="1" flipV="1">
+              <a:off x="9150100" y="3259335"/>
+              <a:ext cx="610820" cy="622420"/>
+            </a:xfrm>
+            <a:prstGeom prst="line">
+              <a:avLst/>
+            </a:prstGeom>
+          </p:spPr>
+          <p:style>
+            <a:lnRef idx="1">
+              <a:schemeClr val="accent1"/>
+            </a:lnRef>
+            <a:fillRef idx="0">
+              <a:schemeClr val="accent1"/>
+            </a:fillRef>
+            <a:effectRef idx="0">
+              <a:schemeClr val="accent1"/>
+            </a:effectRef>
+            <a:fontRef idx="minor">
+              <a:schemeClr val="tx1"/>
+            </a:fontRef>
+          </p:style>
+        </p:cxnSp>
+      </p:grpSp>
+      <p:grpSp>
+        <p:nvGrpSpPr>
+          <p:cNvPr id="49" name="Group 48">
+            <a:extLst>
+              <a:ext uri="{FF2B5EF4-FFF2-40B4-BE49-F238E27FC236}">
+                <a16:creationId xmlns:a16="http://schemas.microsoft.com/office/drawing/2014/main" id="{A0CAC719-3A3E-4E70-BE5A-CBB8DF480BDA}"/>
+              </a:ext>
+            </a:extLst>
+          </p:cNvPr>
+          <p:cNvGrpSpPr/>
+          <p:nvPr/>
+        </p:nvGrpSpPr>
+        <p:grpSpPr>
+          <a:xfrm>
+            <a:off x="7435718" y="2070280"/>
+            <a:ext cx="3178035" cy="1818060"/>
+            <a:chOff x="8539280" y="3259335"/>
+            <a:chExt cx="1221640" cy="622420"/>
+          </a:xfrm>
+        </p:grpSpPr>
+        <p:cxnSp>
+          <p:nvCxnSpPr>
+            <p:cNvPr id="50" name="Straight Connector 49">
+              <a:extLst>
+                <a:ext uri="{FF2B5EF4-FFF2-40B4-BE49-F238E27FC236}">
+                  <a16:creationId xmlns:a16="http://schemas.microsoft.com/office/drawing/2014/main" id="{35B9AFF6-3994-4D0F-81B1-9D9CD451B168}"/>
+                </a:ext>
+              </a:extLst>
+            </p:cNvPr>
+            <p:cNvCxnSpPr/>
+            <p:nvPr/>
+          </p:nvCxnSpPr>
+          <p:spPr>
+            <a:xfrm flipV="1">
+              <a:off x="8539280" y="3259335"/>
+              <a:ext cx="610820" cy="622420"/>
+            </a:xfrm>
+            <a:prstGeom prst="line">
+              <a:avLst/>
+            </a:prstGeom>
+          </p:spPr>
+          <p:style>
+            <a:lnRef idx="1">
+              <a:schemeClr val="accent1"/>
+            </a:lnRef>
+            <a:fillRef idx="0">
+              <a:schemeClr val="accent1"/>
+            </a:fillRef>
+            <a:effectRef idx="0">
+              <a:schemeClr val="accent1"/>
+            </a:effectRef>
+            <a:fontRef idx="minor">
+              <a:schemeClr val="tx1"/>
+            </a:fontRef>
+          </p:style>
+        </p:cxnSp>
+        <p:cxnSp>
+          <p:nvCxnSpPr>
+            <p:cNvPr id="51" name="Straight Connector 50">
+              <a:extLst>
+                <a:ext uri="{FF2B5EF4-FFF2-40B4-BE49-F238E27FC236}">
+                  <a16:creationId xmlns:a16="http://schemas.microsoft.com/office/drawing/2014/main" id="{426946F0-8C8E-42F5-881C-A2D087A92731}"/>
+                </a:ext>
+              </a:extLst>
+            </p:cNvPr>
+            <p:cNvCxnSpPr>
+              <a:cxnSpLocks/>
+            </p:cNvCxnSpPr>
+            <p:nvPr/>
+          </p:nvCxnSpPr>
+          <p:spPr>
+            <a:xfrm flipH="1" flipV="1">
+              <a:off x="9150100" y="3259335"/>
+              <a:ext cx="610820" cy="622420"/>
+            </a:xfrm>
+            <a:prstGeom prst="line">
+              <a:avLst/>
+            </a:prstGeom>
+          </p:spPr>
+          <p:style>
+            <a:lnRef idx="1">
+              <a:schemeClr val="accent1"/>
+            </a:lnRef>
+            <a:fillRef idx="0">
+              <a:schemeClr val="accent1"/>
+            </a:fillRef>
+            <a:effectRef idx="0">
+              <a:schemeClr val="accent1"/>
+            </a:effectRef>
+            <a:fontRef idx="minor">
+              <a:schemeClr val="tx1"/>
+            </a:fontRef>
+          </p:style>
+        </p:cxnSp>
+      </p:grpSp>
+      <p:grpSp>
+        <p:nvGrpSpPr>
+          <p:cNvPr id="52" name="Group 51">
+            <a:extLst>
+              <a:ext uri="{FF2B5EF4-FFF2-40B4-BE49-F238E27FC236}">
+                <a16:creationId xmlns:a16="http://schemas.microsoft.com/office/drawing/2014/main" id="{D738D43D-D296-4754-968C-E615B9CDC50C}"/>
+              </a:ext>
+            </a:extLst>
+          </p:cNvPr>
+          <p:cNvGrpSpPr/>
+          <p:nvPr/>
+        </p:nvGrpSpPr>
+        <p:grpSpPr>
+          <a:xfrm>
+            <a:off x="7111317" y="1509816"/>
+            <a:ext cx="4077565" cy="2371939"/>
+            <a:chOff x="8539280" y="3259335"/>
+            <a:chExt cx="1221640" cy="622420"/>
+          </a:xfrm>
+        </p:grpSpPr>
+        <p:cxnSp>
+          <p:nvCxnSpPr>
+            <p:cNvPr id="53" name="Straight Connector 52">
+              <a:extLst>
+                <a:ext uri="{FF2B5EF4-FFF2-40B4-BE49-F238E27FC236}">
+                  <a16:creationId xmlns:a16="http://schemas.microsoft.com/office/drawing/2014/main" id="{4D6316BB-5440-4030-95BF-0E8AB906D754}"/>
+                </a:ext>
+              </a:extLst>
+            </p:cNvPr>
+            <p:cNvCxnSpPr/>
+            <p:nvPr/>
+          </p:nvCxnSpPr>
+          <p:spPr>
+            <a:xfrm flipV="1">
+              <a:off x="8539280" y="3259335"/>
+              <a:ext cx="610820" cy="622420"/>
+            </a:xfrm>
+            <a:prstGeom prst="line">
+              <a:avLst/>
+            </a:prstGeom>
+          </p:spPr>
+          <p:style>
+            <a:lnRef idx="1">
+              <a:schemeClr val="accent1"/>
+            </a:lnRef>
+            <a:fillRef idx="0">
+              <a:schemeClr val="accent1"/>
+            </a:fillRef>
+            <a:effectRef idx="0">
+              <a:schemeClr val="accent1"/>
+            </a:effectRef>
+            <a:fontRef idx="minor">
+              <a:schemeClr val="tx1"/>
+            </a:fontRef>
+          </p:style>
+        </p:cxnSp>
+        <p:cxnSp>
+          <p:nvCxnSpPr>
+            <p:cNvPr id="54" name="Straight Connector 53">
+              <a:extLst>
+                <a:ext uri="{FF2B5EF4-FFF2-40B4-BE49-F238E27FC236}">
+                  <a16:creationId xmlns:a16="http://schemas.microsoft.com/office/drawing/2014/main" id="{48B70D8C-24EB-46A1-9C0E-C37C0EAFD524}"/>
+                </a:ext>
+              </a:extLst>
+            </p:cNvPr>
+            <p:cNvCxnSpPr>
+              <a:cxnSpLocks/>
+            </p:cNvCxnSpPr>
+            <p:nvPr/>
+          </p:nvCxnSpPr>
+          <p:spPr>
+            <a:xfrm flipH="1" flipV="1">
+              <a:off x="9150100" y="3259335"/>
+              <a:ext cx="610820" cy="622420"/>
+            </a:xfrm>
+            <a:prstGeom prst="line">
+              <a:avLst/>
+            </a:prstGeom>
+          </p:spPr>
+          <p:style>
+            <a:lnRef idx="1">
+              <a:schemeClr val="accent1"/>
+            </a:lnRef>
+            <a:fillRef idx="0">
+              <a:schemeClr val="accent1"/>
+            </a:fillRef>
+            <a:effectRef idx="0">
+              <a:schemeClr val="accent1"/>
+            </a:effectRef>
+            <a:fontRef idx="minor">
+              <a:schemeClr val="tx1"/>
+            </a:fontRef>
+          </p:style>
+        </p:cxnSp>
+      </p:grpSp>
+      <p:grpSp>
+        <p:nvGrpSpPr>
+          <p:cNvPr id="55" name="Group 54">
+            <a:extLst>
+              <a:ext uri="{FF2B5EF4-FFF2-40B4-BE49-F238E27FC236}">
+                <a16:creationId xmlns:a16="http://schemas.microsoft.com/office/drawing/2014/main" id="{538AAC67-5B47-4A87-B8BB-F9D7C266E290}"/>
+              </a:ext>
+            </a:extLst>
+          </p:cNvPr>
+          <p:cNvGrpSpPr/>
+          <p:nvPr/>
+        </p:nvGrpSpPr>
+        <p:grpSpPr>
+          <a:xfrm>
+            <a:off x="7839122" y="2512769"/>
+            <a:ext cx="2586945" cy="1352249"/>
+            <a:chOff x="8539280" y="3259335"/>
+            <a:chExt cx="1221640" cy="622420"/>
+          </a:xfrm>
+        </p:grpSpPr>
+        <p:cxnSp>
+          <p:nvCxnSpPr>
+            <p:cNvPr id="56" name="Straight Connector 55">
+              <a:extLst>
+                <a:ext uri="{FF2B5EF4-FFF2-40B4-BE49-F238E27FC236}">
+                  <a16:creationId xmlns:a16="http://schemas.microsoft.com/office/drawing/2014/main" id="{D2176C3B-2A95-4DA1-88C0-58AE46F204C3}"/>
+                </a:ext>
+              </a:extLst>
+            </p:cNvPr>
+            <p:cNvCxnSpPr/>
+            <p:nvPr/>
+          </p:nvCxnSpPr>
+          <p:spPr>
+            <a:xfrm flipV="1">
+              <a:off x="8539280" y="3259335"/>
+              <a:ext cx="610820" cy="622420"/>
+            </a:xfrm>
+            <a:prstGeom prst="line">
+              <a:avLst/>
+            </a:prstGeom>
+          </p:spPr>
+          <p:style>
+            <a:lnRef idx="1">
+              <a:schemeClr val="accent1"/>
+            </a:lnRef>
+            <a:fillRef idx="0">
+              <a:schemeClr val="accent1"/>
+            </a:fillRef>
+            <a:effectRef idx="0">
+              <a:schemeClr val="accent1"/>
+            </a:effectRef>
+            <a:fontRef idx="minor">
+              <a:schemeClr val="tx1"/>
+            </a:fontRef>
+          </p:style>
+        </p:cxnSp>
+        <p:cxnSp>
+          <p:nvCxnSpPr>
+            <p:cNvPr id="57" name="Straight Connector 56">
+              <a:extLst>
+                <a:ext uri="{FF2B5EF4-FFF2-40B4-BE49-F238E27FC236}">
+                  <a16:creationId xmlns:a16="http://schemas.microsoft.com/office/drawing/2014/main" id="{4C09D7FE-3E74-48BD-8FD9-50200B995E9E}"/>
+                </a:ext>
+              </a:extLst>
+            </p:cNvPr>
+            <p:cNvCxnSpPr>
+              <a:cxnSpLocks/>
+            </p:cNvCxnSpPr>
+            <p:nvPr/>
+          </p:nvCxnSpPr>
+          <p:spPr>
+            <a:xfrm flipH="1" flipV="1">
+              <a:off x="9150100" y="3259335"/>
+              <a:ext cx="610820" cy="622420"/>
+            </a:xfrm>
+            <a:prstGeom prst="line">
+              <a:avLst/>
+            </a:prstGeom>
+          </p:spPr>
+          <p:style>
+            <a:lnRef idx="1">
+              <a:schemeClr val="accent1"/>
+            </a:lnRef>
+            <a:fillRef idx="0">
+              <a:schemeClr val="accent1"/>
+            </a:fillRef>
+            <a:effectRef idx="0">
+              <a:schemeClr val="accent1"/>
+            </a:effectRef>
+            <a:fontRef idx="minor">
+              <a:schemeClr val="tx1"/>
+            </a:fontRef>
+          </p:style>
+        </p:cxnSp>
+      </p:grpSp>
+      <p:sp>
+        <p:nvSpPr>
+          <p:cNvPr id="33" name="TextBox 32">
+            <a:extLst>
+              <a:ext uri="{FF2B5EF4-FFF2-40B4-BE49-F238E27FC236}">
+                <a16:creationId xmlns:a16="http://schemas.microsoft.com/office/drawing/2014/main" id="{D618F277-4F7D-4111-BD0E-074E6753928C}"/>
+              </a:ext>
+            </a:extLst>
+          </p:cNvPr>
+          <p:cNvSpPr txBox="1"/>
+          <p:nvPr/>
+        </p:nvSpPr>
+        <p:spPr>
+          <a:xfrm>
+            <a:off x="7367238" y="3978862"/>
+            <a:ext cx="958404" cy="369332"/>
+          </a:xfrm>
+          <a:prstGeom prst="rect">
+            <a:avLst/>
+          </a:prstGeom>
+          <a:noFill/>
+        </p:spPr>
+        <p:txBody>
+          <a:bodyPr wrap="none" rtlCol="0">
+            <a:spAutoFit/>
+          </a:bodyPr>
+          <a:lstStyle/>
+          <a:p>
+            <a:r>
+              <a:rPr lang="en-US"/>
+              <a:t>Contig 1</a:t>
+            </a:r>
+          </a:p>
+        </p:txBody>
+      </p:sp>
+      <p:sp>
+        <p:nvSpPr>
+          <p:cNvPr id="59" name="TextBox 58">
+            <a:extLst>
+              <a:ext uri="{FF2B5EF4-FFF2-40B4-BE49-F238E27FC236}">
+                <a16:creationId xmlns:a16="http://schemas.microsoft.com/office/drawing/2014/main" id="{3B808572-E4AF-4C33-B308-A116F2489D83}"/>
+              </a:ext>
+            </a:extLst>
+          </p:cNvPr>
+          <p:cNvSpPr txBox="1"/>
+          <p:nvPr/>
+        </p:nvSpPr>
+        <p:spPr>
+          <a:xfrm>
+            <a:off x="9931037" y="3975898"/>
+            <a:ext cx="958404" cy="369332"/>
+          </a:xfrm>
+          <a:prstGeom prst="rect">
+            <a:avLst/>
+          </a:prstGeom>
+          <a:noFill/>
+        </p:spPr>
+        <p:txBody>
+          <a:bodyPr wrap="none" rtlCol="0">
+            <a:spAutoFit/>
+          </a:bodyPr>
+          <a:lstStyle/>
+          <a:p>
+            <a:r>
+              <a:rPr lang="en-US"/>
+              <a:t>Contig 2</a:t>
+            </a:r>
+          </a:p>
+        </p:txBody>
+      </p:sp>
+      <p:sp>
+        <p:nvSpPr>
+          <p:cNvPr id="60" name="TextBox 59">
+            <a:extLst>
+              <a:ext uri="{FF2B5EF4-FFF2-40B4-BE49-F238E27FC236}">
+                <a16:creationId xmlns:a16="http://schemas.microsoft.com/office/drawing/2014/main" id="{722E3CA7-5718-4242-93F6-EE75E77E1B80}"/>
+              </a:ext>
+            </a:extLst>
+          </p:cNvPr>
+          <p:cNvSpPr txBox="1"/>
+          <p:nvPr/>
+        </p:nvSpPr>
+        <p:spPr>
+          <a:xfrm>
+            <a:off x="7111317" y="4660300"/>
+            <a:ext cx="4429805" cy="830997"/>
+          </a:xfrm>
+          <a:prstGeom prst="rect">
+            <a:avLst/>
+          </a:prstGeom>
+          <a:noFill/>
+        </p:spPr>
+        <p:txBody>
+          <a:bodyPr wrap="square" rtlCol="0">
+            <a:spAutoFit/>
+          </a:bodyPr>
+          <a:lstStyle/>
+          <a:p>
+            <a:r>
+              <a:rPr lang="en-US" sz="2400"/>
+              <a:t>Many contacts (links) == nearby</a:t>
+            </a:r>
+          </a:p>
+          <a:p>
+            <a:r>
+              <a:rPr lang="en-US" sz="2400"/>
+              <a:t>Few contacts (links) == far away</a:t>
+            </a:r>
+          </a:p>
+        </p:txBody>
+      </p:sp>
+    </p:spTree>
+    <p:extLst>
+      <p:ext uri="{BB962C8B-B14F-4D97-AF65-F5344CB8AC3E}">
+        <p14:creationId xmlns:p14="http://schemas.microsoft.com/office/powerpoint/2010/main" val="569996796"/>
+      </p:ext>
+    </p:extLst>
+  </p:cSld>
+  <p:clrMapOvr>
+    <a:masterClrMapping/>
+  </p:clrMapOvr>
+  <p:timing>
+    <p:tnLst>
+      <p:par>
+        <p:cTn id="1" dur="indefinite" restart="never" nodeType="tmRoot">
+          <p:childTnLst>
+            <p:seq concurrent="1" nextAc="seek">
+              <p:cTn id="2" dur="indefinite" nodeType="mainSeq">
+                <p:childTnLst>
+                  <p:par>
+                    <p:cTn id="3" fill="hold">
+                      <p:stCondLst>
+                        <p:cond delay="indefinite"/>
+                      </p:stCondLst>
+                      <p:childTnLst>
+                        <p:par>
+                          <p:cTn id="4" fill="hold">
+                            <p:stCondLst>
+                              <p:cond delay="0"/>
+                            </p:stCondLst>
+                            <p:childTnLst>
+                              <p:par>
+                                <p:cTn id="5" presetID="1" presetClass="entr" presetSubtype="0" fill="hold" nodeType="clickEffect">
+                                  <p:stCondLst>
+                                    <p:cond delay="0"/>
+                                  </p:stCondLst>
+                                  <p:childTnLst>
+                                    <p:set>
+                                      <p:cBhvr>
+                                        <p:cTn id="6" dur="1" fill="hold">
+                                          <p:stCondLst>
+                                            <p:cond delay="0"/>
+                                          </p:stCondLst>
+                                        </p:cTn>
+                                        <p:tgtEl>
+                                          <p:spTgt spid="11"/>
+                                        </p:tgtEl>
+                                        <p:attrNameLst>
+                                          <p:attrName>style.visibility</p:attrName>
+                                        </p:attrNameLst>
+                                      </p:cBhvr>
+                                      <p:to>
+                                        <p:strVal val="visible"/>
+                                      </p:to>
+                                    </p:set>
+                                  </p:childTnLst>
+                                </p:cTn>
+                              </p:par>
+                              <p:par>
+                                <p:cTn id="7" presetID="1" presetClass="entr" presetSubtype="0" fill="hold" nodeType="withEffect">
+                                  <p:stCondLst>
+                                    <p:cond delay="0"/>
+                                  </p:stCondLst>
+                                  <p:childTnLst>
+                                    <p:set>
+                                      <p:cBhvr>
+                                        <p:cTn id="8" dur="1" fill="hold">
+                                          <p:stCondLst>
+                                            <p:cond delay="0"/>
+                                          </p:stCondLst>
+                                        </p:cTn>
+                                        <p:tgtEl>
+                                          <p:spTgt spid="18"/>
+                                        </p:tgtEl>
+                                        <p:attrNameLst>
+                                          <p:attrName>style.visibility</p:attrName>
+                                        </p:attrNameLst>
+                                      </p:cBhvr>
+                                      <p:to>
+                                        <p:strVal val="visible"/>
+                                      </p:to>
+                                    </p:set>
+                                  </p:childTnLst>
+                                </p:cTn>
+                              </p:par>
+                              <p:par>
+                                <p:cTn id="9" presetID="1" presetClass="entr" presetSubtype="0" fill="hold" nodeType="withEffect">
+                                  <p:stCondLst>
+                                    <p:cond delay="0"/>
+                                  </p:stCondLst>
+                                  <p:childTnLst>
+                                    <p:set>
+                                      <p:cBhvr>
+                                        <p:cTn id="10" dur="1" fill="hold">
+                                          <p:stCondLst>
+                                            <p:cond delay="0"/>
+                                          </p:stCondLst>
+                                        </p:cTn>
+                                        <p:tgtEl>
+                                          <p:spTgt spid="32"/>
+                                        </p:tgtEl>
+                                        <p:attrNameLst>
+                                          <p:attrName>style.visibility</p:attrName>
+                                        </p:attrNameLst>
+                                      </p:cBhvr>
+                                      <p:to>
+                                        <p:strVal val="visible"/>
+                                      </p:to>
+                                    </p:set>
+                                  </p:childTnLst>
+                                </p:cTn>
+                              </p:par>
+                              <p:par>
+                                <p:cTn id="11" presetID="1" presetClass="entr" presetSubtype="0" fill="hold" nodeType="withEffect">
+                                  <p:stCondLst>
+                                    <p:cond delay="0"/>
+                                  </p:stCondLst>
+                                  <p:childTnLst>
+                                    <p:set>
+                                      <p:cBhvr>
+                                        <p:cTn id="12" dur="1" fill="hold">
+                                          <p:stCondLst>
+                                            <p:cond delay="0"/>
+                                          </p:stCondLst>
+                                        </p:cTn>
+                                        <p:tgtEl>
+                                          <p:spTgt spid="34"/>
+                                        </p:tgtEl>
+                                        <p:attrNameLst>
+                                          <p:attrName>style.visibility</p:attrName>
+                                        </p:attrNameLst>
+                                      </p:cBhvr>
+                                      <p:to>
+                                        <p:strVal val="visible"/>
+                                      </p:to>
+                                    </p:set>
+                                  </p:childTnLst>
+                                </p:cTn>
+                              </p:par>
+                              <p:par>
+                                <p:cTn id="13" presetID="1" presetClass="entr" presetSubtype="0" fill="hold" nodeType="withEffect">
+                                  <p:stCondLst>
+                                    <p:cond delay="0"/>
+                                  </p:stCondLst>
+                                  <p:childTnLst>
+                                    <p:set>
+                                      <p:cBhvr>
+                                        <p:cTn id="14" dur="1" fill="hold">
+                                          <p:stCondLst>
+                                            <p:cond delay="0"/>
+                                          </p:stCondLst>
+                                        </p:cTn>
+                                        <p:tgtEl>
+                                          <p:spTgt spid="37"/>
+                                        </p:tgtEl>
+                                        <p:attrNameLst>
+                                          <p:attrName>style.visibility</p:attrName>
+                                        </p:attrNameLst>
+                                      </p:cBhvr>
+                                      <p:to>
+                                        <p:strVal val="visible"/>
+                                      </p:to>
+                                    </p:set>
+                                  </p:childTnLst>
+                                </p:cTn>
+                              </p:par>
+                              <p:par>
+                                <p:cTn id="15" presetID="1" presetClass="entr" presetSubtype="0" fill="hold" nodeType="withEffect">
+                                  <p:stCondLst>
+                                    <p:cond delay="0"/>
+                                  </p:stCondLst>
+                                  <p:childTnLst>
+                                    <p:set>
+                                      <p:cBhvr>
+                                        <p:cTn id="16" dur="1" fill="hold">
+                                          <p:stCondLst>
+                                            <p:cond delay="0"/>
+                                          </p:stCondLst>
+                                        </p:cTn>
+                                        <p:tgtEl>
+                                          <p:spTgt spid="40"/>
+                                        </p:tgtEl>
+                                        <p:attrNameLst>
+                                          <p:attrName>style.visibility</p:attrName>
+                                        </p:attrNameLst>
+                                      </p:cBhvr>
+                                      <p:to>
+                                        <p:strVal val="visible"/>
+                                      </p:to>
+                                    </p:set>
+                                  </p:childTnLst>
+                                </p:cTn>
+                              </p:par>
+                              <p:par>
+                                <p:cTn id="17" presetID="1" presetClass="entr" presetSubtype="0" fill="hold" nodeType="withEffect">
+                                  <p:stCondLst>
+                                    <p:cond delay="0"/>
+                                  </p:stCondLst>
+                                  <p:childTnLst>
+                                    <p:set>
+                                      <p:cBhvr>
+                                        <p:cTn id="18" dur="1" fill="hold">
+                                          <p:stCondLst>
+                                            <p:cond delay="0"/>
+                                          </p:stCondLst>
+                                        </p:cTn>
+                                        <p:tgtEl>
+                                          <p:spTgt spid="43"/>
+                                        </p:tgtEl>
+                                        <p:attrNameLst>
+                                          <p:attrName>style.visibility</p:attrName>
+                                        </p:attrNameLst>
+                                      </p:cBhvr>
+                                      <p:to>
+                                        <p:strVal val="visible"/>
+                                      </p:to>
+                                    </p:set>
+                                  </p:childTnLst>
+                                </p:cTn>
+                              </p:par>
+                              <p:par>
+                                <p:cTn id="19" presetID="1" presetClass="entr" presetSubtype="0" fill="hold" nodeType="withEffect">
+                                  <p:stCondLst>
+                                    <p:cond delay="0"/>
+                                  </p:stCondLst>
+                                  <p:childTnLst>
+                                    <p:set>
+                                      <p:cBhvr>
+                                        <p:cTn id="20" dur="1" fill="hold">
+                                          <p:stCondLst>
+                                            <p:cond delay="0"/>
+                                          </p:stCondLst>
+                                        </p:cTn>
+                                        <p:tgtEl>
+                                          <p:spTgt spid="46"/>
+                                        </p:tgtEl>
+                                        <p:attrNameLst>
+                                          <p:attrName>style.visibility</p:attrName>
+                                        </p:attrNameLst>
+                                      </p:cBhvr>
+                                      <p:to>
+                                        <p:strVal val="visible"/>
+                                      </p:to>
+                                    </p:set>
+                                  </p:childTnLst>
+                                </p:cTn>
+                              </p:par>
+                              <p:par>
+                                <p:cTn id="21" presetID="1" presetClass="entr" presetSubtype="0" fill="hold" nodeType="withEffect">
+                                  <p:stCondLst>
+                                    <p:cond delay="0"/>
+                                  </p:stCondLst>
+                                  <p:childTnLst>
+                                    <p:set>
+                                      <p:cBhvr>
+                                        <p:cTn id="22" dur="1" fill="hold">
+                                          <p:stCondLst>
+                                            <p:cond delay="0"/>
+                                          </p:stCondLst>
+                                        </p:cTn>
+                                        <p:tgtEl>
+                                          <p:spTgt spid="49"/>
+                                        </p:tgtEl>
+                                        <p:attrNameLst>
+                                          <p:attrName>style.visibility</p:attrName>
+                                        </p:attrNameLst>
+                                      </p:cBhvr>
+                                      <p:to>
+                                        <p:strVal val="visible"/>
+                                      </p:to>
+                                    </p:set>
+                                  </p:childTnLst>
+                                </p:cTn>
+                              </p:par>
+                              <p:par>
+                                <p:cTn id="23" presetID="1" presetClass="entr" presetSubtype="0" fill="hold" nodeType="withEffect">
+                                  <p:stCondLst>
+                                    <p:cond delay="0"/>
+                                  </p:stCondLst>
+                                  <p:childTnLst>
+                                    <p:set>
+                                      <p:cBhvr>
+                                        <p:cTn id="24" dur="1" fill="hold">
+                                          <p:stCondLst>
+                                            <p:cond delay="0"/>
+                                          </p:stCondLst>
+                                        </p:cTn>
+                                        <p:tgtEl>
+                                          <p:spTgt spid="52"/>
+                                        </p:tgtEl>
+                                        <p:attrNameLst>
+                                          <p:attrName>style.visibility</p:attrName>
+                                        </p:attrNameLst>
+                                      </p:cBhvr>
+                                      <p:to>
+                                        <p:strVal val="visible"/>
+                                      </p:to>
+                                    </p:set>
+                                  </p:childTnLst>
+                                </p:cTn>
+                              </p:par>
+                              <p:par>
+                                <p:cTn id="25" presetID="1" presetClass="entr" presetSubtype="0" fill="hold" nodeType="withEffect">
+                                  <p:stCondLst>
+                                    <p:cond delay="0"/>
+                                  </p:stCondLst>
+                                  <p:childTnLst>
+                                    <p:set>
+                                      <p:cBhvr>
+                                        <p:cTn id="26" dur="1" fill="hold">
+                                          <p:stCondLst>
+                                            <p:cond delay="0"/>
+                                          </p:stCondLst>
+                                        </p:cTn>
+                                        <p:tgtEl>
+                                          <p:spTgt spid="55"/>
+                                        </p:tgtEl>
+                                        <p:attrNameLst>
+                                          <p:attrName>style.visibility</p:attrName>
+                                        </p:attrNameLst>
+                                      </p:cBhvr>
+                                      <p:to>
+                                        <p:strVal val="visible"/>
+                                      </p:to>
+                                    </p:set>
+                                  </p:childTnLst>
+                                </p:cTn>
+                              </p:par>
+                              <p:par>
+                                <p:cTn id="27" presetID="1" presetClass="entr" presetSubtype="0" fill="hold" grpId="0" nodeType="withEffect">
+                                  <p:stCondLst>
+                                    <p:cond delay="0"/>
+                                  </p:stCondLst>
+                                  <p:childTnLst>
+                                    <p:set>
+                                      <p:cBhvr>
+                                        <p:cTn id="28" dur="1" fill="hold">
+                                          <p:stCondLst>
+                                            <p:cond delay="0"/>
+                                          </p:stCondLst>
+                                        </p:cTn>
+                                        <p:tgtEl>
+                                          <p:spTgt spid="33"/>
+                                        </p:tgtEl>
+                                        <p:attrNameLst>
+                                          <p:attrName>style.visibility</p:attrName>
+                                        </p:attrNameLst>
+                                      </p:cBhvr>
+                                      <p:to>
+                                        <p:strVal val="visible"/>
+                                      </p:to>
+                                    </p:set>
+                                  </p:childTnLst>
+                                </p:cTn>
+                              </p:par>
+                              <p:par>
+                                <p:cTn id="29" presetID="1" presetClass="entr" presetSubtype="0" fill="hold" grpId="0" nodeType="withEffect">
+                                  <p:stCondLst>
+                                    <p:cond delay="0"/>
+                                  </p:stCondLst>
+                                  <p:childTnLst>
+                                    <p:set>
+                                      <p:cBhvr>
+                                        <p:cTn id="30" dur="1" fill="hold">
+                                          <p:stCondLst>
+                                            <p:cond delay="0"/>
+                                          </p:stCondLst>
+                                        </p:cTn>
+                                        <p:tgtEl>
+                                          <p:spTgt spid="59"/>
+                                        </p:tgtEl>
+                                        <p:attrNameLst>
+                                          <p:attrName>style.visibility</p:attrName>
+                                        </p:attrNameLst>
+                                      </p:cBhvr>
+                                      <p:to>
+                                        <p:strVal val="visible"/>
+                                      </p:to>
+                                    </p:set>
+                                  </p:childTnLst>
+                                </p:cTn>
+                              </p:par>
+                              <p:par>
+                                <p:cTn id="31" presetID="1" presetClass="entr" presetSubtype="0" fill="hold" grpId="0" nodeType="withEffect">
+                                  <p:stCondLst>
+                                    <p:cond delay="0"/>
+                                  </p:stCondLst>
+                                  <p:childTnLst>
+                                    <p:set>
+                                      <p:cBhvr>
+                                        <p:cTn id="32" dur="1" fill="hold">
+                                          <p:stCondLst>
+                                            <p:cond delay="0"/>
+                                          </p:stCondLst>
+                                        </p:cTn>
+                                        <p:tgtEl>
+                                          <p:spTgt spid="60"/>
+                                        </p:tgtEl>
+                                        <p:attrNameLst>
+                                          <p:attrName>style.visibility</p:attrName>
+                                        </p:attrNameLst>
+                                      </p:cBhvr>
+                                      <p:to>
+                                        <p:strVal val="visible"/>
+                                      </p:to>
+                                    </p:set>
+                                  </p:childTnLst>
+                                </p:cTn>
+                              </p:par>
+                            </p:childTnLst>
+                          </p:cTn>
+                        </p:par>
+                      </p:childTnLst>
+                    </p:cTn>
+                  </p:par>
+                </p:childTnLst>
+              </p:cTn>
+              <p:prevCondLst>
+                <p:cond evt="onPrev" delay="0">
+                  <p:tgtEl>
+                    <p:sldTgt/>
+                  </p:tgtEl>
+                </p:cond>
+              </p:prevCondLst>
+              <p:nextCondLst>
+                <p:cond evt="onNext" delay="0">
+                  <p:tgtEl>
+                    <p:sldTgt/>
+                  </p:tgtEl>
+                </p:cond>
+              </p:nextCondLst>
+            </p:seq>
+          </p:childTnLst>
+        </p:cTn>
+      </p:par>
+    </p:tnLst>
+    <p:bldLst>
+      <p:bldP spid="33" grpId="0"/>
+      <p:bldP spid="59" grpId="0"/>
+      <p:bldP spid="60" grpId="0"/>
+    </p:bldLst>
+  </p:timing>
+</p:sld>
+</file>
+
+<file path=ppt/slides/slide12.xml><?xml version="1.0" encoding="utf-8"?>
+<p:sld xmlns:a="http://schemas.openxmlformats.org/drawingml/2006/main" xmlns:r="http://schemas.openxmlformats.org/officeDocument/2006/relationships" xmlns:p="http://schemas.openxmlformats.org/presentationml/2006/main">
+  <p:cSld>
+    <p:spTree>
+      <p:nvGrpSpPr>
+        <p:cNvPr id="1" name=""/>
+        <p:cNvGrpSpPr/>
+        <p:nvPr/>
+      </p:nvGrpSpPr>
+      <p:grpSpPr>
+        <a:xfrm>
+          <a:off x="0" y="0"/>
+          <a:ext cx="0" cy="0"/>
+          <a:chOff x="0" y="0"/>
+          <a:chExt cx="0" cy="0"/>
+        </a:xfrm>
+      </p:grpSpPr>
+      <p:sp>
+        <p:nvSpPr>
+          <p:cNvPr id="2" name="Title 1">
+            <a:extLst>
+              <a:ext uri="{FF2B5EF4-FFF2-40B4-BE49-F238E27FC236}">
+                <a16:creationId xmlns:a16="http://schemas.microsoft.com/office/drawing/2014/main" id="{99DC87A7-C029-1172-5C76-CD41D17DB1A3}"/>
+              </a:ext>
+            </a:extLst>
+          </p:cNvPr>
+          <p:cNvSpPr>
+            <a:spLocks noGrp="1"/>
+          </p:cNvSpPr>
+          <p:nvPr>
+            <p:ph type="title"/>
+          </p:nvPr>
+        </p:nvSpPr>
+        <p:spPr/>
+        <p:txBody>
+          <a:bodyPr>
+            <a:normAutofit fontScale="90000"/>
+          </a:bodyPr>
+          <a:lstStyle/>
+          <a:p>
+            <a:r>
+              <a:rPr lang="en-US" dirty="0" err="1"/>
+              <a:t>YaHS</a:t>
+            </a:r>
+            <a:r>
+              <a:rPr lang="en-US" dirty="0"/>
+              <a:t> scaffolder</a:t>
+            </a:r>
+          </a:p>
+        </p:txBody>
+      </p:sp>
+      <p:sp>
+        <p:nvSpPr>
+          <p:cNvPr id="3" name="Content Placeholder 2">
+            <a:extLst>
+              <a:ext uri="{FF2B5EF4-FFF2-40B4-BE49-F238E27FC236}">
+                <a16:creationId xmlns:a16="http://schemas.microsoft.com/office/drawing/2014/main" id="{910B9ACE-743E-0243-9B57-36834C2241F0}"/>
+              </a:ext>
+            </a:extLst>
+          </p:cNvPr>
+          <p:cNvSpPr>
+            <a:spLocks noGrp="1"/>
+          </p:cNvSpPr>
+          <p:nvPr>
+            <p:ph idx="1"/>
+          </p:nvPr>
+        </p:nvSpPr>
+        <p:spPr>
+          <a:xfrm>
+            <a:off x="598620" y="1596540"/>
+            <a:ext cx="5497380" cy="3918803"/>
+          </a:xfrm>
+        </p:spPr>
+        <p:txBody>
+          <a:bodyPr/>
+          <a:lstStyle/>
+          <a:p>
+            <a:r>
+              <a:rPr lang="en-US" dirty="0" err="1"/>
+              <a:t>YaHS</a:t>
+            </a:r>
+            <a:r>
+              <a:rPr lang="en-US" dirty="0"/>
+              <a:t> (Yet another </a:t>
+            </a:r>
+            <a:r>
+              <a:rPr lang="en-US" dirty="0" err="1"/>
+              <a:t>HiC</a:t>
+            </a:r>
+            <a:r>
+              <a:rPr lang="en-US" dirty="0"/>
+              <a:t> Scaffolder)</a:t>
+            </a:r>
+          </a:p>
+          <a:p>
+            <a:pPr lvl="1"/>
+            <a:r>
+              <a:rPr lang="en-US" dirty="0"/>
+              <a:t>Very lightweight and easy to use</a:t>
+            </a:r>
+          </a:p>
+          <a:p>
+            <a:pPr lvl="1"/>
+            <a:r>
+              <a:rPr lang="en-US" dirty="0"/>
+              <a:t>Input aligned </a:t>
+            </a:r>
+            <a:r>
+              <a:rPr lang="en-US" dirty="0" err="1"/>
+              <a:t>HiC</a:t>
+            </a:r>
+            <a:r>
+              <a:rPr lang="en-US" dirty="0"/>
+              <a:t> reads (bam) and assembly</a:t>
+            </a:r>
+          </a:p>
+        </p:txBody>
+      </p:sp>
+      <p:sp>
+        <p:nvSpPr>
+          <p:cNvPr id="4" name="Slide Number Placeholder 3">
+            <a:extLst>
+              <a:ext uri="{FF2B5EF4-FFF2-40B4-BE49-F238E27FC236}">
+                <a16:creationId xmlns:a16="http://schemas.microsoft.com/office/drawing/2014/main" id="{8ECA8A52-957B-4F7F-0FE8-6BFE0E27D18B}"/>
+              </a:ext>
+            </a:extLst>
+          </p:cNvPr>
+          <p:cNvSpPr>
+            <a:spLocks noGrp="1"/>
+          </p:cNvSpPr>
+          <p:nvPr>
+            <p:ph type="sldNum" sz="quarter" idx="12"/>
+          </p:nvPr>
+        </p:nvSpPr>
+        <p:spPr/>
+        <p:txBody>
+          <a:bodyPr/>
+          <a:lstStyle/>
+          <a:p>
+            <a:fld id="{B82CCC60-E8CD-4174-8B1A-7DF615B22EEF}" type="slidenum">
+              <a:rPr lang="en-US" smtClean="0"/>
+              <a:pPr/>
+              <a:t>12</a:t>
+            </a:fld>
+            <a:endParaRPr lang="en-US"/>
+          </a:p>
+        </p:txBody>
+      </p:sp>
+      <p:pic>
+        <p:nvPicPr>
+          <p:cNvPr id="6" name="Picture 5">
+            <a:extLst>
+              <a:ext uri="{FF2B5EF4-FFF2-40B4-BE49-F238E27FC236}">
+                <a16:creationId xmlns:a16="http://schemas.microsoft.com/office/drawing/2014/main" id="{0BE6D16F-89AB-9D23-98EC-E79E43114289}"/>
+              </a:ext>
+            </a:extLst>
+          </p:cNvPr>
+          <p:cNvPicPr>
+            <a:picLocks noChangeAspect="1"/>
+          </p:cNvPicPr>
+          <p:nvPr/>
+        </p:nvPicPr>
+        <p:blipFill>
+          <a:blip r:embed="rId2"/>
+          <a:stretch>
+            <a:fillRect/>
+          </a:stretch>
+        </p:blipFill>
+        <p:spPr>
+          <a:xfrm>
+            <a:off x="6327438" y="1508723"/>
+            <a:ext cx="5678526" cy="2076141"/>
+          </a:xfrm>
+          <a:prstGeom prst="rect">
+            <a:avLst/>
+          </a:prstGeom>
+        </p:spPr>
+      </p:pic>
+    </p:spTree>
+    <p:extLst>
+      <p:ext uri="{BB962C8B-B14F-4D97-AF65-F5344CB8AC3E}">
+        <p14:creationId xmlns:p14="http://schemas.microsoft.com/office/powerpoint/2010/main" val="4159841555"/>
+      </p:ext>
+    </p:extLst>
+  </p:cSld>
+  <p:clrMapOvr>
+    <a:masterClrMapping/>
+  </p:clrMapOvr>
+</p:sld>
+</file>
+
+<file path=ppt/slides/slide13.xml><?xml version="1.0" encoding="utf-8"?>
+<p:sld xmlns:a="http://schemas.openxmlformats.org/drawingml/2006/main" xmlns:r="http://schemas.openxmlformats.org/officeDocument/2006/relationships" xmlns:p="http://schemas.openxmlformats.org/presentationml/2006/main">
+  <p:cSld>
+    <p:spTree>
+      <p:nvGrpSpPr>
+        <p:cNvPr id="1" name=""/>
+        <p:cNvGrpSpPr/>
+        <p:nvPr/>
+      </p:nvGrpSpPr>
+      <p:grpSpPr>
+        <a:xfrm>
+          <a:off x="0" y="0"/>
+          <a:ext cx="0" cy="0"/>
+          <a:chOff x="0" y="0"/>
+          <a:chExt cx="0" cy="0"/>
+        </a:xfrm>
+      </p:grpSpPr>
+      <p:sp>
+        <p:nvSpPr>
+          <p:cNvPr id="2" name="Title 1">
+            <a:extLst>
+              <a:ext uri="{FF2B5EF4-FFF2-40B4-BE49-F238E27FC236}">
+                <a16:creationId xmlns:a16="http://schemas.microsoft.com/office/drawing/2014/main" id="{B265423D-4484-3F65-D8B5-8EE04CFFCBC8}"/>
+              </a:ext>
+            </a:extLst>
+          </p:cNvPr>
+          <p:cNvSpPr>
+            <a:spLocks noGrp="1"/>
+          </p:cNvSpPr>
+          <p:nvPr>
+            <p:ph type="title"/>
+          </p:nvPr>
+        </p:nvSpPr>
+        <p:spPr/>
+        <p:txBody>
+          <a:bodyPr>
+            <a:normAutofit fontScale="90000"/>
+          </a:bodyPr>
+          <a:lstStyle/>
+          <a:p>
+            <a:r>
+              <a:rPr lang="en-US" dirty="0"/>
+              <a:t>Errors in genome assemblies</a:t>
+            </a:r>
+          </a:p>
+        </p:txBody>
+      </p:sp>
+      <p:sp>
+        <p:nvSpPr>
+          <p:cNvPr id="3" name="Content Placeholder 2">
+            <a:extLst>
+              <a:ext uri="{FF2B5EF4-FFF2-40B4-BE49-F238E27FC236}">
+                <a16:creationId xmlns:a16="http://schemas.microsoft.com/office/drawing/2014/main" id="{88ADD349-F89E-FD69-9964-FBA923DD6475}"/>
+              </a:ext>
+            </a:extLst>
+          </p:cNvPr>
+          <p:cNvSpPr>
+            <a:spLocks noGrp="1"/>
+          </p:cNvSpPr>
+          <p:nvPr>
+            <p:ph idx="1"/>
+          </p:nvPr>
+        </p:nvSpPr>
+        <p:spPr/>
+        <p:txBody>
+          <a:bodyPr>
+            <a:normAutofit fontScale="92500" lnSpcReduction="20000"/>
+          </a:bodyPr>
+          <a:lstStyle/>
+          <a:p>
+            <a:r>
+              <a:rPr lang="en-US" dirty="0"/>
+              <a:t>Repeats in the genome and errors in the reads cause errors</a:t>
+            </a:r>
+          </a:p>
+          <a:p>
+            <a:endParaRPr lang="en-US" dirty="0"/>
+          </a:p>
+          <a:p>
+            <a:r>
+              <a:rPr lang="en-US" dirty="0"/>
+              <a:t>Large scale structural errors:</a:t>
+            </a:r>
+          </a:p>
+          <a:p>
+            <a:pPr lvl="1"/>
+            <a:r>
+              <a:rPr lang="en-US" dirty="0"/>
+              <a:t>Chimeric contigs, contain two sequences erroneously merged</a:t>
+            </a:r>
+          </a:p>
+          <a:p>
+            <a:pPr lvl="1"/>
+            <a:r>
+              <a:rPr lang="en-US" dirty="0"/>
+              <a:t>Insertions or deletions (e.g. wrong number of repeat copies)</a:t>
+            </a:r>
+          </a:p>
+          <a:p>
+            <a:endParaRPr lang="en-US" dirty="0"/>
+          </a:p>
+          <a:p>
+            <a:r>
+              <a:rPr lang="en-US" dirty="0"/>
+              <a:t>Small scale errors</a:t>
+            </a:r>
+          </a:p>
+          <a:p>
+            <a:pPr lvl="1"/>
+            <a:r>
+              <a:rPr lang="en-US" dirty="0"/>
+              <a:t>Insertions or deletions of up to 5-10 bases</a:t>
+            </a:r>
+          </a:p>
+          <a:p>
+            <a:pPr lvl="1"/>
+            <a:r>
+              <a:rPr lang="en-US" dirty="0"/>
+              <a:t>Substitutions</a:t>
+            </a:r>
+          </a:p>
+        </p:txBody>
+      </p:sp>
+      <p:sp>
+        <p:nvSpPr>
+          <p:cNvPr id="4" name="Slide Number Placeholder 3">
+            <a:extLst>
+              <a:ext uri="{FF2B5EF4-FFF2-40B4-BE49-F238E27FC236}">
+                <a16:creationId xmlns:a16="http://schemas.microsoft.com/office/drawing/2014/main" id="{9BF51E34-9EF2-88F9-3254-27793F61BB9C}"/>
+              </a:ext>
+            </a:extLst>
+          </p:cNvPr>
+          <p:cNvSpPr>
+            <a:spLocks noGrp="1"/>
+          </p:cNvSpPr>
+          <p:nvPr>
+            <p:ph type="sldNum" sz="quarter" idx="12"/>
+          </p:nvPr>
+        </p:nvSpPr>
+        <p:spPr/>
+        <p:txBody>
+          <a:bodyPr/>
+          <a:lstStyle/>
+          <a:p>
+            <a:fld id="{B82CCC60-E8CD-4174-8B1A-7DF615B22EEF}" type="slidenum">
+              <a:rPr lang="en-US" smtClean="0"/>
+              <a:pPr/>
+              <a:t>13</a:t>
+            </a:fld>
+            <a:endParaRPr lang="en-US"/>
+          </a:p>
+        </p:txBody>
+      </p:sp>
+    </p:spTree>
+    <p:extLst>
+      <p:ext uri="{BB962C8B-B14F-4D97-AF65-F5344CB8AC3E}">
+        <p14:creationId xmlns:p14="http://schemas.microsoft.com/office/powerpoint/2010/main" val="3801788517"/>
+      </p:ext>
+    </p:extLst>
+  </p:cSld>
+  <p:clrMapOvr>
+    <a:masterClrMapping/>
+  </p:clrMapOvr>
+</p:sld>
+</file>
+
+<file path=ppt/slides/slide14.xml><?xml version="1.0" encoding="utf-8"?>
+<p:sld xmlns:a="http://schemas.openxmlformats.org/drawingml/2006/main" xmlns:r="http://schemas.openxmlformats.org/officeDocument/2006/relationships" xmlns:p="http://schemas.openxmlformats.org/presentationml/2006/main">
+  <p:cSld>
+    <p:spTree>
+      <p:nvGrpSpPr>
         <p:cNvPr id="1" name="">
           <a:extLst>
             <a:ext uri="{FF2B5EF4-FFF2-40B4-BE49-F238E27FC236}">
@@ -5351,7 +10904,7 @@
             <a:fld id="{B82CCC60-E8CD-4174-8B1A-7DF615B22EEF}" type="slidenum">
               <a:rPr lang="en-US" smtClean="0"/>
               <a:pPr/>
-              <a:t>10</a:t>
+              <a:t>14</a:t>
             </a:fld>
             <a:endParaRPr lang="en-US"/>
           </a:p>
@@ -5511,7 +11064,7 @@
 </p:sld>
 </file>
 
-<file path=ppt/slides/slide11.xml><?xml version="1.0" encoding="utf-8"?>
+<file path=ppt/slides/slide15.xml><?xml version="1.0" encoding="utf-8"?>
 <p:sld xmlns:a="http://schemas.openxmlformats.org/drawingml/2006/main" xmlns:r="http://schemas.openxmlformats.org/officeDocument/2006/relationships" xmlns:p="http://schemas.openxmlformats.org/presentationml/2006/main">
   <p:cSld>
     <p:spTree>
@@ -5631,7 +11184,7 @@
             <a:fld id="{B82CCC60-E8CD-4174-8B1A-7DF615B22EEF}" type="slidenum">
               <a:rPr lang="en-US" smtClean="0"/>
               <a:pPr/>
-              <a:t>11</a:t>
+              <a:t>15</a:t>
             </a:fld>
             <a:endParaRPr lang="en-US"/>
           </a:p>
@@ -6300,7 +11853,7 @@
 </p:sld>
 </file>
 
-<file path=ppt/slides/slide12.xml><?xml version="1.0" encoding="utf-8"?>
+<file path=ppt/slides/slide16.xml><?xml version="1.0" encoding="utf-8"?>
 <p:sld xmlns:a="http://schemas.openxmlformats.org/drawingml/2006/main" xmlns:r="http://schemas.openxmlformats.org/officeDocument/2006/relationships" xmlns:p="http://schemas.openxmlformats.org/presentationml/2006/main">
   <p:cSld>
     <p:spTree>
@@ -6664,7 +12217,7 @@
             <a:fld id="{B82CCC60-E8CD-4174-8B1A-7DF615B22EEF}" type="slidenum">
               <a:rPr lang="en-US" smtClean="0"/>
               <a:pPr/>
-              <a:t>12</a:t>
+              <a:t>16</a:t>
             </a:fld>
             <a:endParaRPr lang="en-US"/>
           </a:p>
@@ -6728,7 +12281,7 @@
 </p:sld>
 </file>
 
-<file path=ppt/slides/slide13.xml><?xml version="1.0" encoding="utf-8"?>
+<file path=ppt/slides/slide17.xml><?xml version="1.0" encoding="utf-8"?>
 <p:sld xmlns:a="http://schemas.openxmlformats.org/drawingml/2006/main" xmlns:r="http://schemas.openxmlformats.org/officeDocument/2006/relationships" xmlns:p="http://schemas.openxmlformats.org/presentationml/2006/main">
   <p:cSld>
     <p:spTree>
@@ -6883,7 +12436,7 @@
             <a:fld id="{B82CCC60-E8CD-4174-8B1A-7DF615B22EEF}" type="slidenum">
               <a:rPr lang="en-US" smtClean="0"/>
               <a:pPr/>
-              <a:t>13</a:t>
+              <a:t>17</a:t>
             </a:fld>
             <a:endParaRPr lang="en-US"/>
           </a:p>
@@ -7073,7 +12626,7 @@
 </p:sld>
 </file>
 
-<file path=ppt/slides/slide14.xml><?xml version="1.0" encoding="utf-8"?>
+<file path=ppt/slides/slide18.xml><?xml version="1.0" encoding="utf-8"?>
 <p:sld xmlns:a="http://schemas.openxmlformats.org/drawingml/2006/main" xmlns:r="http://schemas.openxmlformats.org/officeDocument/2006/relationships" xmlns:p="http://schemas.openxmlformats.org/presentationml/2006/main">
   <p:cSld>
     <p:spTree>
@@ -7189,7 +12742,7 @@
             <a:fld id="{B82CCC60-E8CD-4174-8B1A-7DF615B22EEF}" type="slidenum">
               <a:rPr lang="en-US" smtClean="0"/>
               <a:pPr/>
-              <a:t>14</a:t>
+              <a:t>18</a:t>
             </a:fld>
             <a:endParaRPr lang="en-US"/>
           </a:p>
@@ -7208,7 +12761,7 @@
 </p:sld>
 </file>
 
-<file path=ppt/slides/slide15.xml><?xml version="1.0" encoding="utf-8"?>
+<file path=ppt/slides/slide19.xml><?xml version="1.0" encoding="utf-8"?>
 <p:sld xmlns:a="http://schemas.openxmlformats.org/drawingml/2006/main" xmlns:r="http://schemas.openxmlformats.org/officeDocument/2006/relationships" xmlns:p="http://schemas.openxmlformats.org/presentationml/2006/main">
   <p:cSld>
     <p:spTree>
@@ -7321,7 +12874,7 @@
             <a:fld id="{B82CCC60-E8CD-4174-8B1A-7DF615B22EEF}" type="slidenum">
               <a:rPr lang="en-US" smtClean="0"/>
               <a:pPr/>
-              <a:t>15</a:t>
+              <a:t>19</a:t>
             </a:fld>
             <a:endParaRPr lang="en-US"/>
           </a:p>
@@ -7717,7 +13270,7 @@
 </p:sld>
 </file>
 
-<file path=ppt/slides/slide16.xml><?xml version="1.0" encoding="utf-8"?>
+<file path=ppt/slides/slide2.xml><?xml version="1.0" encoding="utf-8"?>
 <p:sld xmlns:a="http://schemas.openxmlformats.org/drawingml/2006/main" xmlns:r="http://schemas.openxmlformats.org/officeDocument/2006/relationships" xmlns:p="http://schemas.openxmlformats.org/presentationml/2006/main">
   <p:cSld>
     <p:spTree>
@@ -7739,6 +13292,374 @@
           <p:cNvPr id="2" name="Title 1">
             <a:extLst>
               <a:ext uri="{FF2B5EF4-FFF2-40B4-BE49-F238E27FC236}">
+                <a16:creationId xmlns:a16="http://schemas.microsoft.com/office/drawing/2014/main" id="{28526115-0F50-D62F-6736-FB3DAE5B5E74}"/>
+              </a:ext>
+            </a:extLst>
+          </p:cNvPr>
+          <p:cNvSpPr>
+            <a:spLocks noGrp="1"/>
+          </p:cNvSpPr>
+          <p:nvPr>
+            <p:ph type="title"/>
+          </p:nvPr>
+        </p:nvSpPr>
+        <p:spPr>
+          <a:xfrm>
+            <a:off x="389898" y="233049"/>
+            <a:ext cx="6974997" cy="737569"/>
+          </a:xfrm>
+        </p:spPr>
+        <p:txBody>
+          <a:bodyPr>
+            <a:normAutofit fontScale="90000"/>
+          </a:bodyPr>
+          <a:lstStyle/>
+          <a:p>
+            <a:r>
+              <a:rPr lang="en-US" dirty="0"/>
+              <a:t>Genome assemblers that use DeBruijn graph or super-reads</a:t>
+            </a:r>
+          </a:p>
+        </p:txBody>
+      </p:sp>
+      <p:sp>
+        <p:nvSpPr>
+          <p:cNvPr id="3" name="Content Placeholder 2">
+            <a:extLst>
+              <a:ext uri="{FF2B5EF4-FFF2-40B4-BE49-F238E27FC236}">
+                <a16:creationId xmlns:a16="http://schemas.microsoft.com/office/drawing/2014/main" id="{DD9FA874-AAAE-2124-EC2E-057DB25523B2}"/>
+              </a:ext>
+            </a:extLst>
+          </p:cNvPr>
+          <p:cNvSpPr>
+            <a:spLocks noGrp="1"/>
+          </p:cNvSpPr>
+          <p:nvPr>
+            <p:ph idx="1"/>
+          </p:nvPr>
+        </p:nvSpPr>
+        <p:spPr>
+          <a:xfrm>
+            <a:off x="598620" y="1596540"/>
+            <a:ext cx="5056745" cy="1832460"/>
+          </a:xfrm>
+        </p:spPr>
+        <p:txBody>
+          <a:bodyPr>
+            <a:normAutofit/>
+          </a:bodyPr>
+          <a:lstStyle/>
+          <a:p>
+            <a:r>
+              <a:rPr lang="en-US" dirty="0" err="1"/>
+              <a:t>Verkko</a:t>
+            </a:r>
+            <a:r>
+              <a:rPr lang="en-US" dirty="0"/>
+              <a:t> – can produce T2T assemblies uses PacBio HiFi + Oxford Nanopore (ONT) data, high coverage requirements</a:t>
+            </a:r>
+          </a:p>
+          <a:p>
+            <a:endParaRPr lang="en-US" dirty="0"/>
+          </a:p>
+          <a:p>
+            <a:pPr marL="0" indent="0">
+              <a:buNone/>
+            </a:pPr>
+            <a:endParaRPr lang="en-US" dirty="0"/>
+          </a:p>
+        </p:txBody>
+      </p:sp>
+      <p:sp>
+        <p:nvSpPr>
+          <p:cNvPr id="4" name="Slide Number Placeholder 3">
+            <a:extLst>
+              <a:ext uri="{FF2B5EF4-FFF2-40B4-BE49-F238E27FC236}">
+                <a16:creationId xmlns:a16="http://schemas.microsoft.com/office/drawing/2014/main" id="{D3A3E570-2FE0-33CD-F954-80F2F3A818CA}"/>
+              </a:ext>
+            </a:extLst>
+          </p:cNvPr>
+          <p:cNvSpPr>
+            <a:spLocks noGrp="1"/>
+          </p:cNvSpPr>
+          <p:nvPr>
+            <p:ph type="sldNum" sz="quarter" idx="12"/>
+          </p:nvPr>
+        </p:nvSpPr>
+        <p:spPr/>
+        <p:txBody>
+          <a:bodyPr/>
+          <a:lstStyle/>
+          <a:p>
+            <a:fld id="{B82CCC60-E8CD-4174-8B1A-7DF615B22EEF}" type="slidenum">
+              <a:rPr lang="en-US" smtClean="0"/>
+              <a:pPr/>
+              <a:t>2</a:t>
+            </a:fld>
+            <a:endParaRPr lang="en-US"/>
+          </a:p>
+        </p:txBody>
+      </p:sp>
+      <p:sp>
+        <p:nvSpPr>
+          <p:cNvPr id="5" name="TextBox 4">
+            <a:extLst>
+              <a:ext uri="{FF2B5EF4-FFF2-40B4-BE49-F238E27FC236}">
+                <a16:creationId xmlns:a16="http://schemas.microsoft.com/office/drawing/2014/main" id="{EC37CF50-4F40-7A04-5977-06373F2E7AF9}"/>
+              </a:ext>
+            </a:extLst>
+          </p:cNvPr>
+          <p:cNvSpPr txBox="1"/>
+          <p:nvPr/>
+        </p:nvSpPr>
+        <p:spPr>
+          <a:xfrm>
+            <a:off x="308113" y="4989443"/>
+            <a:ext cx="184731" cy="369332"/>
+          </a:xfrm>
+          <a:prstGeom prst="rect">
+            <a:avLst/>
+          </a:prstGeom>
+          <a:noFill/>
+        </p:spPr>
+        <p:txBody>
+          <a:bodyPr wrap="none" rtlCol="0">
+            <a:spAutoFit/>
+          </a:bodyPr>
+          <a:lstStyle/>
+          <a:p>
+            <a:endParaRPr lang="en-US" dirty="0"/>
+          </a:p>
+        </p:txBody>
+      </p:sp>
+      <p:sp>
+        <p:nvSpPr>
+          <p:cNvPr id="6" name="TextBox 5">
+            <a:extLst>
+              <a:ext uri="{FF2B5EF4-FFF2-40B4-BE49-F238E27FC236}">
+                <a16:creationId xmlns:a16="http://schemas.microsoft.com/office/drawing/2014/main" id="{677B587E-17DA-0B3F-94D0-150ACD71AE84}"/>
+              </a:ext>
+            </a:extLst>
+          </p:cNvPr>
+          <p:cNvSpPr txBox="1"/>
+          <p:nvPr/>
+        </p:nvSpPr>
+        <p:spPr>
+          <a:xfrm>
+            <a:off x="5979671" y="4015145"/>
+            <a:ext cx="5904216" cy="2523768"/>
+          </a:xfrm>
+          <a:prstGeom prst="rect">
+            <a:avLst/>
+          </a:prstGeom>
+          <a:noFill/>
+        </p:spPr>
+        <p:txBody>
+          <a:bodyPr wrap="square" rtlCol="0">
+            <a:spAutoFit/>
+          </a:bodyPr>
+          <a:lstStyle/>
+          <a:p>
+            <a:pPr marL="342900" indent="-342900">
+              <a:buFont typeface="Arial" pitchFamily="34" charset="0"/>
+              <a:buChar char="•"/>
+            </a:pPr>
+            <a:r>
+              <a:rPr lang="en-US" sz="2800" dirty="0" err="1"/>
+              <a:t>MaSuRCA</a:t>
+            </a:r>
+            <a:r>
+              <a:rPr lang="en-US" sz="2800" dirty="0"/>
+              <a:t> -- for hybrid data sets – uses both K-</a:t>
+            </a:r>
+            <a:r>
+              <a:rPr lang="en-US" sz="2800" dirty="0" err="1"/>
+              <a:t>mer</a:t>
+            </a:r>
+            <a:r>
+              <a:rPr lang="en-US" sz="2800" dirty="0"/>
+              <a:t> graph (super-reads)  and OLC/String graph, requires Illumina reads, supports PacBio and ONT data</a:t>
+            </a:r>
+          </a:p>
+          <a:p>
+            <a:endParaRPr lang="en-US" dirty="0"/>
+          </a:p>
+        </p:txBody>
+      </p:sp>
+      <p:pic>
+        <p:nvPicPr>
+          <p:cNvPr id="8" name="Picture 7">
+            <a:extLst>
+              <a:ext uri="{FF2B5EF4-FFF2-40B4-BE49-F238E27FC236}">
+                <a16:creationId xmlns:a16="http://schemas.microsoft.com/office/drawing/2014/main" id="{B49462CC-9E69-39A1-A38F-91A017D30F06}"/>
+              </a:ext>
+            </a:extLst>
+          </p:cNvPr>
+          <p:cNvPicPr>
+            <a:picLocks noChangeAspect="1"/>
+          </p:cNvPicPr>
+          <p:nvPr/>
+        </p:nvPicPr>
+        <p:blipFill>
+          <a:blip r:embed="rId2"/>
+          <a:stretch>
+            <a:fillRect/>
+          </a:stretch>
+        </p:blipFill>
+        <p:spPr>
+          <a:xfrm>
+            <a:off x="5845012" y="1308813"/>
+            <a:ext cx="4099815" cy="2523769"/>
+          </a:xfrm>
+          <a:prstGeom prst="rect">
+            <a:avLst/>
+          </a:prstGeom>
+        </p:spPr>
+      </p:pic>
+      <p:pic>
+        <p:nvPicPr>
+          <p:cNvPr id="10" name="Picture 9">
+            <a:extLst>
+              <a:ext uri="{FF2B5EF4-FFF2-40B4-BE49-F238E27FC236}">
+                <a16:creationId xmlns:a16="http://schemas.microsoft.com/office/drawing/2014/main" id="{5EB063B5-D5F4-9E40-22EE-A3CC96193E59}"/>
+              </a:ext>
+            </a:extLst>
+          </p:cNvPr>
+          <p:cNvPicPr>
+            <a:picLocks noChangeAspect="1"/>
+          </p:cNvPicPr>
+          <p:nvPr/>
+        </p:nvPicPr>
+        <p:blipFill>
+          <a:blip r:embed="rId3"/>
+          <a:stretch>
+            <a:fillRect/>
+          </a:stretch>
+        </p:blipFill>
+        <p:spPr>
+          <a:xfrm>
+            <a:off x="221174" y="4092870"/>
+            <a:ext cx="6030167" cy="2162477"/>
+          </a:xfrm>
+          <a:prstGeom prst="rect">
+            <a:avLst/>
+          </a:prstGeom>
+        </p:spPr>
+      </p:pic>
+    </p:spTree>
+    <p:extLst>
+      <p:ext uri="{BB962C8B-B14F-4D97-AF65-F5344CB8AC3E}">
+        <p14:creationId xmlns:p14="http://schemas.microsoft.com/office/powerpoint/2010/main" val="807348765"/>
+      </p:ext>
+    </p:extLst>
+  </p:cSld>
+  <p:clrMapOvr>
+    <a:masterClrMapping/>
+  </p:clrMapOvr>
+  <p:timing>
+    <p:tnLst>
+      <p:par>
+        <p:cTn id="1" dur="indefinite" restart="never" nodeType="tmRoot">
+          <p:childTnLst>
+            <p:seq concurrent="1" nextAc="seek">
+              <p:cTn id="2" dur="indefinite" nodeType="mainSeq">
+                <p:childTnLst>
+                  <p:par>
+                    <p:cTn id="3" fill="hold">
+                      <p:stCondLst>
+                        <p:cond delay="indefinite"/>
+                      </p:stCondLst>
+                      <p:childTnLst>
+                        <p:par>
+                          <p:cTn id="4" fill="hold">
+                            <p:stCondLst>
+                              <p:cond delay="0"/>
+                            </p:stCondLst>
+                            <p:childTnLst>
+                              <p:par>
+                                <p:cTn id="5" presetID="1" presetClass="entr" presetSubtype="0" fill="hold" nodeType="clickEffect">
+                                  <p:stCondLst>
+                                    <p:cond delay="0"/>
+                                  </p:stCondLst>
+                                  <p:childTnLst>
+                                    <p:set>
+                                      <p:cBhvr>
+                                        <p:cTn id="6" dur="1" fill="hold">
+                                          <p:stCondLst>
+                                            <p:cond delay="0"/>
+                                          </p:stCondLst>
+                                        </p:cTn>
+                                        <p:tgtEl>
+                                          <p:spTgt spid="3">
+                                            <p:txEl>
+                                              <p:pRg st="0" end="0"/>
+                                            </p:txEl>
+                                          </p:spTgt>
+                                        </p:tgtEl>
+                                        <p:attrNameLst>
+                                          <p:attrName>style.visibility</p:attrName>
+                                        </p:attrNameLst>
+                                      </p:cBhvr>
+                                      <p:to>
+                                        <p:strVal val="visible"/>
+                                      </p:to>
+                                    </p:set>
+                                  </p:childTnLst>
+                                </p:cTn>
+                              </p:par>
+                            </p:childTnLst>
+                          </p:cTn>
+                        </p:par>
+                      </p:childTnLst>
+                    </p:cTn>
+                  </p:par>
+                </p:childTnLst>
+              </p:cTn>
+              <p:prevCondLst>
+                <p:cond evt="onPrev" delay="0">
+                  <p:tgtEl>
+                    <p:sldTgt/>
+                  </p:tgtEl>
+                </p:cond>
+              </p:prevCondLst>
+              <p:nextCondLst>
+                <p:cond evt="onNext" delay="0">
+                  <p:tgtEl>
+                    <p:sldTgt/>
+                  </p:tgtEl>
+                </p:cond>
+              </p:nextCondLst>
+            </p:seq>
+          </p:childTnLst>
+        </p:cTn>
+      </p:par>
+    </p:tnLst>
+  </p:timing>
+</p:sld>
+</file>
+
+<file path=ppt/slides/slide20.xml><?xml version="1.0" encoding="utf-8"?>
+<p:sld xmlns:a="http://schemas.openxmlformats.org/drawingml/2006/main" xmlns:r="http://schemas.openxmlformats.org/officeDocument/2006/relationships" xmlns:p="http://schemas.openxmlformats.org/presentationml/2006/main">
+  <p:cSld>
+    <p:spTree>
+      <p:nvGrpSpPr>
+        <p:cNvPr id="1" name=""/>
+        <p:cNvGrpSpPr/>
+        <p:nvPr/>
+      </p:nvGrpSpPr>
+      <p:grpSpPr>
+        <a:xfrm>
+          <a:off x="0" y="0"/>
+          <a:ext cx="0" cy="0"/>
+          <a:chOff x="0" y="0"/>
+          <a:chExt cx="0" cy="0"/>
+        </a:xfrm>
+      </p:grpSpPr>
+      <p:sp>
+        <p:nvSpPr>
+          <p:cNvPr id="2" name="Title 1">
+            <a:extLst>
+              <a:ext uri="{FF2B5EF4-FFF2-40B4-BE49-F238E27FC236}">
                 <a16:creationId xmlns:a16="http://schemas.microsoft.com/office/drawing/2014/main" id="{59D7ABA8-0E19-BAF5-1D8E-578D7241793C}"/>
               </a:ext>
             </a:extLst>
@@ -7910,7 +13831,7 @@
             <a:fld id="{B82CCC60-E8CD-4174-8B1A-7DF615B22EEF}" type="slidenum">
               <a:rPr lang="en-US" smtClean="0"/>
               <a:pPr/>
-              <a:t>16</a:t>
+              <a:t>20</a:t>
             </a:fld>
             <a:endParaRPr lang="en-US"/>
           </a:p>
@@ -8367,7 +14288,7 @@
 </p:sld>
 </file>
 
-<file path=ppt/slides/slide17.xml><?xml version="1.0" encoding="utf-8"?>
+<file path=ppt/slides/slide21.xml><?xml version="1.0" encoding="utf-8"?>
 <p:sld xmlns:a="http://schemas.openxmlformats.org/drawingml/2006/main" xmlns:r="http://schemas.openxmlformats.org/officeDocument/2006/relationships" xmlns:p="http://schemas.openxmlformats.org/presentationml/2006/main">
   <p:cSld>
     <p:spTree>
@@ -8444,7 +14365,7 @@
             <a:fld id="{B82CCC60-E8CD-4174-8B1A-7DF615B22EEF}" type="slidenum">
               <a:rPr lang="en-US" smtClean="0"/>
               <a:pPr/>
-              <a:t>17</a:t>
+              <a:t>21</a:t>
             </a:fld>
             <a:endParaRPr lang="en-US"/>
           </a:p>
@@ -8833,7 +14754,7 @@
 </p:sld>
 </file>
 
-<file path=ppt/slides/slide18.xml><?xml version="1.0" encoding="utf-8"?>
+<file path=ppt/slides/slide22.xml><?xml version="1.0" encoding="utf-8"?>
 <p:sld xmlns:a="http://schemas.openxmlformats.org/drawingml/2006/main" xmlns:r="http://schemas.openxmlformats.org/officeDocument/2006/relationships" xmlns:p="http://schemas.openxmlformats.org/presentationml/2006/main">
   <p:cSld>
     <p:spTree>
@@ -9002,7 +14923,7 @@
                         <m:sSub>
                           <m:sSubPr>
                             <m:ctrlPr>
-                              <a:rPr lang="en-US" i="1" smtClean="0">
+                              <a:rPr lang="en-US" b="0" i="1" smtClean="0">
                                 <a:latin typeface="Cambria Math" panose="02040503050406030204" pitchFamily="18" charset="0"/>
                               </a:rPr>
                             </m:ctrlPr>
@@ -9129,7 +15050,7 @@
             <a:fld id="{B82CCC60-E8CD-4174-8B1A-7DF615B22EEF}" type="slidenum">
               <a:rPr lang="en-US" smtClean="0"/>
               <a:pPr/>
-              <a:t>18</a:t>
+              <a:t>22</a:t>
             </a:fld>
             <a:endParaRPr lang="en-US"/>
           </a:p>
@@ -9328,7 +15249,7 @@
 </p:sld>
 </file>
 
-<file path=ppt/slides/slide19.xml><?xml version="1.0" encoding="utf-8"?>
+<file path=ppt/slides/slide23.xml><?xml version="1.0" encoding="utf-8"?>
 <p:sld xmlns:a="http://schemas.openxmlformats.org/drawingml/2006/main" xmlns:r="http://schemas.openxmlformats.org/officeDocument/2006/relationships" xmlns:p="http://schemas.openxmlformats.org/presentationml/2006/main">
   <p:cSld>
     <p:spTree>
@@ -9427,7 +15348,7 @@
             <a:fld id="{B82CCC60-E8CD-4174-8B1A-7DF615B22EEF}" type="slidenum">
               <a:rPr lang="en-US" smtClean="0"/>
               <a:pPr/>
-              <a:t>19</a:t>
+              <a:t>23</a:t>
             </a:fld>
             <a:endParaRPr lang="en-US"/>
           </a:p>
@@ -10540,7 +16461,447 @@
 </p:sld>
 </file>
 
-<file path=ppt/slides/slide2.xml><?xml version="1.0" encoding="utf-8"?>
+<file path=ppt/slides/slide24.xml><?xml version="1.0" encoding="utf-8"?>
+<p:sld xmlns:a="http://schemas.openxmlformats.org/drawingml/2006/main" xmlns:r="http://schemas.openxmlformats.org/officeDocument/2006/relationships" xmlns:p="http://schemas.openxmlformats.org/presentationml/2006/main">
+  <p:cSld>
+    <p:spTree>
+      <p:nvGrpSpPr>
+        <p:cNvPr id="1" name=""/>
+        <p:cNvGrpSpPr/>
+        <p:nvPr/>
+      </p:nvGrpSpPr>
+      <p:grpSpPr>
+        <a:xfrm>
+          <a:off x="0" y="0"/>
+          <a:ext cx="0" cy="0"/>
+          <a:chOff x="0" y="0"/>
+          <a:chExt cx="0" cy="0"/>
+        </a:xfrm>
+      </p:grpSpPr>
+      <p:sp>
+        <p:nvSpPr>
+          <p:cNvPr id="2" name="Title 1">
+            <a:extLst>
+              <a:ext uri="{FF2B5EF4-FFF2-40B4-BE49-F238E27FC236}">
+                <a16:creationId xmlns:a16="http://schemas.microsoft.com/office/drawing/2014/main" id="{27981647-DAC0-7080-60EA-CFCB97D4E9EC}"/>
+              </a:ext>
+            </a:extLst>
+          </p:cNvPr>
+          <p:cNvSpPr>
+            <a:spLocks noGrp="1"/>
+          </p:cNvSpPr>
+          <p:nvPr>
+            <p:ph type="title"/>
+          </p:nvPr>
+        </p:nvSpPr>
+        <p:spPr/>
+        <p:txBody>
+          <a:bodyPr>
+            <a:normAutofit fontScale="90000"/>
+          </a:bodyPr>
+          <a:lstStyle/>
+          <a:p>
+            <a:r>
+              <a:rPr lang="en-US" dirty="0" err="1"/>
+              <a:t>GenomeScope</a:t>
+            </a:r>
+            <a:endParaRPr lang="en-US" dirty="0"/>
+          </a:p>
+        </p:txBody>
+      </p:sp>
+      <p:sp>
+        <p:nvSpPr>
+          <p:cNvPr id="3" name="Content Placeholder 2">
+            <a:extLst>
+              <a:ext uri="{FF2B5EF4-FFF2-40B4-BE49-F238E27FC236}">
+                <a16:creationId xmlns:a16="http://schemas.microsoft.com/office/drawing/2014/main" id="{A1EC81F7-D252-D876-23E2-E3E25526F6DB}"/>
+              </a:ext>
+            </a:extLst>
+          </p:cNvPr>
+          <p:cNvSpPr>
+            <a:spLocks noGrp="1"/>
+          </p:cNvSpPr>
+          <p:nvPr>
+            <p:ph idx="1"/>
+          </p:nvPr>
+        </p:nvSpPr>
+        <p:spPr>
+          <a:xfrm>
+            <a:off x="598620" y="1596540"/>
+            <a:ext cx="11249166" cy="4977681"/>
+          </a:xfrm>
+        </p:spPr>
+        <p:txBody>
+          <a:bodyPr>
+            <a:normAutofit/>
+          </a:bodyPr>
+          <a:lstStyle/>
+          <a:p>
+            <a:r>
+              <a:rPr lang="en-US" dirty="0" err="1"/>
+              <a:t>Genomescope</a:t>
+            </a:r>
+            <a:r>
+              <a:rPr lang="en-US" dirty="0"/>
+              <a:t> is a program developed at JHU by T. Rhyker Ranallo-Benavidez, Kamil S. Jaron, and Michael C. Schatz</a:t>
+            </a:r>
+          </a:p>
+          <a:p>
+            <a:r>
+              <a:rPr lang="en-US" dirty="0"/>
+              <a:t>Web-based interface: </a:t>
+            </a:r>
+            <a:r>
+              <a:rPr lang="en-US" dirty="0">
+                <a:hlinkClick r:id="rId2"/>
+              </a:rPr>
+              <a:t>http://genomescope.org/genomescope2.0/</a:t>
+            </a:r>
+            <a:r>
+              <a:rPr lang="en-US" dirty="0"/>
+              <a:t> (note: </a:t>
+            </a:r>
+            <a:r>
+              <a:rPr lang="en-US" dirty="0">
+                <a:solidFill>
+                  <a:srgbClr val="0000FF"/>
+                </a:solidFill>
+                <a:hlinkClick r:id="rId3">
+                  <a:extLst>
+                    <a:ext uri="{A12FA001-AC4F-418D-AE19-62706E023703}">
+                      <ahyp:hlinkClr xmlns:ahyp="http://schemas.microsoft.com/office/drawing/2018/hyperlinkcolor" val="tx"/>
+                    </a:ext>
+                  </a:extLst>
+                </a:hlinkClick>
+              </a:rPr>
+              <a:t>http</a:t>
+            </a:r>
+            <a:r>
+              <a:rPr lang="en-US" dirty="0">
+                <a:solidFill>
+                  <a:srgbClr val="FF0000"/>
+                </a:solidFill>
+                <a:hlinkClick r:id="rId3">
+                  <a:extLst>
+                    <a:ext uri="{A12FA001-AC4F-418D-AE19-62706E023703}">
+                      <ahyp:hlinkClr xmlns:ahyp="http://schemas.microsoft.com/office/drawing/2018/hyperlinkcolor" val="tx"/>
+                    </a:ext>
+                  </a:extLst>
+                </a:hlinkClick>
+              </a:rPr>
+              <a:t>s</a:t>
+            </a:r>
+            <a:r>
+              <a:rPr lang="en-US" dirty="0">
+                <a:solidFill>
+                  <a:srgbClr val="0000FF"/>
+                </a:solidFill>
+                <a:hlinkClick r:id="rId3">
+                  <a:extLst>
+                    <a:ext uri="{A12FA001-AC4F-418D-AE19-62706E023703}">
+                      <ahyp:hlinkClr xmlns:ahyp="http://schemas.microsoft.com/office/drawing/2018/hyperlinkcolor" val="tx"/>
+                    </a:ext>
+                  </a:extLst>
+                </a:hlinkClick>
+              </a:rPr>
+              <a:t>://genomescope.org/genomescope2.0/</a:t>
+            </a:r>
+            <a:r>
+              <a:rPr lang="en-US" dirty="0"/>
+              <a:t>  does </a:t>
+            </a:r>
+            <a:r>
+              <a:rPr lang="en-US" dirty="0">
+                <a:solidFill>
+                  <a:srgbClr val="FF0000"/>
+                </a:solidFill>
+              </a:rPr>
+              <a:t>not</a:t>
+            </a:r>
+            <a:r>
+              <a:rPr lang="en-US" dirty="0"/>
+              <a:t> work)</a:t>
+            </a:r>
+          </a:p>
+          <a:p>
+            <a:r>
+              <a:rPr lang="en-US" dirty="0"/>
+              <a:t>Compute k-mer count database with jellyfish</a:t>
+            </a:r>
+          </a:p>
+          <a:p>
+            <a:r>
+              <a:rPr lang="en-US" dirty="0"/>
+              <a:t>Output histogram of counts with “jellyfish </a:t>
+            </a:r>
+            <a:r>
+              <a:rPr lang="en-US" dirty="0" err="1"/>
+              <a:t>histo</a:t>
+            </a:r>
+            <a:r>
+              <a:rPr lang="en-US" dirty="0"/>
+              <a:t>”, save in a file</a:t>
+            </a:r>
+          </a:p>
+          <a:p>
+            <a:r>
+              <a:rPr lang="en-US" dirty="0"/>
+              <a:t>Upload the histogram to </a:t>
+            </a:r>
+            <a:r>
+              <a:rPr lang="en-US" dirty="0" err="1"/>
+              <a:t>GenomeScope</a:t>
+            </a:r>
+            <a:endParaRPr lang="en-US" dirty="0"/>
+          </a:p>
+          <a:p>
+            <a:endParaRPr lang="en-US" dirty="0"/>
+          </a:p>
+          <a:p>
+            <a:r>
+              <a:rPr lang="en-US" dirty="0"/>
+              <a:t>DEMO</a:t>
+            </a:r>
+          </a:p>
+          <a:p>
+            <a:endParaRPr lang="en-US" dirty="0"/>
+          </a:p>
+        </p:txBody>
+      </p:sp>
+      <p:sp>
+        <p:nvSpPr>
+          <p:cNvPr id="4" name="Slide Number Placeholder 3">
+            <a:extLst>
+              <a:ext uri="{FF2B5EF4-FFF2-40B4-BE49-F238E27FC236}">
+                <a16:creationId xmlns:a16="http://schemas.microsoft.com/office/drawing/2014/main" id="{95A440E4-4EC7-34D6-0C21-C59FF9D3A624}"/>
+              </a:ext>
+            </a:extLst>
+          </p:cNvPr>
+          <p:cNvSpPr>
+            <a:spLocks noGrp="1"/>
+          </p:cNvSpPr>
+          <p:nvPr>
+            <p:ph type="sldNum" sz="quarter" idx="12"/>
+          </p:nvPr>
+        </p:nvSpPr>
+        <p:spPr/>
+        <p:txBody>
+          <a:bodyPr/>
+          <a:lstStyle/>
+          <a:p>
+            <a:fld id="{B82CCC60-E8CD-4174-8B1A-7DF615B22EEF}" type="slidenum">
+              <a:rPr lang="en-US" smtClean="0"/>
+              <a:pPr/>
+              <a:t>24</a:t>
+            </a:fld>
+            <a:endParaRPr lang="en-US"/>
+          </a:p>
+        </p:txBody>
+      </p:sp>
+    </p:spTree>
+    <p:extLst>
+      <p:ext uri="{BB962C8B-B14F-4D97-AF65-F5344CB8AC3E}">
+        <p14:creationId xmlns:p14="http://schemas.microsoft.com/office/powerpoint/2010/main" val="797273798"/>
+      </p:ext>
+    </p:extLst>
+  </p:cSld>
+  <p:clrMapOvr>
+    <a:masterClrMapping/>
+  </p:clrMapOvr>
+  <p:timing>
+    <p:tnLst>
+      <p:par>
+        <p:cTn id="1" dur="indefinite" restart="never" nodeType="tmRoot">
+          <p:childTnLst>
+            <p:seq concurrent="1" nextAc="seek">
+              <p:cTn id="2" dur="indefinite" nodeType="mainSeq">
+                <p:childTnLst>
+                  <p:par>
+                    <p:cTn id="3" fill="hold">
+                      <p:stCondLst>
+                        <p:cond delay="indefinite"/>
+                      </p:stCondLst>
+                      <p:childTnLst>
+                        <p:par>
+                          <p:cTn id="4" fill="hold">
+                            <p:stCondLst>
+                              <p:cond delay="0"/>
+                            </p:stCondLst>
+                            <p:childTnLst>
+                              <p:par>
+                                <p:cTn id="5" presetID="1" presetClass="entr" presetSubtype="0" fill="hold" nodeType="clickEffect">
+                                  <p:stCondLst>
+                                    <p:cond delay="0"/>
+                                  </p:stCondLst>
+                                  <p:childTnLst>
+                                    <p:set>
+                                      <p:cBhvr>
+                                        <p:cTn id="6" dur="1" fill="hold">
+                                          <p:stCondLst>
+                                            <p:cond delay="0"/>
+                                          </p:stCondLst>
+                                        </p:cTn>
+                                        <p:tgtEl>
+                                          <p:spTgt spid="3">
+                                            <p:txEl>
+                                              <p:pRg st="2" end="2"/>
+                                            </p:txEl>
+                                          </p:spTgt>
+                                        </p:tgtEl>
+                                        <p:attrNameLst>
+                                          <p:attrName>style.visibility</p:attrName>
+                                        </p:attrNameLst>
+                                      </p:cBhvr>
+                                      <p:to>
+                                        <p:strVal val="visible"/>
+                                      </p:to>
+                                    </p:set>
+                                  </p:childTnLst>
+                                </p:cTn>
+                              </p:par>
+                              <p:par>
+                                <p:cTn id="7" presetID="1" presetClass="entr" presetSubtype="0" fill="hold" nodeType="withEffect">
+                                  <p:stCondLst>
+                                    <p:cond delay="0"/>
+                                  </p:stCondLst>
+                                  <p:childTnLst>
+                                    <p:set>
+                                      <p:cBhvr>
+                                        <p:cTn id="8" dur="1" fill="hold">
+                                          <p:stCondLst>
+                                            <p:cond delay="0"/>
+                                          </p:stCondLst>
+                                        </p:cTn>
+                                        <p:tgtEl>
+                                          <p:spTgt spid="3">
+                                            <p:txEl>
+                                              <p:pRg st="3" end="3"/>
+                                            </p:txEl>
+                                          </p:spTgt>
+                                        </p:tgtEl>
+                                        <p:attrNameLst>
+                                          <p:attrName>style.visibility</p:attrName>
+                                        </p:attrNameLst>
+                                      </p:cBhvr>
+                                      <p:to>
+                                        <p:strVal val="visible"/>
+                                      </p:to>
+                                    </p:set>
+                                  </p:childTnLst>
+                                </p:cTn>
+                              </p:par>
+                              <p:par>
+                                <p:cTn id="9" presetID="1" presetClass="entr" presetSubtype="0" fill="hold" nodeType="withEffect">
+                                  <p:stCondLst>
+                                    <p:cond delay="0"/>
+                                  </p:stCondLst>
+                                  <p:childTnLst>
+                                    <p:set>
+                                      <p:cBhvr>
+                                        <p:cTn id="10" dur="1" fill="hold">
+                                          <p:stCondLst>
+                                            <p:cond delay="0"/>
+                                          </p:stCondLst>
+                                        </p:cTn>
+                                        <p:tgtEl>
+                                          <p:spTgt spid="3">
+                                            <p:txEl>
+                                              <p:pRg st="4" end="4"/>
+                                            </p:txEl>
+                                          </p:spTgt>
+                                        </p:tgtEl>
+                                        <p:attrNameLst>
+                                          <p:attrName>style.visibility</p:attrName>
+                                        </p:attrNameLst>
+                                      </p:cBhvr>
+                                      <p:to>
+                                        <p:strVal val="visible"/>
+                                      </p:to>
+                                    </p:set>
+                                  </p:childTnLst>
+                                </p:cTn>
+                              </p:par>
+                            </p:childTnLst>
+                          </p:cTn>
+                        </p:par>
+                      </p:childTnLst>
+                    </p:cTn>
+                  </p:par>
+                  <p:par>
+                    <p:cTn id="11" fill="hold">
+                      <p:stCondLst>
+                        <p:cond delay="indefinite"/>
+                      </p:stCondLst>
+                      <p:childTnLst>
+                        <p:par>
+                          <p:cTn id="12" fill="hold">
+                            <p:stCondLst>
+                              <p:cond delay="0"/>
+                            </p:stCondLst>
+                            <p:childTnLst>
+                              <p:par>
+                                <p:cTn id="13" presetID="1" presetClass="entr" presetSubtype="0" fill="hold" nodeType="clickEffect">
+                                  <p:stCondLst>
+                                    <p:cond delay="0"/>
+                                  </p:stCondLst>
+                                  <p:childTnLst>
+                                    <p:set>
+                                      <p:cBhvr>
+                                        <p:cTn id="14" dur="1" fill="hold">
+                                          <p:stCondLst>
+                                            <p:cond delay="0"/>
+                                          </p:stCondLst>
+                                        </p:cTn>
+                                        <p:tgtEl>
+                                          <p:spTgt spid="3">
+                                            <p:txEl>
+                                              <p:pRg st="6" end="6"/>
+                                            </p:txEl>
+                                          </p:spTgt>
+                                        </p:tgtEl>
+                                        <p:attrNameLst>
+                                          <p:attrName>style.visibility</p:attrName>
+                                        </p:attrNameLst>
+                                      </p:cBhvr>
+                                      <p:to>
+                                        <p:strVal val="visible"/>
+                                      </p:to>
+                                    </p:set>
+                                  </p:childTnLst>
+                                </p:cTn>
+                              </p:par>
+                            </p:childTnLst>
+                          </p:cTn>
+                        </p:par>
+                      </p:childTnLst>
+                    </p:cTn>
+                  </p:par>
+                </p:childTnLst>
+              </p:cTn>
+              <p:prevCondLst>
+                <p:cond evt="onPrev" delay="0">
+                  <p:tgtEl>
+                    <p:sldTgt/>
+                  </p:tgtEl>
+                </p:cond>
+              </p:prevCondLst>
+              <p:nextCondLst>
+                <p:cond evt="onNext" delay="0">
+                  <p:tgtEl>
+                    <p:sldTgt/>
+                  </p:tgtEl>
+                </p:cond>
+              </p:nextCondLst>
+            </p:seq>
+          </p:childTnLst>
+        </p:cTn>
+      </p:par>
+    </p:tnLst>
+  </p:timing>
+</p:sld>
+</file>
+
+<file path=ppt/slides/slide3.xml><?xml version="1.0" encoding="utf-8"?>
 <p:sld xmlns:a="http://schemas.openxmlformats.org/drawingml/2006/main" xmlns:r="http://schemas.openxmlformats.org/officeDocument/2006/relationships" xmlns:p="http://schemas.openxmlformats.org/presentationml/2006/main">
   <p:cSld>
     <p:spTree>
@@ -10617,7 +16978,7 @@
             <a:fld id="{B82CCC60-E8CD-4174-8B1A-7DF615B22EEF}" type="slidenum">
               <a:rPr lang="en-US" smtClean="0"/>
               <a:pPr/>
-              <a:t>2</a:t>
+              <a:t>3</a:t>
             </a:fld>
             <a:endParaRPr lang="en-US"/>
           </a:p>
@@ -11648,447 +18009,7 @@
 </p:sld>
 </file>
 
-<file path=ppt/slides/slide20.xml><?xml version="1.0" encoding="utf-8"?>
-<p:sld xmlns:a="http://schemas.openxmlformats.org/drawingml/2006/main" xmlns:r="http://schemas.openxmlformats.org/officeDocument/2006/relationships" xmlns:p="http://schemas.openxmlformats.org/presentationml/2006/main">
-  <p:cSld>
-    <p:spTree>
-      <p:nvGrpSpPr>
-        <p:cNvPr id="1" name=""/>
-        <p:cNvGrpSpPr/>
-        <p:nvPr/>
-      </p:nvGrpSpPr>
-      <p:grpSpPr>
-        <a:xfrm>
-          <a:off x="0" y="0"/>
-          <a:ext cx="0" cy="0"/>
-          <a:chOff x="0" y="0"/>
-          <a:chExt cx="0" cy="0"/>
-        </a:xfrm>
-      </p:grpSpPr>
-      <p:sp>
-        <p:nvSpPr>
-          <p:cNvPr id="2" name="Title 1">
-            <a:extLst>
-              <a:ext uri="{FF2B5EF4-FFF2-40B4-BE49-F238E27FC236}">
-                <a16:creationId xmlns:a16="http://schemas.microsoft.com/office/drawing/2014/main" id="{27981647-DAC0-7080-60EA-CFCB97D4E9EC}"/>
-              </a:ext>
-            </a:extLst>
-          </p:cNvPr>
-          <p:cNvSpPr>
-            <a:spLocks noGrp="1"/>
-          </p:cNvSpPr>
-          <p:nvPr>
-            <p:ph type="title"/>
-          </p:nvPr>
-        </p:nvSpPr>
-        <p:spPr/>
-        <p:txBody>
-          <a:bodyPr>
-            <a:normAutofit fontScale="90000"/>
-          </a:bodyPr>
-          <a:lstStyle/>
-          <a:p>
-            <a:r>
-              <a:rPr lang="en-US" dirty="0" err="1"/>
-              <a:t>GenomeScope</a:t>
-            </a:r>
-            <a:endParaRPr lang="en-US" dirty="0"/>
-          </a:p>
-        </p:txBody>
-      </p:sp>
-      <p:sp>
-        <p:nvSpPr>
-          <p:cNvPr id="3" name="Content Placeholder 2">
-            <a:extLst>
-              <a:ext uri="{FF2B5EF4-FFF2-40B4-BE49-F238E27FC236}">
-                <a16:creationId xmlns:a16="http://schemas.microsoft.com/office/drawing/2014/main" id="{A1EC81F7-D252-D876-23E2-E3E25526F6DB}"/>
-              </a:ext>
-            </a:extLst>
-          </p:cNvPr>
-          <p:cNvSpPr>
-            <a:spLocks noGrp="1"/>
-          </p:cNvSpPr>
-          <p:nvPr>
-            <p:ph idx="1"/>
-          </p:nvPr>
-        </p:nvSpPr>
-        <p:spPr>
-          <a:xfrm>
-            <a:off x="598620" y="1596540"/>
-            <a:ext cx="11249166" cy="4977681"/>
-          </a:xfrm>
-        </p:spPr>
-        <p:txBody>
-          <a:bodyPr>
-            <a:normAutofit/>
-          </a:bodyPr>
-          <a:lstStyle/>
-          <a:p>
-            <a:r>
-              <a:rPr lang="en-US" dirty="0" err="1"/>
-              <a:t>Genomescope</a:t>
-            </a:r>
-            <a:r>
-              <a:rPr lang="en-US" dirty="0"/>
-              <a:t> is a program developed at JHU by T. Rhyker Ranallo-Benavidez, Kamil S. Jaron, and Michael C. Schatz</a:t>
-            </a:r>
-          </a:p>
-          <a:p>
-            <a:r>
-              <a:rPr lang="en-US" dirty="0"/>
-              <a:t>Web-based interface: </a:t>
-            </a:r>
-            <a:r>
-              <a:rPr lang="en-US" dirty="0">
-                <a:hlinkClick r:id="rId2"/>
-              </a:rPr>
-              <a:t>http://genomescope.org/genomescope2.0/</a:t>
-            </a:r>
-            <a:r>
-              <a:rPr lang="en-US" dirty="0"/>
-              <a:t> (note: </a:t>
-            </a:r>
-            <a:r>
-              <a:rPr lang="en-US" dirty="0">
-                <a:solidFill>
-                  <a:srgbClr val="0000FF"/>
-                </a:solidFill>
-                <a:hlinkClick r:id="rId3">
-                  <a:extLst>
-                    <a:ext uri="{A12FA001-AC4F-418D-AE19-62706E023703}">
-                      <ahyp:hlinkClr xmlns:ahyp="http://schemas.microsoft.com/office/drawing/2018/hyperlinkcolor" val="tx"/>
-                    </a:ext>
-                  </a:extLst>
-                </a:hlinkClick>
-              </a:rPr>
-              <a:t>http</a:t>
-            </a:r>
-            <a:r>
-              <a:rPr lang="en-US" dirty="0">
-                <a:solidFill>
-                  <a:srgbClr val="FF0000"/>
-                </a:solidFill>
-                <a:hlinkClick r:id="rId3">
-                  <a:extLst>
-                    <a:ext uri="{A12FA001-AC4F-418D-AE19-62706E023703}">
-                      <ahyp:hlinkClr xmlns:ahyp="http://schemas.microsoft.com/office/drawing/2018/hyperlinkcolor" val="tx"/>
-                    </a:ext>
-                  </a:extLst>
-                </a:hlinkClick>
-              </a:rPr>
-              <a:t>s</a:t>
-            </a:r>
-            <a:r>
-              <a:rPr lang="en-US" dirty="0">
-                <a:solidFill>
-                  <a:srgbClr val="0000FF"/>
-                </a:solidFill>
-                <a:hlinkClick r:id="rId3">
-                  <a:extLst>
-                    <a:ext uri="{A12FA001-AC4F-418D-AE19-62706E023703}">
-                      <ahyp:hlinkClr xmlns:ahyp="http://schemas.microsoft.com/office/drawing/2018/hyperlinkcolor" val="tx"/>
-                    </a:ext>
-                  </a:extLst>
-                </a:hlinkClick>
-              </a:rPr>
-              <a:t>://genomescope.org/genomescope2.0/</a:t>
-            </a:r>
-            <a:r>
-              <a:rPr lang="en-US" dirty="0"/>
-              <a:t>  does </a:t>
-            </a:r>
-            <a:r>
-              <a:rPr lang="en-US" dirty="0">
-                <a:solidFill>
-                  <a:srgbClr val="FF0000"/>
-                </a:solidFill>
-              </a:rPr>
-              <a:t>not</a:t>
-            </a:r>
-            <a:r>
-              <a:rPr lang="en-US" dirty="0"/>
-              <a:t> work)</a:t>
-            </a:r>
-          </a:p>
-          <a:p>
-            <a:r>
-              <a:rPr lang="en-US" dirty="0"/>
-              <a:t>Compute k-mer count database with jellyfish</a:t>
-            </a:r>
-          </a:p>
-          <a:p>
-            <a:r>
-              <a:rPr lang="en-US" dirty="0"/>
-              <a:t>Output histogram of counts with “jellyfish </a:t>
-            </a:r>
-            <a:r>
-              <a:rPr lang="en-US" dirty="0" err="1"/>
-              <a:t>histo</a:t>
-            </a:r>
-            <a:r>
-              <a:rPr lang="en-US" dirty="0"/>
-              <a:t>”, save in a file</a:t>
-            </a:r>
-          </a:p>
-          <a:p>
-            <a:r>
-              <a:rPr lang="en-US" dirty="0"/>
-              <a:t>Upload the histogram to </a:t>
-            </a:r>
-            <a:r>
-              <a:rPr lang="en-US" dirty="0" err="1"/>
-              <a:t>GenomeScope</a:t>
-            </a:r>
-            <a:endParaRPr lang="en-US" dirty="0"/>
-          </a:p>
-          <a:p>
-            <a:endParaRPr lang="en-US" dirty="0"/>
-          </a:p>
-          <a:p>
-            <a:r>
-              <a:rPr lang="en-US" dirty="0"/>
-              <a:t>DEMO</a:t>
-            </a:r>
-          </a:p>
-          <a:p>
-            <a:endParaRPr lang="en-US" dirty="0"/>
-          </a:p>
-        </p:txBody>
-      </p:sp>
-      <p:sp>
-        <p:nvSpPr>
-          <p:cNvPr id="4" name="Slide Number Placeholder 3">
-            <a:extLst>
-              <a:ext uri="{FF2B5EF4-FFF2-40B4-BE49-F238E27FC236}">
-                <a16:creationId xmlns:a16="http://schemas.microsoft.com/office/drawing/2014/main" id="{95A440E4-4EC7-34D6-0C21-C59FF9D3A624}"/>
-              </a:ext>
-            </a:extLst>
-          </p:cNvPr>
-          <p:cNvSpPr>
-            <a:spLocks noGrp="1"/>
-          </p:cNvSpPr>
-          <p:nvPr>
-            <p:ph type="sldNum" sz="quarter" idx="12"/>
-          </p:nvPr>
-        </p:nvSpPr>
-        <p:spPr/>
-        <p:txBody>
-          <a:bodyPr/>
-          <a:lstStyle/>
-          <a:p>
-            <a:fld id="{B82CCC60-E8CD-4174-8B1A-7DF615B22EEF}" type="slidenum">
-              <a:rPr lang="en-US" smtClean="0"/>
-              <a:pPr/>
-              <a:t>20</a:t>
-            </a:fld>
-            <a:endParaRPr lang="en-US"/>
-          </a:p>
-        </p:txBody>
-      </p:sp>
-    </p:spTree>
-    <p:extLst>
-      <p:ext uri="{BB962C8B-B14F-4D97-AF65-F5344CB8AC3E}">
-        <p14:creationId xmlns:p14="http://schemas.microsoft.com/office/powerpoint/2010/main" val="797273798"/>
-      </p:ext>
-    </p:extLst>
-  </p:cSld>
-  <p:clrMapOvr>
-    <a:masterClrMapping/>
-  </p:clrMapOvr>
-  <p:timing>
-    <p:tnLst>
-      <p:par>
-        <p:cTn id="1" dur="indefinite" restart="never" nodeType="tmRoot">
-          <p:childTnLst>
-            <p:seq concurrent="1" nextAc="seek">
-              <p:cTn id="2" dur="indefinite" nodeType="mainSeq">
-                <p:childTnLst>
-                  <p:par>
-                    <p:cTn id="3" fill="hold">
-                      <p:stCondLst>
-                        <p:cond delay="indefinite"/>
-                      </p:stCondLst>
-                      <p:childTnLst>
-                        <p:par>
-                          <p:cTn id="4" fill="hold">
-                            <p:stCondLst>
-                              <p:cond delay="0"/>
-                            </p:stCondLst>
-                            <p:childTnLst>
-                              <p:par>
-                                <p:cTn id="5" presetID="1" presetClass="entr" presetSubtype="0" fill="hold" nodeType="clickEffect">
-                                  <p:stCondLst>
-                                    <p:cond delay="0"/>
-                                  </p:stCondLst>
-                                  <p:childTnLst>
-                                    <p:set>
-                                      <p:cBhvr>
-                                        <p:cTn id="6" dur="1" fill="hold">
-                                          <p:stCondLst>
-                                            <p:cond delay="0"/>
-                                          </p:stCondLst>
-                                        </p:cTn>
-                                        <p:tgtEl>
-                                          <p:spTgt spid="3">
-                                            <p:txEl>
-                                              <p:pRg st="2" end="2"/>
-                                            </p:txEl>
-                                          </p:spTgt>
-                                        </p:tgtEl>
-                                        <p:attrNameLst>
-                                          <p:attrName>style.visibility</p:attrName>
-                                        </p:attrNameLst>
-                                      </p:cBhvr>
-                                      <p:to>
-                                        <p:strVal val="visible"/>
-                                      </p:to>
-                                    </p:set>
-                                  </p:childTnLst>
-                                </p:cTn>
-                              </p:par>
-                              <p:par>
-                                <p:cTn id="7" presetID="1" presetClass="entr" presetSubtype="0" fill="hold" nodeType="withEffect">
-                                  <p:stCondLst>
-                                    <p:cond delay="0"/>
-                                  </p:stCondLst>
-                                  <p:childTnLst>
-                                    <p:set>
-                                      <p:cBhvr>
-                                        <p:cTn id="8" dur="1" fill="hold">
-                                          <p:stCondLst>
-                                            <p:cond delay="0"/>
-                                          </p:stCondLst>
-                                        </p:cTn>
-                                        <p:tgtEl>
-                                          <p:spTgt spid="3">
-                                            <p:txEl>
-                                              <p:pRg st="3" end="3"/>
-                                            </p:txEl>
-                                          </p:spTgt>
-                                        </p:tgtEl>
-                                        <p:attrNameLst>
-                                          <p:attrName>style.visibility</p:attrName>
-                                        </p:attrNameLst>
-                                      </p:cBhvr>
-                                      <p:to>
-                                        <p:strVal val="visible"/>
-                                      </p:to>
-                                    </p:set>
-                                  </p:childTnLst>
-                                </p:cTn>
-                              </p:par>
-                              <p:par>
-                                <p:cTn id="9" presetID="1" presetClass="entr" presetSubtype="0" fill="hold" nodeType="withEffect">
-                                  <p:stCondLst>
-                                    <p:cond delay="0"/>
-                                  </p:stCondLst>
-                                  <p:childTnLst>
-                                    <p:set>
-                                      <p:cBhvr>
-                                        <p:cTn id="10" dur="1" fill="hold">
-                                          <p:stCondLst>
-                                            <p:cond delay="0"/>
-                                          </p:stCondLst>
-                                        </p:cTn>
-                                        <p:tgtEl>
-                                          <p:spTgt spid="3">
-                                            <p:txEl>
-                                              <p:pRg st="4" end="4"/>
-                                            </p:txEl>
-                                          </p:spTgt>
-                                        </p:tgtEl>
-                                        <p:attrNameLst>
-                                          <p:attrName>style.visibility</p:attrName>
-                                        </p:attrNameLst>
-                                      </p:cBhvr>
-                                      <p:to>
-                                        <p:strVal val="visible"/>
-                                      </p:to>
-                                    </p:set>
-                                  </p:childTnLst>
-                                </p:cTn>
-                              </p:par>
-                            </p:childTnLst>
-                          </p:cTn>
-                        </p:par>
-                      </p:childTnLst>
-                    </p:cTn>
-                  </p:par>
-                  <p:par>
-                    <p:cTn id="11" fill="hold">
-                      <p:stCondLst>
-                        <p:cond delay="indefinite"/>
-                      </p:stCondLst>
-                      <p:childTnLst>
-                        <p:par>
-                          <p:cTn id="12" fill="hold">
-                            <p:stCondLst>
-                              <p:cond delay="0"/>
-                            </p:stCondLst>
-                            <p:childTnLst>
-                              <p:par>
-                                <p:cTn id="13" presetID="1" presetClass="entr" presetSubtype="0" fill="hold" nodeType="clickEffect">
-                                  <p:stCondLst>
-                                    <p:cond delay="0"/>
-                                  </p:stCondLst>
-                                  <p:childTnLst>
-                                    <p:set>
-                                      <p:cBhvr>
-                                        <p:cTn id="14" dur="1" fill="hold">
-                                          <p:stCondLst>
-                                            <p:cond delay="0"/>
-                                          </p:stCondLst>
-                                        </p:cTn>
-                                        <p:tgtEl>
-                                          <p:spTgt spid="3">
-                                            <p:txEl>
-                                              <p:pRg st="6" end="6"/>
-                                            </p:txEl>
-                                          </p:spTgt>
-                                        </p:tgtEl>
-                                        <p:attrNameLst>
-                                          <p:attrName>style.visibility</p:attrName>
-                                        </p:attrNameLst>
-                                      </p:cBhvr>
-                                      <p:to>
-                                        <p:strVal val="visible"/>
-                                      </p:to>
-                                    </p:set>
-                                  </p:childTnLst>
-                                </p:cTn>
-                              </p:par>
-                            </p:childTnLst>
-                          </p:cTn>
-                        </p:par>
-                      </p:childTnLst>
-                    </p:cTn>
-                  </p:par>
-                </p:childTnLst>
-              </p:cTn>
-              <p:prevCondLst>
-                <p:cond evt="onPrev" delay="0">
-                  <p:tgtEl>
-                    <p:sldTgt/>
-                  </p:tgtEl>
-                </p:cond>
-              </p:prevCondLst>
-              <p:nextCondLst>
-                <p:cond evt="onNext" delay="0">
-                  <p:tgtEl>
-                    <p:sldTgt/>
-                  </p:tgtEl>
-                </p:cond>
-              </p:nextCondLst>
-            </p:seq>
-          </p:childTnLst>
-        </p:cTn>
-      </p:par>
-    </p:tnLst>
-  </p:timing>
-</p:sld>
-</file>
-
-<file path=ppt/slides/slide3.xml><?xml version="1.0" encoding="utf-8"?>
+<file path=ppt/slides/slide4.xml><?xml version="1.0" encoding="utf-8"?>
 <p:sld xmlns:a="http://schemas.openxmlformats.org/drawingml/2006/main" xmlns:r="http://schemas.openxmlformats.org/officeDocument/2006/relationships" xmlns:p="http://schemas.openxmlformats.org/presentationml/2006/main">
   <p:cSld>
     <p:spTree>
@@ -12165,7 +18086,7 @@
             <a:fld id="{B82CCC60-E8CD-4174-8B1A-7DF615B22EEF}" type="slidenum">
               <a:rPr lang="en-US" smtClean="0"/>
               <a:pPr/>
-              <a:t>3</a:t>
+              <a:t>4</a:t>
             </a:fld>
             <a:endParaRPr lang="en-US"/>
           </a:p>
@@ -12302,7 +18223,7 @@
 </p:sld>
 </file>
 
-<file path=ppt/slides/slide4.xml><?xml version="1.0" encoding="utf-8"?>
+<file path=ppt/slides/slide5.xml><?xml version="1.0" encoding="utf-8"?>
 <p:sld xmlns:a="http://schemas.openxmlformats.org/drawingml/2006/main" xmlns:r="http://schemas.openxmlformats.org/officeDocument/2006/relationships" xmlns:p="http://schemas.openxmlformats.org/presentationml/2006/main">
   <p:cSld>
     <p:spTree>
@@ -12457,7 +18378,7 @@
             <a:fld id="{B82CCC60-E8CD-4174-8B1A-7DF615B22EEF}" type="slidenum">
               <a:rPr lang="en-US" smtClean="0"/>
               <a:pPr/>
-              <a:t>4</a:t>
+              <a:t>5</a:t>
             </a:fld>
             <a:endParaRPr lang="en-US"/>
           </a:p>
@@ -12715,7 +18636,7 @@
 </p:sld>
 </file>
 
-<file path=ppt/slides/slide5.xml><?xml version="1.0" encoding="utf-8"?>
+<file path=ppt/slides/slide6.xml><?xml version="1.0" encoding="utf-8"?>
 <p:sld xmlns:a="http://schemas.openxmlformats.org/drawingml/2006/main" xmlns:r="http://schemas.openxmlformats.org/officeDocument/2006/relationships" xmlns:p="http://schemas.openxmlformats.org/presentationml/2006/main">
   <p:cSld>
     <p:spTree>
@@ -12814,7 +18735,7 @@
             <a:fld id="{B82CCC60-E8CD-4174-8B1A-7DF615B22EEF}" type="slidenum">
               <a:rPr lang="en-US" smtClean="0"/>
               <a:pPr/>
-              <a:t>5</a:t>
+              <a:t>6</a:t>
             </a:fld>
             <a:endParaRPr lang="en-US"/>
           </a:p>
@@ -13671,7 +19592,7 @@
 </p:sld>
 </file>
 
-<file path=ppt/slides/slide6.xml><?xml version="1.0" encoding="utf-8"?>
+<file path=ppt/slides/slide7.xml><?xml version="1.0" encoding="utf-8"?>
 <p:sld xmlns:a="http://schemas.openxmlformats.org/drawingml/2006/main" xmlns:r="http://schemas.openxmlformats.org/officeDocument/2006/relationships" xmlns:p="http://schemas.openxmlformats.org/presentationml/2006/main">
   <p:cSld>
     <p:spTree>
@@ -13818,7 +19739,7 @@
             <a:fld id="{B82CCC60-E8CD-4174-8B1A-7DF615B22EEF}" type="slidenum">
               <a:rPr lang="en-US" smtClean="0"/>
               <a:pPr/>
-              <a:t>6</a:t>
+              <a:t>7</a:t>
             </a:fld>
             <a:endParaRPr lang="en-US"/>
           </a:p>
@@ -14178,7 +20099,7 @@
 </p:sld>
 </file>
 
-<file path=ppt/slides/slide7.xml><?xml version="1.0" encoding="utf-8"?>
+<file path=ppt/slides/slide8.xml><?xml version="1.0" encoding="utf-8"?>
 <p:sld xmlns:a="http://schemas.openxmlformats.org/drawingml/2006/main" xmlns:r="http://schemas.openxmlformats.org/officeDocument/2006/relationships" xmlns:p="http://schemas.openxmlformats.org/presentationml/2006/main">
   <p:cSld>
     <p:spTree>
@@ -14283,7 +20204,7 @@
             <a:fld id="{B82CCC60-E8CD-4174-8B1A-7DF615B22EEF}" type="slidenum">
               <a:rPr lang="en-US" smtClean="0"/>
               <a:pPr/>
-              <a:t>7</a:t>
+              <a:t>8</a:t>
             </a:fld>
             <a:endParaRPr lang="en-US"/>
           </a:p>
@@ -14643,172 +20564,6 @@
 </p:sld>
 </file>
 
-<file path=ppt/slides/slide8.xml><?xml version="1.0" encoding="utf-8"?>
-<p:sld xmlns:a="http://schemas.openxmlformats.org/drawingml/2006/main" xmlns:r="http://schemas.openxmlformats.org/officeDocument/2006/relationships" xmlns:p="http://schemas.openxmlformats.org/presentationml/2006/main">
-  <p:cSld>
-    <p:spTree>
-      <p:nvGrpSpPr>
-        <p:cNvPr id="1" name=""/>
-        <p:cNvGrpSpPr/>
-        <p:nvPr/>
-      </p:nvGrpSpPr>
-      <p:grpSpPr>
-        <a:xfrm>
-          <a:off x="0" y="0"/>
-          <a:ext cx="0" cy="0"/>
-          <a:chOff x="0" y="0"/>
-          <a:chExt cx="0" cy="0"/>
-        </a:xfrm>
-      </p:grpSpPr>
-      <p:sp>
-        <p:nvSpPr>
-          <p:cNvPr id="2" name="Title 1">
-            <a:extLst>
-              <a:ext uri="{FF2B5EF4-FFF2-40B4-BE49-F238E27FC236}">
-                <a16:creationId xmlns:a16="http://schemas.microsoft.com/office/drawing/2014/main" id="{A2B56500-20DD-5DBB-BD70-30BE33118D48}"/>
-              </a:ext>
-            </a:extLst>
-          </p:cNvPr>
-          <p:cNvSpPr>
-            <a:spLocks noGrp="1"/>
-          </p:cNvSpPr>
-          <p:nvPr>
-            <p:ph type="title"/>
-          </p:nvPr>
-        </p:nvSpPr>
-        <p:spPr/>
-        <p:txBody>
-          <a:bodyPr>
-            <a:normAutofit fontScale="90000"/>
-          </a:bodyPr>
-          <a:lstStyle/>
-          <a:p>
-            <a:r>
-              <a:rPr lang="en-US" dirty="0"/>
-              <a:t>Scaffolding algorithm</a:t>
-            </a:r>
-          </a:p>
-        </p:txBody>
-      </p:sp>
-      <p:sp>
-        <p:nvSpPr>
-          <p:cNvPr id="3" name="Content Placeholder 2">
-            <a:extLst>
-              <a:ext uri="{FF2B5EF4-FFF2-40B4-BE49-F238E27FC236}">
-                <a16:creationId xmlns:a16="http://schemas.microsoft.com/office/drawing/2014/main" id="{BFEFBCCA-663D-7473-6112-1D89D1146121}"/>
-              </a:ext>
-            </a:extLst>
-          </p:cNvPr>
-          <p:cNvSpPr>
-            <a:spLocks noGrp="1"/>
-          </p:cNvSpPr>
-          <p:nvPr>
-            <p:ph idx="1"/>
-          </p:nvPr>
-        </p:nvSpPr>
-        <p:spPr>
-          <a:xfrm>
-            <a:off x="598620" y="1596540"/>
-            <a:ext cx="10972800" cy="4876831"/>
-          </a:xfrm>
-        </p:spPr>
-        <p:txBody>
-          <a:bodyPr/>
-          <a:lstStyle/>
-          <a:p>
-            <a:r>
-              <a:rPr lang="en-US" dirty="0"/>
-              <a:t>Produce file containing five columns:</a:t>
-            </a:r>
-            <a:br>
-              <a:rPr lang="en-US" dirty="0"/>
-            </a:br>
-            <a:r>
-              <a:rPr lang="en-US" dirty="0"/>
-              <a:t>scaffold1 scaffold2 weight distance orientation</a:t>
-            </a:r>
-            <a:br>
-              <a:rPr lang="en-US" dirty="0"/>
-            </a:br>
-            <a:r>
-              <a:rPr lang="en-US" dirty="0"/>
-              <a:t>…</a:t>
-            </a:r>
-          </a:p>
-          <a:p>
-            <a:r>
-              <a:rPr lang="en-US" dirty="0"/>
-              <a:t>Make sure the “distance” does not place scaffolds on top of each other in any line</a:t>
-            </a:r>
-          </a:p>
-          <a:p>
-            <a:r>
-              <a:rPr lang="en-US" dirty="0"/>
-              <a:t>Sort by weight</a:t>
-            </a:r>
-          </a:p>
-          <a:p>
-            <a:r>
-              <a:rPr lang="en-US" dirty="0"/>
-              <a:t>Use greedy algorithm: choose the line with the highest weight, record the merge</a:t>
-            </a:r>
-          </a:p>
-          <a:p>
-            <a:r>
-              <a:rPr lang="en-US" dirty="0"/>
-              <a:t>Choose the line with the next highest weight and merge</a:t>
-            </a:r>
-            <a:r>
-              <a:rPr lang="en-US"/>
-              <a:t>…etc.</a:t>
-            </a:r>
-            <a:endParaRPr lang="en-US" dirty="0"/>
-          </a:p>
-        </p:txBody>
-      </p:sp>
-      <p:sp>
-        <p:nvSpPr>
-          <p:cNvPr id="4" name="Slide Number Placeholder 3">
-            <a:extLst>
-              <a:ext uri="{FF2B5EF4-FFF2-40B4-BE49-F238E27FC236}">
-                <a16:creationId xmlns:a16="http://schemas.microsoft.com/office/drawing/2014/main" id="{CB9B3750-C657-19AA-2676-7B55D9E52B4E}"/>
-              </a:ext>
-            </a:extLst>
-          </p:cNvPr>
-          <p:cNvSpPr>
-            <a:spLocks noGrp="1"/>
-          </p:cNvSpPr>
-          <p:nvPr>
-            <p:ph type="sldNum" sz="quarter" idx="12"/>
-          </p:nvPr>
-        </p:nvSpPr>
-        <p:spPr/>
-        <p:txBody>
-          <a:bodyPr/>
-          <a:lstStyle/>
-          <a:p>
-            <a:fld id="{B82CCC60-E8CD-4174-8B1A-7DF615B22EEF}" type="slidenum">
-              <a:rPr lang="en-US" smtClean="0"/>
-              <a:pPr/>
-              <a:t>8</a:t>
-            </a:fld>
-            <a:endParaRPr lang="en-US"/>
-          </a:p>
-        </p:txBody>
-      </p:sp>
-    </p:spTree>
-    <p:extLst>
-      <p:ext uri="{BB962C8B-B14F-4D97-AF65-F5344CB8AC3E}">
-        <p14:creationId xmlns:p14="http://schemas.microsoft.com/office/powerpoint/2010/main" val="1732587043"/>
-      </p:ext>
-    </p:extLst>
-  </p:cSld>
-  <p:clrMapOvr>
-    <a:masterClrMapping/>
-  </p:clrMapOvr>
-</p:sld>
-</file>
-
 <file path=ppt/slides/slide9.xml><?xml version="1.0" encoding="utf-8"?>
 <p:sld xmlns:a="http://schemas.openxmlformats.org/drawingml/2006/main" xmlns:r="http://schemas.openxmlformats.org/officeDocument/2006/relationships" xmlns:p="http://schemas.openxmlformats.org/presentationml/2006/main">
   <p:cSld>
@@ -14831,7 +20586,7 @@
           <p:cNvPr id="2" name="Title 1">
             <a:extLst>
               <a:ext uri="{FF2B5EF4-FFF2-40B4-BE49-F238E27FC236}">
-                <a16:creationId xmlns:a16="http://schemas.microsoft.com/office/drawing/2014/main" id="{B265423D-4484-3F65-D8B5-8EE04CFFCBC8}"/>
+                <a16:creationId xmlns:a16="http://schemas.microsoft.com/office/drawing/2014/main" id="{A2B56500-20DD-5DBB-BD70-30BE33118D48}"/>
               </a:ext>
             </a:extLst>
           </p:cNvPr>
@@ -14851,7 +20606,7 @@
           <a:p>
             <a:r>
               <a:rPr lang="en-US" dirty="0"/>
-              <a:t>Errors in genome assemblies</a:t>
+              <a:t>Scaffolding algorithm</a:t>
             </a:r>
           </a:p>
         </p:txBody>
@@ -14861,7 +20616,7 @@
           <p:cNvPr id="3" name="Content Placeholder 2">
             <a:extLst>
               <a:ext uri="{FF2B5EF4-FFF2-40B4-BE49-F238E27FC236}">
-                <a16:creationId xmlns:a16="http://schemas.microsoft.com/office/drawing/2014/main" id="{88ADD349-F89E-FD69-9964-FBA923DD6475}"/>
+                <a16:creationId xmlns:a16="http://schemas.microsoft.com/office/drawing/2014/main" id="{BFEFBCCA-663D-7473-6112-1D89D1146121}"/>
               </a:ext>
             </a:extLst>
           </p:cNvPr>
@@ -14872,63 +20627,63 @@
             <p:ph idx="1"/>
           </p:nvPr>
         </p:nvSpPr>
-        <p:spPr/>
+        <p:spPr>
+          <a:xfrm>
+            <a:off x="598620" y="1596540"/>
+            <a:ext cx="10972800" cy="4876831"/>
+          </a:xfrm>
+        </p:spPr>
         <p:txBody>
-          <a:bodyPr>
-            <a:normAutofit fontScale="92500" lnSpcReduction="20000"/>
-          </a:bodyPr>
+          <a:bodyPr/>
           <a:lstStyle/>
           <a:p>
             <a:r>
               <a:rPr lang="en-US" dirty="0"/>
-              <a:t>Repeats in the genome and errors in the reads cause errors</a:t>
-            </a:r>
-          </a:p>
-          <a:p>
+              <a:t>Produce file containing five columns:</a:t>
+            </a:r>
+            <a:br>
+              <a:rPr lang="en-US" dirty="0"/>
+            </a:br>
+            <a:r>
+              <a:rPr lang="en-US" dirty="0"/>
+              <a:t>scaffold1 scaffold2 weight distance orientation</a:t>
+            </a:r>
+            <a:br>
+              <a:rPr lang="en-US" dirty="0"/>
+            </a:br>
+            <a:r>
+              <a:rPr lang="en-US" dirty="0"/>
+              <a:t>…</a:t>
+            </a:r>
+          </a:p>
+          <a:p>
+            <a:r>
+              <a:rPr lang="en-US" dirty="0"/>
+              <a:t>Make sure the “distance” does not place scaffolds on top of each other in any line</a:t>
+            </a:r>
+          </a:p>
+          <a:p>
+            <a:r>
+              <a:rPr lang="en-US" dirty="0"/>
+              <a:t>Sort by weight</a:t>
+            </a:r>
+          </a:p>
+          <a:p>
+            <a:r>
+              <a:rPr lang="en-US" dirty="0"/>
+              <a:t>Use greedy algorithm: choose the line with the highest weight, record the merge</a:t>
+            </a:r>
+          </a:p>
+          <a:p>
+            <a:r>
+              <a:rPr lang="en-US" dirty="0"/>
+              <a:t>Choose the line with the next highest weight and merge</a:t>
+            </a:r>
+            <a:r>
+              <a:rPr lang="en-US"/>
+              <a:t>…etc.</a:t>
+            </a:r>
             <a:endParaRPr lang="en-US" dirty="0"/>
-          </a:p>
-          <a:p>
-            <a:r>
-              <a:rPr lang="en-US" dirty="0"/>
-              <a:t>Large scale structural errors:</a:t>
-            </a:r>
-          </a:p>
-          <a:p>
-            <a:pPr lvl="1"/>
-            <a:r>
-              <a:rPr lang="en-US" dirty="0"/>
-              <a:t>Chimeric contigs, contain two sequences erroneously merged</a:t>
-            </a:r>
-          </a:p>
-          <a:p>
-            <a:pPr lvl="1"/>
-            <a:r>
-              <a:rPr lang="en-US" dirty="0"/>
-              <a:t>Insertions or deletions (e.g. wrong number of repeat copies)</a:t>
-            </a:r>
-          </a:p>
-          <a:p>
-            <a:endParaRPr lang="en-US" dirty="0"/>
-          </a:p>
-          <a:p>
-            <a:r>
-              <a:rPr lang="en-US" dirty="0"/>
-              <a:t>Small scale errors</a:t>
-            </a:r>
-          </a:p>
-          <a:p>
-            <a:pPr lvl="1"/>
-            <a:r>
-              <a:rPr lang="en-US" dirty="0"/>
-              <a:t>Insertions or deletions of up to 5-10 bases</a:t>
-            </a:r>
-          </a:p>
-          <a:p>
-            <a:pPr lvl="1"/>
-            <a:r>
-              <a:rPr lang="en-US" dirty="0"/>
-              <a:t>Substitutions</a:t>
-            </a:r>
           </a:p>
         </p:txBody>
       </p:sp>
@@ -14937,7 +20692,7 @@
           <p:cNvPr id="4" name="Slide Number Placeholder 3">
             <a:extLst>
               <a:ext uri="{FF2B5EF4-FFF2-40B4-BE49-F238E27FC236}">
-                <a16:creationId xmlns:a16="http://schemas.microsoft.com/office/drawing/2014/main" id="{9BF51E34-9EF2-88F9-3254-27793F61BB9C}"/>
+                <a16:creationId xmlns:a16="http://schemas.microsoft.com/office/drawing/2014/main" id="{CB9B3750-C657-19AA-2676-7B55D9E52B4E}"/>
               </a:ext>
             </a:extLst>
           </p:cNvPr>
@@ -14965,7 +20720,7 @@
     </p:spTree>
     <p:extLst>
       <p:ext uri="{BB962C8B-B14F-4D97-AF65-F5344CB8AC3E}">
-        <p14:creationId xmlns:p14="http://schemas.microsoft.com/office/powerpoint/2010/main" val="3801788517"/>
+        <p14:creationId xmlns:p14="http://schemas.microsoft.com/office/powerpoint/2010/main" val="1732587043"/>
       </p:ext>
     </p:extLst>
   </p:cSld>
